--- a/docs/architecture-managed.pptx
+++ b/docs/architecture-managed.pptx
@@ -511,22 +511,37 @@
           <a:lstStyle/>
           <a:p>
             <a:r>
-              <a:t>- 東京リージョンの閉域で、収集から修復までをできる限り AWS のマネージドサービスで組む。</a:t>
-            </a:r>
-          </a:p>
-          <a:p>
-            <a:r>
-              <a:t>- 格納先は STORES（既定は s3,grafana,splunk の 3 つとも）で選ぶ。Spark のジョブはまとまりごとに 1 つ。</a:t>
-            </a:r>
-          </a:p>
-          <a:p>
-            <a:r>
-              <a:t>- Neptune Analytics はトポロジと status を持つ。Web・エージェント・Temporal が読む。</a:t>
-            </a:r>
-          </a:p>
-          <a:p>
-            <a:r>
-              <a:t>- 画面（Web・Grafana・Splunk・Temporal・Nautobot・Kafbat UI）は SSM のポートフォワードで開く。</a:t>
+              <a:t>- 元の 2 枚目は絵だったが、外した部品（ECS の Kafbat UI、Telegraf の 2 サービス）が描かれていたので 2 列の箇条書きにした（docs/cycles/021-architecture-decks/build.md）。</a:t>
+            </a:r>
+          </a:p>
+          <a:p>
+            <a:r>
+              <a:t>- 東京リージョン（ap-northeast-1）の閉域（VPC エンドポイント + Deny）で組む（docs/architecture/core.md）。</a:t>
+            </a:r>
+          </a:p>
+          <a:p>
+            <a:r>
+              <a:t>- lab: docs/architecture/resources/lab-ec2.md。x86 の m6i.xlarge に SR Linux 6 台（s-leaf 2・spine 2・a-leaf 2。IS-IS + iBGP の EVPN-VXLAN）と TRex 1 台（dc1-trex-01）。</a:t>
+            </a:r>
+          </a:p>
+          <a:p>
+            <a:r>
+              <a:t>- 収集 4 種は gnmic・Telegraf（trap）・syslog-ng・GoFlow2（README.md の「作るもの」、docs/architecture/pipeline.md）。</a:t>
+            </a:r>
+          </a:p>
+          <a:p>
+            <a:r>
+              <a:t>- Spark は EMR Serverless。格納先 4 つは S3 Tables・OpenSearch Serverless・AMP・Splunk で、STORES（既定は s3,grafana,splunk の 3 つとも）で選ぶ（docs/deploy.md の STORES）。</a:t>
+            </a:r>
+          </a:p>
+          <a:p>
+            <a:r>
+              <a:t>- アラートは Grafana と Splunk が出す。戻りは SNS → SQS → Temporal → エージェント → Web の承認タブ → SSM Run Command（docs/architecture/workflow.md）。</a:t>
+            </a:r>
+          </a:p>
+          <a:p>
+            <a:r>
+              <a:t>- Neptune Analytics はトポロジと status を持ち、Web・エージェント・Temporal が読む。Nautobot は機器とケーブルの正。</a:t>
             </a:r>
           </a:p>
         </p:txBody>
@@ -596,17 +611,37 @@
           <a:lstStyle/>
           <a:p>
             <a:r>
-              <a:t>- up.sh の順: base/ecr → base/core → agent → lab → stream → graph → nautobot → analytics → workflow。</a:t>
-            </a:r>
-          </a:p>
-          <a:p>
-            <a:r>
-              <a:t>- graph は base/core のあと裏で始める。agent は AGENT=1、workflow は WORKFLOW=1、pipeline の 5 つは PIPELINE=1。</a:t>
-            </a:r>
-          </a:p>
-          <a:p>
-            <a:r>
-              <a:t>- 接頭辞は &lt;owner&gt;-nwc-poc。lab-debug は別の CloudFormation スタックで、ここには入らない。</a:t>
+              <a:t>- ルートは IaC/terraform/aws-managed/&lt;ルート&gt;。</a:t>
+            </a:r>
+          </a:p>
+          <a:p>
+            <a:r>
+              <a:t>- 数え方: ルートの *.tf をつないで grep -c '^resource "'（2026-10-09、origin/main 9fb0616）。count・for_each で増える実数ではない。元のデッキ（2026-10-08）から変わったのは agent 21 → 22 と stream 37 → 57（013 で gnmic・syslog-ng・GoFlow2 が入り、telegraf-dialin が外れた）。</a:t>
+            </a:r>
+          </a:p>
+          <a:p>
+            <a:r>
+              <a:t>- stream の 57 の内訳: telegraf.tf 15、collectors.tf 20（syslog-ng・GoFlow2）、gnmic.tf 12、msk.tf 5、kafka_ui.tf 4（Web の EC2 で動く Kafbat UI の接続先。ECS のタスクではない）、access.tf 1。</a:t>
+            </a:r>
+          </a:p>
+          <a:p>
+            <a:r>
+              <a:t>- workflow の MCP は AgentCore Gateway。analytics の格納先は S3 Tables・OpenSearch Serverless・AMP。</a:t>
+            </a:r>
+          </a:p>
+          <a:p>
+            <a:r>
+              <a:t>- ops/up.sh の順（ROOTS は ops/up.sh:469）: base/ecr → base/core → agent → lab → stream → graph → nautobot → analytics → workflow。graph は base/core のあと裏で始め、stream のあとで待つ。</a:t>
+            </a:r>
+          </a:p>
+          <a:p>
+            <a:r>
+              <a:t>- agent は AGENT=1、workflow は WORKFLOW=1、pipeline の 5 つは PIPELINE=1。接頭辞は &lt;owner&gt;-nwc-poc。</a:t>
+            </a:r>
+          </a:p>
+          <a:p>
+            <a:r>
+              <a:t>- lab-debug は別の CloudFormation スタックで、ここには入らない（ops/lab-debug.sh）。</a:t>
             </a:r>
           </a:p>
         </p:txBody>
@@ -676,12 +711,32 @@
           <a:lstStyle/>
           <a:p>
             <a:r>
-              <a:t>- アラートの 4 種は link_down・bgp_down・isis_down・trap。Grafana のルールと Splunk の保存済みサーチの両方が出す。</a:t>
-            </a:r>
-          </a:p>
-          <a:p>
-            <a:r>
-              <a:t>- ワークフローを起こすのは link_down だけ。承認してから数秒〜20 秒で効く。</a:t>
+              <a:t>- 元の 4 枚目は絵だったが、1 段目に古い収集（Telegraf が trap・syslog を受け gNMI・SNMP を取る）が描かれていたので箇条書きにした（build.md）。</a:t>
+            </a:r>
+          </a:p>
+          <a:p>
+            <a:r>
+              <a:t>- 1: gnmic・Telegraf（trap）・syslog-ng・GoFlow2。トピックは metrics・gnmi・traps・logs・flows（docs/architecture/resources/msk.md）。</a:t>
+            </a:r>
+          </a:p>
+          <a:p>
+            <a:r>
+              <a:t>- 2: 格納先は S3 Tables・OpenSearch Serverless・AMP・Splunk（5 枚目）。</a:t>
+            </a:r>
+          </a:p>
+          <a:p>
+            <a:r>
+              <a:t>- 4: アラートの 4 種は link_down・bgp_down・isis_down・trap。Grafana のルールと Splunk の保存済みサーチの両方が出す（docs/architecture/pipeline.md:34）。</a:t>
+            </a:r>
+          </a:p>
+          <a:p>
+            <a:r>
+              <a:t>- 5: SQS → Temporal → Web の承認タブ → SSM Run Command。承認を押してから承認タブに出るまで数秒〜20 秒（docs/workflow.md:27）。</a:t>
+            </a:r>
+          </a:p>
+          <a:p>
+            <a:r>
+              <a:t>- 6: AgentCore Runtime。ツールは workflow の Gateway（MCP）の先の Lambda。ワークフローのほか、Web のチャットからも呼べる（docs/architecture/agent.md、workflow.md）。</a:t>
             </a:r>
           </a:p>
         </p:txBody>
@@ -751,12 +806,27 @@
           <a:lstStyle/>
           <a:p>
             <a:r>
-              <a:t>- MSK のトピックは metrics・gnmi・mdt・traps・logs の 5 つ。</a:t>
-            </a:r>
-          </a:p>
-          <a:p>
-            <a:r>
-              <a:t>- Cisco は MDT の dial-out（57000）で受ける方針。lab の SR Linux は MDT を送れないので gNMI で取る。</a:t>
+              <a:t>- 受ける側の 3 種は Telegraf（trap）・syslog-ng・GoFlow2。gnmic は機器の gNMI（57400/tcp）を購読する。</a:t>
+            </a:r>
+          </a:p>
+          <a:p>
+            <a:r>
+              <a:t>- MSK のトピックは 5 つ: metrics（gnmic のカウンター）、gnmi（gnmic の状態。on-change）、traps（Telegraf）、logs（syslog-ng）、flows（GoFlow2）（docs/architecture/resources/msk.md）。</a:t>
+            </a:r>
+          </a:p>
+          <a:p>
+            <a:r>
+              <a:t>- MSK の認証: Telegraf・Spark・Web（Kafbat UI）は IAM の 9098、syslog-ng・GoFlow2・gnmic は SASL/SCRAM の 9096（docs/architecture/core.md の SG の表）。</a:t>
+            </a:r>
+          </a:p>
+          <a:p>
+            <a:r>
+              <a:t>- 受け口: trap 162/udp、syslog 5140/udp、NetFlow 2055/udp、sFlow 6343/udp（lab の管理網 → NLB）。</a:t>
+            </a:r>
+          </a:p>
+          <a:p>
+            <a:r>
+              <a:t>- STORES とトピックの対応、ジョブはまとまりごとに 1 つで 1 つ $0.21/h は docs/deploy.md の STORES の行。</a:t>
             </a:r>
           </a:p>
         </p:txBody>
@@ -826,22 +896,17 @@
           <a:lstStyle/>
           <a:p>
             <a:r>
-              <a:t>- 開けていないもの: Temporal の gRPC 7233、Splunk の管理 API 8089（docs/architecture/core.md）。</a:t>
-            </a:r>
-          </a:p>
-          <a:p>
-            <a:r>
-              <a:t>- ほかの行: nautobot → nautobot_db 5432、msk どうし 9092–9098、spark どうし全 TCP、Splunk のクラスター内 8089・9887・9997。</a:t>
-            </a:r>
-          </a:p>
-          <a:p>
-            <a:r>
-              <a:t>- NLB → telegraf_dialout は 1162/udp・5140/udp・57000・8080（ヘルスチェック）。MDT_SOURCE_CIDRS（既定は空）から NLB の 57000。</a:t>
-            </a:r>
-          </a:p>
-          <a:p>
-            <a:r>
-              <a:t>- Neptune Analytics には SG が無く、neptune-graph-data のエンドポイント（443）で届く。</a:t>
+              <a:t>- アラートの集め方: docs/architecture/pipeline.md:34。SNS のトピックは &lt;prefix&gt;-alerts（土台）。</a:t>
+            </a:r>
+          </a:p>
+          <a:p>
+            <a:r>
+              <a:t>- 障害の履歴: Lambda graph-status が Firehose で S3 Tables の alert_events に追記（docs/architecture/pipeline.md:35）。</a:t>
+            </a:r>
+          </a:p>
+          <a:p>
+            <a:r>
+              <a:t>- 修復案は S3 Tables の proposal_events だけに置き、書くのは worker だけ（docs/architecture/workflow.md:21）。</a:t>
             </a:r>
           </a:p>
         </p:txBody>
@@ -911,17 +976,312 @@
           <a:lstStyle/>
           <a:p>
             <a:r>
-              <a:t>- PIPELINE の内訳: Neptune Analytics $0.58、STORES の grafana 約 $0.60、splunk 約 $0.34、Nautobot $0.14。</a:t>
-            </a:r>
-          </a:p>
-          <a:p>
-            <a:r>
-              <a:t>- PIPELINE の 40〜60 分のうち MSK だけで 20〜30 分。</a:t>
+              <a:t>- 正: docs/architecture/core.md の SG の表（IaC/terraform/aws-managed/base/core/security_groups.tf の local.sg_flows）。</a:t>
+            </a:r>
+          </a:p>
+          <a:p>
+            <a:r>
+              <a:t>- 9098 は telegraf_dialout・spark・web（Kafbat UI）、9096 は syslog_ng・goflow2・gnmic。</a:t>
+            </a:r>
+          </a:p>
+          <a:p>
+            <a:r>
+              <a:t>- 受ける側の 3 種は telegraf_dialout・syslog_ng・goflow2。NLB → 各タスクは 1162/udp と 8080、5140/udp と tcp、2055/udp・6343/udp と 8081（ヘルスチェック）。lab の管理網は 203.0.113.0/24。</a:t>
+            </a:r>
+          </a:p>
+          <a:p>
+            <a:r>
+              <a:t>- ほかの行: spark → splunk 8088（HEC）、nautobot → nautobot_db 5432、msk どうし 9092〜9098、spark どうし全 TCP、Splunk のクラスター内 8089・9887・9997。</a:t>
+            </a:r>
+          </a:p>
+          <a:p>
+            <a:r>
+              <a:t>- 開けていないもの: Temporal の gRPC 7233、Splunk の管理 API 8089 の外からの受信。Kafbat UI は Web の EC2 の中なので SG を通らない。</a:t>
+            </a:r>
+          </a:p>
+          <a:p>
+            <a:r>
+              <a:t>- Neptune Analytics には SG が無く、neptune-graph-data のエンドポイント（443）で届く。</a:t>
+            </a:r>
+          </a:p>
+        </p:txBody>
+      </p:sp>
+      <p:sp>
+        <p:nvSpPr>
+          <p:cNvPr id="4" name="Slide Number Placeholder 3"/>
+          <p:cNvSpPr>
+            <a:spLocks noGrp="1"/>
+          </p:cNvSpPr>
+          <p:nvPr>
+            <p:ph type="sldNum" idx="5" sz="quarter"/>
+          </p:nvPr>
+        </p:nvSpPr>
+        <p:spPr/>
+      </p:sp>
+    </p:spTree>
+  </p:cSld>
+  <p:clrMapOvr>
+    <a:masterClrMapping/>
+  </p:clrMapOvr>
+</p:notes>
+</file>
+
+<file path=ppt/notesSlides/notesSlide7.xml><?xml version="1.0" encoding="utf-8"?>
+<p:notes xmlns:a="http://schemas.openxmlformats.org/drawingml/2006/main" xmlns:p="http://schemas.openxmlformats.org/presentationml/2006/main" xmlns:r="http://schemas.openxmlformats.org/officeDocument/2006/relationships">
+  <p:cSld>
+    <p:spTree>
+      <p:nvGrpSpPr>
+        <p:cNvPr id="1" name=""/>
+        <p:cNvGrpSpPr/>
+        <p:nvPr/>
+      </p:nvGrpSpPr>
+      <p:grpSpPr>
+        <a:xfrm>
+          <a:off x="0" y="0"/>
+          <a:ext cx="0" cy="0"/>
+          <a:chOff x="0" y="0"/>
+          <a:chExt cx="0" cy="0"/>
+        </a:xfrm>
+      </p:grpSpPr>
+      <p:sp>
+        <p:nvSpPr>
+          <p:cNvPr id="2" name="Slide Image Placeholder 1"/>
+          <p:cNvSpPr>
+            <a:spLocks noGrp="1"/>
+          </p:cNvSpPr>
+          <p:nvPr>
+            <p:ph type="sldImg" idx="2"/>
+          </p:nvPr>
+        </p:nvSpPr>
+        <p:spPr/>
+      </p:sp>
+      <p:sp>
+        <p:nvSpPr>
+          <p:cNvPr id="3" name="Notes Placeholder 2"/>
+          <p:cNvSpPr>
+            <a:spLocks noGrp="1"/>
+          </p:cNvSpPr>
+          <p:nvPr>
+            <p:ph type="body" idx="3" sz="quarter"/>
+          </p:nvPr>
+        </p:nvSpPr>
+        <p:spPr/>
+        <p:txBody>
+          <a:bodyPr/>
+          <a:lstStyle/>
+          <a:p>
+            <a:r>
+              <a:t>- 金額は東京の待機の時間課金で、AZ の数が既定のとき（ops/up.sh の費用の目安）。</a:t>
+            </a:r>
+          </a:p>
+          <a:p>
+            <a:r>
+              <a:t>- 正は ops/up.sh の COST_CENTS の式（ops/up.sh:556〜）。機能ごとに式を切り出して計算した値: 土台 7 セント、AGENT +7、KB +35、PIPELINE +285（STORES 既定）、WORKFLOW +9、PIPELINE と土台 292、STORES=s3 だけ 199。README.md の「作るもの」と同じ。</a:t>
+            </a:r>
+          </a:p>
+          <a:p>
+            <a:r>
+              <a:t>- 1 か月: $2.92 × 730 h ≈ $2,132（約 32 万円）。元のデッキ（$2.80/h、約 $2,000）から 013 の収集 4 種などで上がった。</a:t>
+            </a:r>
+          </a:p>
+          <a:p>
+            <a:r>
+              <a:t>- PIPELINE の内訳: Neptune Analytics $0.58、STORES の grafana 約 $0.60、splunk 約 $0.34、Nautobot $0.13 と ecs のエンドポイント $0.014（docs/deploy.md の STORES と Nautobot の行）。</a:t>
+            </a:r>
+          </a:p>
+          <a:p>
+            <a:r>
+              <a:t>- 作る時間は README.md の手順。PIPELINE の 40〜60 分のうち MSK だけで約 30 分（2026-10-09 の AWS で Creation complete after 30m0s）。</a:t>
             </a:r>
           </a:p>
           <a:p>
             <a:r>
               <a:t>- インターフェース型エンドポイントは 1 本 $0.014/h（1 AZ のとき）。</a:t>
+            </a:r>
+          </a:p>
+        </p:txBody>
+      </p:sp>
+      <p:sp>
+        <p:nvSpPr>
+          <p:cNvPr id="4" name="Slide Number Placeholder 3"/>
+          <p:cNvSpPr>
+            <a:spLocks noGrp="1"/>
+          </p:cNvSpPr>
+          <p:nvPr>
+            <p:ph type="sldNum" idx="5" sz="quarter"/>
+          </p:nvPr>
+        </p:nvSpPr>
+        <p:spPr/>
+      </p:sp>
+    </p:spTree>
+  </p:cSld>
+  <p:clrMapOvr>
+    <a:masterClrMapping/>
+  </p:clrMapOvr>
+</p:notes>
+</file>
+
+<file path=ppt/notesSlides/notesSlide8.xml><?xml version="1.0" encoding="utf-8"?>
+<p:notes xmlns:a="http://schemas.openxmlformats.org/drawingml/2006/main" xmlns:p="http://schemas.openxmlformats.org/presentationml/2006/main" xmlns:r="http://schemas.openxmlformats.org/officeDocument/2006/relationships">
+  <p:cSld>
+    <p:spTree>
+      <p:nvGrpSpPr>
+        <p:cNvPr id="1" name=""/>
+        <p:cNvGrpSpPr/>
+        <p:nvPr/>
+      </p:nvGrpSpPr>
+      <p:grpSpPr>
+        <a:xfrm>
+          <a:off x="0" y="0"/>
+          <a:ext cx="0" cy="0"/>
+          <a:chOff x="0" y="0"/>
+          <a:chExt cx="0" cy="0"/>
+        </a:xfrm>
+      </p:grpSpPr>
+      <p:sp>
+        <p:nvSpPr>
+          <p:cNvPr id="2" name="Slide Image Placeholder 1"/>
+          <p:cNvSpPr>
+            <a:spLocks noGrp="1"/>
+          </p:cNvSpPr>
+          <p:nvPr>
+            <p:ph type="sldImg" idx="2"/>
+          </p:nvPr>
+        </p:nvSpPr>
+        <p:spPr/>
+      </p:sp>
+      <p:sp>
+        <p:nvSpPr>
+          <p:cNvPr id="3" name="Notes Placeholder 2"/>
+          <p:cNvSpPr>
+            <a:spLocks noGrp="1"/>
+          </p:cNvSpPr>
+          <p:nvPr>
+            <p:ph type="body" idx="3" sz="quarter"/>
+          </p:nvPr>
+        </p:nvSpPr>
+        <p:spPr/>
+        <p:txBody>
+          <a:bodyPr/>
+          <a:lstStyle/>
+          <a:p>
+            <a:r>
+              <a:t>- 正: docs/deploy.md の「消す順」（ops/down.sh）。順は workflow → analytics → nautobot → graph → stream → lab → agent → base/core → base/ecr → Runtime のロググループ → SSM のパラメータ → MSK の SCRAM の secret と KMS の鍵。</a:t>
+            </a:r>
+          </a:p>
+          <a:p>
+            <a:r>
+              <a:t>- analytics では Spark のジョブを cancel してから消す。nautobot の RDS は最後のスナップショットを取らない。</a:t>
+            </a:r>
+          </a:p>
+          <a:p>
+            <a:r>
+              <a:t>- SSM のパラメータはタグ ManagedBy=ops/up.sh のものだけ。secret は Secrets Manager の AmazonMSK_&lt;prefix&gt;-collectors、鍵は alias/&lt;prefix&gt;-msk-scram。値は読まない。</a:t>
+            </a:r>
+          </a:p>
+          <a:p>
+            <a:r>
+              <a:t>- Runtime の ENI が残るあいだは VPC 一式を残して他を消し、終了コード 0 で終わる。次の ops/up.sh が使い回す。</a:t>
+            </a:r>
+          </a:p>
+          <a:p>
+            <a:r>
+              <a:t>- 20〜40 分残る ENI は graph・workflow・KB（&lt;prefix&gt;-kb-index）の Lambda のもの。</a:t>
+            </a:r>
+          </a:p>
+          <a:p>
+            <a:r>
+              <a:t>- KEEP_ECR=1 の ECR は 7.39 GB で月 約 110 円（docs/deploy.md の「消したあとに残るもの」）。</a:t>
+            </a:r>
+          </a:p>
+        </p:txBody>
+      </p:sp>
+      <p:sp>
+        <p:nvSpPr>
+          <p:cNvPr id="4" name="Slide Number Placeholder 3"/>
+          <p:cNvSpPr>
+            <a:spLocks noGrp="1"/>
+          </p:cNvSpPr>
+          <p:nvPr>
+            <p:ph type="sldNum" idx="5" sz="quarter"/>
+          </p:nvPr>
+        </p:nvSpPr>
+        <p:spPr/>
+      </p:sp>
+    </p:spTree>
+  </p:cSld>
+  <p:clrMapOvr>
+    <a:masterClrMapping/>
+  </p:clrMapOvr>
+</p:notes>
+</file>
+
+<file path=ppt/notesSlides/notesSlide9.xml><?xml version="1.0" encoding="utf-8"?>
+<p:notes xmlns:a="http://schemas.openxmlformats.org/drawingml/2006/main" xmlns:p="http://schemas.openxmlformats.org/presentationml/2006/main" xmlns:r="http://schemas.openxmlformats.org/officeDocument/2006/relationships">
+  <p:cSld>
+    <p:spTree>
+      <p:nvGrpSpPr>
+        <p:cNvPr id="1" name=""/>
+        <p:cNvGrpSpPr/>
+        <p:nvPr/>
+      </p:nvGrpSpPr>
+      <p:grpSpPr>
+        <a:xfrm>
+          <a:off x="0" y="0"/>
+          <a:ext cx="0" cy="0"/>
+          <a:chOff x="0" y="0"/>
+          <a:chExt cx="0" cy="0"/>
+        </a:xfrm>
+      </p:grpSpPr>
+      <p:sp>
+        <p:nvSpPr>
+          <p:cNvPr id="2" name="Slide Image Placeholder 1"/>
+          <p:cNvSpPr>
+            <a:spLocks noGrp="1"/>
+          </p:cNvSpPr>
+          <p:nvPr>
+            <p:ph type="sldImg" idx="2"/>
+          </p:nvPr>
+        </p:nvSpPr>
+        <p:spPr/>
+      </p:sp>
+      <p:sp>
+        <p:nvSpPr>
+          <p:cNvPr id="3" name="Notes Placeholder 2"/>
+          <p:cNvSpPr>
+            <a:spLocks noGrp="1"/>
+          </p:cNvSpPr>
+          <p:nvPr>
+            <p:ph type="body" idx="3" sz="quarter"/>
+          </p:nvPr>
+        </p:nvSpPr>
+        <p:spPr/>
+        <p:txBody>
+          <a:bodyPr/>
+          <a:lstStyle/>
+          <a:p>
+            <a:r>
+              <a:t>- どれも SSM のポートフォワードを打ってから開く。正: README.md の「GUI の一覧」。開くコマンドは各ルートの terraform output（例 IaC/terraform/aws-managed/base/core の start_session_command）。</a:t>
+            </a:r>
+          </a:p>
+          <a:p>
+            <a:r>
+              <a:t>- 要る機能: Web（チャット・トポロジ・承認）は土台、Kafbat UI は PIPELINE（stream。Web の EC2 の Docker。010 で ECS から移った）、Nautobot は PIPELINE、Grafana は PIPELINE の grafana、Splunk は PIPELINE の splunk、Temporal UI は WORKFLOW。</a:t>
+            </a:r>
+          </a:p>
+          <a:p>
+            <a:r>
+              <a:t>- Splunk の cluster manager は 8001（SPLUNK_AZ_NUM が 2 か 3 のとき）。</a:t>
+            </a:r>
+          </a:p>
+          <a:p>
+            <a:r>
+              <a:t>- lab の図（containerlab graph）: lab の EC2 で sudo lab graph が 127.0.0.1:50080 に出し、IaC/terraform/aws-managed/pipeline/lab の output graph_port_forward_command で localhost:50080 に開く（docs/pipeline.md）。AWS では未確認。</a:t>
+            </a:r>
+          </a:p>
+          <a:p>
+            <a:r>
+              <a:t>- 元のタイトル「画面はどれも Web の EC2 を踏み台に localhost で開く」は、lab の図が加わって事実が変わったので直した。</a:t>
             </a:r>
           </a:p>
         </p:txBody>
@@ -4092,7 +4452,7 @@
                 <a:ea typeface="Menlo"/>
                 <a:cs typeface="Menlo"/>
               </a:rPr>
-              <a:t>2026-10-08  /  docs/architecture/、README、ops/up.sh・down.sh、terraform/</a:t>
+              <a:t>2026-10-09  /  docs/architecture/、README.md、docs/deploy.md、ops/up.sh・down.sh、IaC/terraform/aws-managed/</a:t>
             </a:r>
           </a:p>
         </p:txBody>
@@ -4203,7 +4563,1193 @@
                 <a:ea typeface="Noto Sans JP"/>
                 <a:cs typeface="Noto Sans JP"/>
               </a:rPr>
-              <a:t>画面はどれも Web の EC2 を踏み台に localhost で開く</a:t>
+              <a:t>画面は Web の EC2 を踏み台に localhost で開き、lab の図だけは lab の EC2 から開く</a:t>
+            </a:r>
+          </a:p>
+        </p:txBody>
+      </p:sp>
+      <p:cxnSp>
+        <p:nvCxnSpPr>
+          <p:cNvPr id="4" name="Connector 3"/>
+          <p:cNvCxnSpPr/>
+          <p:nvPr/>
+        </p:nvCxnSpPr>
+        <p:spPr>
+          <a:xfrm>
+            <a:off x="841248" y="1426464"/>
+            <a:ext cx="10509199" cy="0"/>
+          </a:xfrm>
+          <a:prstGeom prst="line">
+            <a:avLst/>
+          </a:prstGeom>
+          <a:ln w="12700">
+            <a:solidFill>
+              <a:srgbClr val="DFDFDF"/>
+            </a:solidFill>
+          </a:ln>
+        </p:spPr>
+        <p:style>
+          <a:lnRef idx="2">
+            <a:schemeClr val="accent1"/>
+          </a:lnRef>
+          <a:fillRef idx="0">
+            <a:schemeClr val="accent1"/>
+          </a:fillRef>
+          <a:effectRef idx="1">
+            <a:schemeClr val="accent1"/>
+          </a:effectRef>
+          <a:fontRef idx="minor">
+            <a:schemeClr val="tx1"/>
+          </a:fontRef>
+        </p:style>
+      </p:cxnSp>
+      <p:sp>
+        <p:nvSpPr>
+          <p:cNvPr id="5" name="TextBox 4"/>
+          <p:cNvSpPr txBox="1"/>
+          <p:nvPr/>
+        </p:nvSpPr>
+        <p:spPr>
+          <a:xfrm>
+            <a:off x="841248" y="1755648"/>
+            <a:ext cx="5003140" cy="393700"/>
+          </a:xfrm>
+          <a:prstGeom prst="rect">
+            <a:avLst/>
+          </a:prstGeom>
+          <a:noFill/>
+        </p:spPr>
+        <p:txBody>
+          <a:bodyPr wrap="square" lIns="0" rIns="0" tIns="0" bIns="0" anchor="t">
+            <a:spAutoFit/>
+          </a:bodyPr>
+          <a:lstStyle/>
+          <a:p>
+            <a:pPr>
+              <a:lnSpc>
+                <a:spcPct val="155000"/>
+              </a:lnSpc>
+            </a:pPr>
+            <a:r>
+              <a:rPr sz="2000" b="1" i="0">
+                <a:solidFill>
+                  <a:srgbClr val="111110"/>
+                </a:solidFill>
+                <a:latin typeface="Lato"/>
+                <a:ea typeface="Noto Sans JP"/>
+                <a:cs typeface="Noto Sans JP"/>
+              </a:rPr>
+              <a:t>Web の EC2 を踏み台に</a:t>
+            </a:r>
+          </a:p>
+        </p:txBody>
+      </p:sp>
+      <p:sp>
+        <p:nvSpPr>
+          <p:cNvPr id="6" name="TextBox 5"/>
+          <p:cNvSpPr txBox="1"/>
+          <p:nvPr/>
+        </p:nvSpPr>
+        <p:spPr>
+          <a:xfrm>
+            <a:off x="841248" y="2387092"/>
+            <a:ext cx="5003140" cy="3032760"/>
+          </a:xfrm>
+          <a:prstGeom prst="rect">
+            <a:avLst/>
+          </a:prstGeom>
+          <a:noFill/>
+        </p:spPr>
+        <p:txBody>
+          <a:bodyPr wrap="square" lIns="0" rIns="0" tIns="0" bIns="0" anchor="t">
+            <a:spAutoFit/>
+          </a:bodyPr>
+          <a:lstStyle/>
+          <a:p>
+            <a:pPr marL="0" indent="0">
+              <a:lnSpc>
+                <a:spcPct val="155000"/>
+              </a:lnSpc>
+              <a:spcAft>
+                <a:spcPts val="880"/>
+              </a:spcAft>
+            </a:pPr>
+            <a:r>
+              <a:rPr sz="2000" b="0" i="0">
+                <a:solidFill>
+                  <a:srgbClr val="D63A2F"/>
+                </a:solidFill>
+                <a:latin typeface="Lato"/>
+                <a:ea typeface="Noto Sans JP"/>
+                <a:cs typeface="Noto Sans JP"/>
+              </a:rPr>
+              <a:t>・</a:t>
+            </a:r>
+            <a:r>
+              <a:rPr sz="2000" b="0" i="0">
+                <a:solidFill>
+                  <a:srgbClr val="1A1A1A"/>
+                </a:solidFill>
+                <a:latin typeface="Lato"/>
+                <a:ea typeface="Noto Sans JP"/>
+                <a:cs typeface="Noto Sans JP"/>
+              </a:rPr>
+              <a:t>Web: 8080</a:t>
+            </a:r>
+          </a:p>
+          <a:p>
+            <a:pPr marL="0" indent="0">
+              <a:lnSpc>
+                <a:spcPct val="155000"/>
+              </a:lnSpc>
+              <a:spcAft>
+                <a:spcPts val="880"/>
+              </a:spcAft>
+            </a:pPr>
+            <a:r>
+              <a:rPr sz="2000" b="0" i="0">
+                <a:solidFill>
+                  <a:srgbClr val="D63A2F"/>
+                </a:solidFill>
+                <a:latin typeface="Lato"/>
+                <a:ea typeface="Noto Sans JP"/>
+                <a:cs typeface="Noto Sans JP"/>
+              </a:rPr>
+              <a:t>・</a:t>
+            </a:r>
+            <a:r>
+              <a:rPr sz="2000" b="0" i="0">
+                <a:solidFill>
+                  <a:srgbClr val="1A1A1A"/>
+                </a:solidFill>
+                <a:latin typeface="Lato"/>
+                <a:ea typeface="Noto Sans JP"/>
+                <a:cs typeface="Noto Sans JP"/>
+              </a:rPr>
+              <a:t>Kafbat UI: 8082</a:t>
+            </a:r>
+          </a:p>
+          <a:p>
+            <a:pPr marL="0" indent="0">
+              <a:lnSpc>
+                <a:spcPct val="155000"/>
+              </a:lnSpc>
+              <a:spcAft>
+                <a:spcPts val="880"/>
+              </a:spcAft>
+            </a:pPr>
+            <a:r>
+              <a:rPr sz="2000" b="0" i="0">
+                <a:solidFill>
+                  <a:srgbClr val="D63A2F"/>
+                </a:solidFill>
+                <a:latin typeface="Lato"/>
+                <a:ea typeface="Noto Sans JP"/>
+                <a:cs typeface="Noto Sans JP"/>
+              </a:rPr>
+              <a:t>・</a:t>
+            </a:r>
+            <a:r>
+              <a:rPr sz="2000" b="0" i="0">
+                <a:solidFill>
+                  <a:srgbClr val="1A1A1A"/>
+                </a:solidFill>
+                <a:latin typeface="Lato"/>
+                <a:ea typeface="Noto Sans JP"/>
+                <a:cs typeface="Noto Sans JP"/>
+              </a:rPr>
+              <a:t>Nautobot: 8081</a:t>
+            </a:r>
+          </a:p>
+          <a:p>
+            <a:pPr marL="0" indent="0">
+              <a:lnSpc>
+                <a:spcPct val="155000"/>
+              </a:lnSpc>
+              <a:spcAft>
+                <a:spcPts val="880"/>
+              </a:spcAft>
+            </a:pPr>
+            <a:r>
+              <a:rPr sz="2000" b="0" i="0">
+                <a:solidFill>
+                  <a:srgbClr val="D63A2F"/>
+                </a:solidFill>
+                <a:latin typeface="Lato"/>
+                <a:ea typeface="Noto Sans JP"/>
+                <a:cs typeface="Noto Sans JP"/>
+              </a:rPr>
+              <a:t>・</a:t>
+            </a:r>
+            <a:r>
+              <a:rPr sz="2000" b="0" i="0">
+                <a:solidFill>
+                  <a:srgbClr val="1A1A1A"/>
+                </a:solidFill>
+                <a:latin typeface="Lato"/>
+                <a:ea typeface="Noto Sans JP"/>
+                <a:cs typeface="Noto Sans JP"/>
+              </a:rPr>
+              <a:t>Grafana: 3000</a:t>
+            </a:r>
+          </a:p>
+          <a:p>
+            <a:pPr marL="0" indent="0">
+              <a:lnSpc>
+                <a:spcPct val="155000"/>
+              </a:lnSpc>
+              <a:spcAft>
+                <a:spcPts val="880"/>
+              </a:spcAft>
+            </a:pPr>
+            <a:r>
+              <a:rPr sz="2000" b="0" i="0">
+                <a:solidFill>
+                  <a:srgbClr val="D63A2F"/>
+                </a:solidFill>
+                <a:latin typeface="Lato"/>
+                <a:ea typeface="Noto Sans JP"/>
+                <a:cs typeface="Noto Sans JP"/>
+              </a:rPr>
+              <a:t>・</a:t>
+            </a:r>
+            <a:r>
+              <a:rPr sz="2000" b="0" i="0">
+                <a:solidFill>
+                  <a:srgbClr val="1A1A1A"/>
+                </a:solidFill>
+                <a:latin typeface="Lato"/>
+                <a:ea typeface="Noto Sans JP"/>
+                <a:cs typeface="Noto Sans JP"/>
+              </a:rPr>
+              <a:t>Splunk: 8000</a:t>
+            </a:r>
+          </a:p>
+          <a:p>
+            <a:pPr marL="0" indent="0">
+              <a:lnSpc>
+                <a:spcPct val="155000"/>
+              </a:lnSpc>
+              <a:spcAft>
+                <a:spcPts val="880"/>
+              </a:spcAft>
+            </a:pPr>
+            <a:r>
+              <a:rPr sz="2000" b="0" i="0">
+                <a:solidFill>
+                  <a:srgbClr val="D63A2F"/>
+                </a:solidFill>
+                <a:latin typeface="Lato"/>
+                <a:ea typeface="Noto Sans JP"/>
+                <a:cs typeface="Noto Sans JP"/>
+              </a:rPr>
+              <a:t>・</a:t>
+            </a:r>
+            <a:r>
+              <a:rPr sz="2000" b="0" i="0">
+                <a:solidFill>
+                  <a:srgbClr val="1A1A1A"/>
+                </a:solidFill>
+                <a:latin typeface="Lato"/>
+                <a:ea typeface="Noto Sans JP"/>
+                <a:cs typeface="Noto Sans JP"/>
+              </a:rPr>
+              <a:t>Temporal UI: 8233</a:t>
+            </a:r>
+          </a:p>
+        </p:txBody>
+      </p:sp>
+      <p:sp>
+        <p:nvSpPr>
+          <p:cNvPr id="7" name="TextBox 6"/>
+          <p:cNvSpPr txBox="1"/>
+          <p:nvPr/>
+        </p:nvSpPr>
+        <p:spPr>
+          <a:xfrm>
+            <a:off x="6347308" y="1755648"/>
+            <a:ext cx="5003140" cy="393700"/>
+          </a:xfrm>
+          <a:prstGeom prst="rect">
+            <a:avLst/>
+          </a:prstGeom>
+          <a:noFill/>
+        </p:spPr>
+        <p:txBody>
+          <a:bodyPr wrap="square" lIns="0" rIns="0" tIns="0" bIns="0" anchor="t">
+            <a:spAutoFit/>
+          </a:bodyPr>
+          <a:lstStyle/>
+          <a:p>
+            <a:pPr>
+              <a:lnSpc>
+                <a:spcPct val="155000"/>
+              </a:lnSpc>
+            </a:pPr>
+            <a:r>
+              <a:rPr sz="2000" b="1" i="0">
+                <a:solidFill>
+                  <a:srgbClr val="111110"/>
+                </a:solidFill>
+                <a:latin typeface="Lato"/>
+                <a:ea typeface="Noto Sans JP"/>
+                <a:cs typeface="Noto Sans JP"/>
+              </a:rPr>
+              <a:t>lab の EC2 から</a:t>
+            </a:r>
+          </a:p>
+        </p:txBody>
+      </p:sp>
+      <p:sp>
+        <p:nvSpPr>
+          <p:cNvPr id="8" name="TextBox 7"/>
+          <p:cNvSpPr txBox="1"/>
+          <p:nvPr/>
+        </p:nvSpPr>
+        <p:spPr>
+          <a:xfrm>
+            <a:off x="6347308" y="2387092"/>
+            <a:ext cx="5003140" cy="1010920"/>
+          </a:xfrm>
+          <a:prstGeom prst="rect">
+            <a:avLst/>
+          </a:prstGeom>
+          <a:noFill/>
+        </p:spPr>
+        <p:txBody>
+          <a:bodyPr wrap="square" lIns="0" rIns="0" tIns="0" bIns="0" anchor="t">
+            <a:spAutoFit/>
+          </a:bodyPr>
+          <a:lstStyle/>
+          <a:p>
+            <a:pPr marL="0" indent="0">
+              <a:lnSpc>
+                <a:spcPct val="155000"/>
+              </a:lnSpc>
+              <a:spcAft>
+                <a:spcPts val="880"/>
+              </a:spcAft>
+            </a:pPr>
+            <a:r>
+              <a:rPr sz="2000" b="0" i="0">
+                <a:solidFill>
+                  <a:srgbClr val="D63A2F"/>
+                </a:solidFill>
+                <a:latin typeface="Lato"/>
+                <a:ea typeface="Noto Sans JP"/>
+                <a:cs typeface="Noto Sans JP"/>
+              </a:rPr>
+              <a:t>・</a:t>
+            </a:r>
+            <a:r>
+              <a:rPr sz="2000" b="0" i="0">
+                <a:solidFill>
+                  <a:srgbClr val="1A1A1A"/>
+                </a:solidFill>
+                <a:latin typeface="Lato"/>
+                <a:ea typeface="Noto Sans JP"/>
+                <a:cs typeface="Noto Sans JP"/>
+              </a:rPr>
+              <a:t>lab の図: 50080</a:t>
+            </a:r>
+          </a:p>
+          <a:p>
+            <a:pPr marL="0" indent="0">
+              <a:lnSpc>
+                <a:spcPct val="155000"/>
+              </a:lnSpc>
+              <a:spcAft>
+                <a:spcPts val="880"/>
+              </a:spcAft>
+            </a:pPr>
+            <a:r>
+              <a:rPr sz="2000" b="0" i="0">
+                <a:solidFill>
+                  <a:srgbClr val="D63A2F"/>
+                </a:solidFill>
+                <a:latin typeface="Lato"/>
+                <a:ea typeface="Noto Sans JP"/>
+                <a:cs typeface="Noto Sans JP"/>
+              </a:rPr>
+              <a:t>・</a:t>
+            </a:r>
+            <a:r>
+              <a:rPr sz="2000" b="0" i="0">
+                <a:solidFill>
+                  <a:srgbClr val="1A1A1A"/>
+                </a:solidFill>
+                <a:latin typeface="Lato"/>
+                <a:ea typeface="Noto Sans JP"/>
+                <a:cs typeface="Noto Sans JP"/>
+              </a:rPr>
+              <a:t>先に </a:t>
+            </a:r>
+            <a:r>
+              <a:rPr sz="1879" b="0" i="0">
+                <a:solidFill>
+                  <a:srgbClr val="1A1A1A"/>
+                </a:solidFill>
+                <a:latin typeface="Menlo"/>
+                <a:ea typeface="Menlo"/>
+                <a:cs typeface="Menlo"/>
+              </a:rPr>
+              <a:t>sudo lab graph</a:t>
+            </a:r>
+          </a:p>
+        </p:txBody>
+      </p:sp>
+      <p:sp>
+        <p:nvSpPr>
+          <p:cNvPr id="9" name="TextBox 8"/>
+          <p:cNvSpPr txBox="1"/>
+          <p:nvPr/>
+        </p:nvSpPr>
+        <p:spPr>
+          <a:xfrm>
+            <a:off x="841248" y="6272784"/>
+            <a:ext cx="10509199" cy="274320"/>
+          </a:xfrm>
+          <a:prstGeom prst="rect">
+            <a:avLst/>
+          </a:prstGeom>
+          <a:noFill/>
+        </p:spPr>
+        <p:txBody>
+          <a:bodyPr wrap="square" lIns="0" rIns="0" tIns="0" bIns="0" anchor="t">
+            <a:spAutoFit/>
+          </a:bodyPr>
+          <a:lstStyle/>
+          <a:p>
+            <a:pPr algn="r"/>
+            <a:r>
+              <a:rPr sz="1000" b="0" i="0">
+                <a:solidFill>
+                  <a:srgbClr val="A5A5A5"/>
+                </a:solidFill>
+                <a:latin typeface="Menlo"/>
+                <a:ea typeface="Menlo"/>
+                <a:cs typeface="Menlo"/>
+              </a:rPr>
+              <a:t>10 / 10</a:t>
+            </a:r>
+          </a:p>
+        </p:txBody>
+      </p:sp>
+    </p:spTree>
+  </p:cSld>
+  <p:clrMapOvr>
+    <a:masterClrMapping/>
+  </p:clrMapOvr>
+</p:sld>
+</file>
+
+<file path=ppt/slides/slide2.xml><?xml version="1.0" encoding="utf-8"?>
+<p:sld xmlns:a="http://schemas.openxmlformats.org/drawingml/2006/main" xmlns:p="http://schemas.openxmlformats.org/presentationml/2006/main" xmlns:r="http://schemas.openxmlformats.org/officeDocument/2006/relationships">
+  <p:cSld>
+    <p:bg>
+      <p:bgPr>
+        <a:solidFill>
+          <a:srgbClr val="FAF9F6"/>
+        </a:solidFill>
+        <a:effectLst/>
+      </p:bgPr>
+    </p:bg>
+    <p:spTree>
+      <p:nvGrpSpPr>
+        <p:cNvPr id="1" name=""/>
+        <p:cNvGrpSpPr/>
+        <p:nvPr/>
+      </p:nvGrpSpPr>
+      <p:grpSpPr/>
+      <p:sp>
+        <p:nvSpPr>
+          <p:cNvPr id="2" name="Rectangle 1"/>
+          <p:cNvSpPr/>
+          <p:nvPr/>
+        </p:nvSpPr>
+        <p:spPr>
+          <a:xfrm>
+            <a:off x="841248" y="640080"/>
+            <a:ext cx="82296" cy="402336"/>
+          </a:xfrm>
+          <a:prstGeom prst="rect">
+            <a:avLst/>
+          </a:prstGeom>
+          <a:solidFill>
+            <a:srgbClr val="111110"/>
+          </a:solidFill>
+          <a:ln>
+            <a:noFill/>
+          </a:ln>
+          <a:effectLst/>
+        </p:spPr>
+        <p:style>
+          <a:lnRef idx="1">
+            <a:schemeClr val="accent1"/>
+          </a:lnRef>
+          <a:fillRef idx="3">
+            <a:schemeClr val="accent1"/>
+          </a:fillRef>
+          <a:effectRef idx="2">
+            <a:schemeClr val="accent1"/>
+          </a:effectRef>
+          <a:fontRef idx="minor">
+            <a:schemeClr val="lt1"/>
+          </a:fontRef>
+        </p:style>
+        <p:txBody>
+          <a:bodyPr rtlCol="0" anchor="ctr"/>
+          <a:lstStyle/>
+          <a:p>
+            <a:pPr algn="ctr"/>
+          </a:p>
+        </p:txBody>
+      </p:sp>
+      <p:sp>
+        <p:nvSpPr>
+          <p:cNvPr id="3" name="TextBox 2"/>
+          <p:cNvSpPr txBox="1"/>
+          <p:nvPr/>
+        </p:nvSpPr>
+        <p:spPr>
+          <a:xfrm>
+            <a:off x="1097280" y="548640"/>
+            <a:ext cx="10253167" cy="786384"/>
+          </a:xfrm>
+          <a:prstGeom prst="rect">
+            <a:avLst/>
+          </a:prstGeom>
+          <a:noFill/>
+        </p:spPr>
+        <p:txBody>
+          <a:bodyPr wrap="square" lIns="0" rIns="0" tIns="0" bIns="0" anchor="t">
+            <a:spAutoFit/>
+          </a:bodyPr>
+          <a:lstStyle/>
+          <a:p>
+            <a:pPr>
+              <a:lnSpc>
+                <a:spcPct val="120000"/>
+              </a:lnSpc>
+            </a:pPr>
+            <a:r>
+              <a:rPr sz="2400" b="1" i="0">
+                <a:solidFill>
+                  <a:srgbClr val="111110"/>
+                </a:solidFill>
+                <a:latin typeface="Lato"/>
+                <a:ea typeface="Noto Sans JP"/>
+                <a:cs typeface="Noto Sans JP"/>
+              </a:rPr>
+              <a:t>データは左から右へ流れ、修復だけが lab へ戻る</a:t>
+            </a:r>
+          </a:p>
+        </p:txBody>
+      </p:sp>
+      <p:cxnSp>
+        <p:nvCxnSpPr>
+          <p:cNvPr id="4" name="Connector 3"/>
+          <p:cNvCxnSpPr/>
+          <p:nvPr/>
+        </p:nvCxnSpPr>
+        <p:spPr>
+          <a:xfrm>
+            <a:off x="841248" y="1426464"/>
+            <a:ext cx="10509199" cy="0"/>
+          </a:xfrm>
+          <a:prstGeom prst="line">
+            <a:avLst/>
+          </a:prstGeom>
+          <a:ln w="12700">
+            <a:solidFill>
+              <a:srgbClr val="DFDFDF"/>
+            </a:solidFill>
+          </a:ln>
+        </p:spPr>
+        <p:style>
+          <a:lnRef idx="2">
+            <a:schemeClr val="accent1"/>
+          </a:lnRef>
+          <a:fillRef idx="0">
+            <a:schemeClr val="accent1"/>
+          </a:fillRef>
+          <a:effectRef idx="1">
+            <a:schemeClr val="accent1"/>
+          </a:effectRef>
+          <a:fontRef idx="minor">
+            <a:schemeClr val="tx1"/>
+          </a:fontRef>
+        </p:style>
+      </p:cxnSp>
+      <p:sp>
+        <p:nvSpPr>
+          <p:cNvPr id="5" name="TextBox 4"/>
+          <p:cNvSpPr txBox="1"/>
+          <p:nvPr/>
+        </p:nvSpPr>
+        <p:spPr>
+          <a:xfrm>
+            <a:off x="841248" y="1755648"/>
+            <a:ext cx="10509199" cy="393700"/>
+          </a:xfrm>
+          <a:prstGeom prst="rect">
+            <a:avLst/>
+          </a:prstGeom>
+          <a:noFill/>
+        </p:spPr>
+        <p:txBody>
+          <a:bodyPr wrap="square" lIns="0" rIns="0" tIns="0" bIns="0" anchor="t">
+            <a:spAutoFit/>
+          </a:bodyPr>
+          <a:lstStyle/>
+          <a:p>
+            <a:pPr>
+              <a:lnSpc>
+                <a:spcPct val="155000"/>
+              </a:lnSpc>
+            </a:pPr>
+            <a:r>
+              <a:rPr sz="2000" b="0" i="0">
+                <a:solidFill>
+                  <a:srgbClr val="1A1A1A"/>
+                </a:solidFill>
+                <a:latin typeface="Lato"/>
+                <a:ea typeface="Noto Sans JP"/>
+                <a:cs typeface="Noto Sans JP"/>
+              </a:rPr>
+              <a:t>閉域の中で、できる限りマネージドサービスで組む。</a:t>
+            </a:r>
+          </a:p>
+        </p:txBody>
+      </p:sp>
+      <p:sp>
+        <p:nvSpPr>
+          <p:cNvPr id="6" name="TextBox 5"/>
+          <p:cNvSpPr txBox="1"/>
+          <p:nvPr/>
+        </p:nvSpPr>
+        <p:spPr>
+          <a:xfrm>
+            <a:off x="841248" y="2387092"/>
+            <a:ext cx="5003140" cy="393700"/>
+          </a:xfrm>
+          <a:prstGeom prst="rect">
+            <a:avLst/>
+          </a:prstGeom>
+          <a:noFill/>
+        </p:spPr>
+        <p:txBody>
+          <a:bodyPr wrap="square" lIns="0" rIns="0" tIns="0" bIns="0" anchor="t">
+            <a:spAutoFit/>
+          </a:bodyPr>
+          <a:lstStyle/>
+          <a:p>
+            <a:pPr>
+              <a:lnSpc>
+                <a:spcPct val="155000"/>
+              </a:lnSpc>
+            </a:pPr>
+            <a:r>
+              <a:rPr sz="2000" b="1" i="0">
+                <a:solidFill>
+                  <a:srgbClr val="111110"/>
+                </a:solidFill>
+                <a:latin typeface="Lato"/>
+                <a:ea typeface="Noto Sans JP"/>
+                <a:cs typeface="Noto Sans JP"/>
+              </a:rPr>
+              <a:t>行き: データ</a:t>
+            </a:r>
+          </a:p>
+        </p:txBody>
+      </p:sp>
+      <p:sp>
+        <p:nvSpPr>
+          <p:cNvPr id="7" name="TextBox 6"/>
+          <p:cNvSpPr txBox="1"/>
+          <p:nvPr/>
+        </p:nvSpPr>
+        <p:spPr>
+          <a:xfrm>
+            <a:off x="841248" y="3018536"/>
+            <a:ext cx="5003140" cy="2021840"/>
+          </a:xfrm>
+          <a:prstGeom prst="rect">
+            <a:avLst/>
+          </a:prstGeom>
+          <a:noFill/>
+        </p:spPr>
+        <p:txBody>
+          <a:bodyPr wrap="square" lIns="0" rIns="0" tIns="0" bIns="0" anchor="t">
+            <a:spAutoFit/>
+          </a:bodyPr>
+          <a:lstStyle/>
+          <a:p>
+            <a:pPr marL="0" indent="0">
+              <a:lnSpc>
+                <a:spcPct val="155000"/>
+              </a:lnSpc>
+              <a:spcAft>
+                <a:spcPts val="880"/>
+              </a:spcAft>
+            </a:pPr>
+            <a:r>
+              <a:rPr sz="2000" b="0" i="0">
+                <a:solidFill>
+                  <a:srgbClr val="D63A2F"/>
+                </a:solidFill>
+                <a:latin typeface="Lato"/>
+                <a:ea typeface="Noto Sans JP"/>
+                <a:cs typeface="Noto Sans JP"/>
+              </a:rPr>
+              <a:t>・</a:t>
+            </a:r>
+            <a:r>
+              <a:rPr sz="2000" b="0" i="0">
+                <a:solidFill>
+                  <a:srgbClr val="1A1A1A"/>
+                </a:solidFill>
+                <a:latin typeface="Lato"/>
+                <a:ea typeface="Noto Sans JP"/>
+                <a:cs typeface="Noto Sans JP"/>
+              </a:rPr>
+              <a:t>lab の SR Linux 6 台</a:t>
+            </a:r>
+          </a:p>
+          <a:p>
+            <a:pPr marL="0" indent="0">
+              <a:lnSpc>
+                <a:spcPct val="155000"/>
+              </a:lnSpc>
+              <a:spcAft>
+                <a:spcPts val="880"/>
+              </a:spcAft>
+            </a:pPr>
+            <a:r>
+              <a:rPr sz="2000" b="0" i="0">
+                <a:solidFill>
+                  <a:srgbClr val="D63A2F"/>
+                </a:solidFill>
+                <a:latin typeface="Lato"/>
+                <a:ea typeface="Noto Sans JP"/>
+                <a:cs typeface="Noto Sans JP"/>
+              </a:rPr>
+              <a:t>・</a:t>
+            </a:r>
+            <a:r>
+              <a:rPr sz="2000" b="0" i="0">
+                <a:solidFill>
+                  <a:srgbClr val="1A1A1A"/>
+                </a:solidFill>
+                <a:latin typeface="Lato"/>
+                <a:ea typeface="Noto Sans JP"/>
+                <a:cs typeface="Noto Sans JP"/>
+              </a:rPr>
+              <a:t>収集 4 種（ECS）→ MSK</a:t>
+            </a:r>
+          </a:p>
+          <a:p>
+            <a:pPr marL="0" indent="0">
+              <a:lnSpc>
+                <a:spcPct val="155000"/>
+              </a:lnSpc>
+              <a:spcAft>
+                <a:spcPts val="880"/>
+              </a:spcAft>
+            </a:pPr>
+            <a:r>
+              <a:rPr sz="2000" b="0" i="0">
+                <a:solidFill>
+                  <a:srgbClr val="D63A2F"/>
+                </a:solidFill>
+                <a:latin typeface="Lato"/>
+                <a:ea typeface="Noto Sans JP"/>
+                <a:cs typeface="Noto Sans JP"/>
+              </a:rPr>
+              <a:t>・</a:t>
+            </a:r>
+            <a:r>
+              <a:rPr sz="2000" b="0" i="0">
+                <a:solidFill>
+                  <a:srgbClr val="1A1A1A"/>
+                </a:solidFill>
+                <a:latin typeface="Lato"/>
+                <a:ea typeface="Noto Sans JP"/>
+                <a:cs typeface="Noto Sans JP"/>
+              </a:rPr>
+              <a:t>Spark → 格納先 4 つ</a:t>
+            </a:r>
+          </a:p>
+          <a:p>
+            <a:pPr marL="0" indent="0">
+              <a:lnSpc>
+                <a:spcPct val="155000"/>
+              </a:lnSpc>
+              <a:spcAft>
+                <a:spcPts val="880"/>
+              </a:spcAft>
+            </a:pPr>
+            <a:r>
+              <a:rPr sz="2000" b="0" i="0">
+                <a:solidFill>
+                  <a:srgbClr val="D63A2F"/>
+                </a:solidFill>
+                <a:latin typeface="Lato"/>
+                <a:ea typeface="Noto Sans JP"/>
+                <a:cs typeface="Noto Sans JP"/>
+              </a:rPr>
+              <a:t>・</a:t>
+            </a:r>
+            <a:r>
+              <a:rPr sz="2000" b="0" i="0">
+                <a:solidFill>
+                  <a:srgbClr val="1A1A1A"/>
+                </a:solidFill>
+                <a:latin typeface="Lato"/>
+                <a:ea typeface="Noto Sans JP"/>
+                <a:cs typeface="Noto Sans JP"/>
+              </a:rPr>
+              <a:t>アラート → SNS</a:t>
+            </a:r>
+          </a:p>
+        </p:txBody>
+      </p:sp>
+      <p:sp>
+        <p:nvSpPr>
+          <p:cNvPr id="8" name="TextBox 7"/>
+          <p:cNvSpPr txBox="1"/>
+          <p:nvPr/>
+        </p:nvSpPr>
+        <p:spPr>
+          <a:xfrm>
+            <a:off x="6347308" y="2387092"/>
+            <a:ext cx="5003140" cy="393700"/>
+          </a:xfrm>
+          <a:prstGeom prst="rect">
+            <a:avLst/>
+          </a:prstGeom>
+          <a:noFill/>
+        </p:spPr>
+        <p:txBody>
+          <a:bodyPr wrap="square" lIns="0" rIns="0" tIns="0" bIns="0" anchor="t">
+            <a:spAutoFit/>
+          </a:bodyPr>
+          <a:lstStyle/>
+          <a:p>
+            <a:pPr>
+              <a:lnSpc>
+                <a:spcPct val="155000"/>
+              </a:lnSpc>
+            </a:pPr>
+            <a:r>
+              <a:rPr sz="2000" b="1" i="0">
+                <a:solidFill>
+                  <a:srgbClr val="111110"/>
+                </a:solidFill>
+                <a:latin typeface="Lato"/>
+                <a:ea typeface="Noto Sans JP"/>
+                <a:cs typeface="Noto Sans JP"/>
+              </a:rPr>
+              <a:t>戻り: 修復</a:t>
+            </a:r>
+          </a:p>
+        </p:txBody>
+      </p:sp>
+      <p:sp>
+        <p:nvSpPr>
+          <p:cNvPr id="9" name="TextBox 8"/>
+          <p:cNvSpPr txBox="1"/>
+          <p:nvPr/>
+        </p:nvSpPr>
+        <p:spPr>
+          <a:xfrm>
+            <a:off x="6347308" y="3018536"/>
+            <a:ext cx="5003140" cy="2021840"/>
+          </a:xfrm>
+          <a:prstGeom prst="rect">
+            <a:avLst/>
+          </a:prstGeom>
+          <a:noFill/>
+        </p:spPr>
+        <p:txBody>
+          <a:bodyPr wrap="square" lIns="0" rIns="0" tIns="0" bIns="0" anchor="t">
+            <a:spAutoFit/>
+          </a:bodyPr>
+          <a:lstStyle/>
+          <a:p>
+            <a:pPr marL="0" indent="0">
+              <a:lnSpc>
+                <a:spcPct val="155000"/>
+              </a:lnSpc>
+              <a:spcAft>
+                <a:spcPts val="880"/>
+              </a:spcAft>
+            </a:pPr>
+            <a:r>
+              <a:rPr sz="2000" b="0" i="0">
+                <a:solidFill>
+                  <a:srgbClr val="D63A2F"/>
+                </a:solidFill>
+                <a:latin typeface="Lato"/>
+                <a:ea typeface="Noto Sans JP"/>
+                <a:cs typeface="Noto Sans JP"/>
+              </a:rPr>
+              <a:t>・</a:t>
+            </a:r>
+            <a:r>
+              <a:rPr sz="2000" b="0" i="0">
+                <a:solidFill>
+                  <a:srgbClr val="1A1A1A"/>
+                </a:solidFill>
+                <a:latin typeface="Lato"/>
+                <a:ea typeface="Noto Sans JP"/>
+                <a:cs typeface="Noto Sans JP"/>
+              </a:rPr>
+              <a:t>SQS → Temporal</a:t>
+            </a:r>
+          </a:p>
+          <a:p>
+            <a:pPr marL="0" indent="0">
+              <a:lnSpc>
+                <a:spcPct val="155000"/>
+              </a:lnSpc>
+              <a:spcAft>
+                <a:spcPts val="880"/>
+              </a:spcAft>
+            </a:pPr>
+            <a:r>
+              <a:rPr sz="2000" b="0" i="0">
+                <a:solidFill>
+                  <a:srgbClr val="D63A2F"/>
+                </a:solidFill>
+                <a:latin typeface="Lato"/>
+                <a:ea typeface="Noto Sans JP"/>
+                <a:cs typeface="Noto Sans JP"/>
+              </a:rPr>
+              <a:t>・</a:t>
+            </a:r>
+            <a:r>
+              <a:rPr sz="2000" b="0" i="0">
+                <a:solidFill>
+                  <a:srgbClr val="1A1A1A"/>
+                </a:solidFill>
+                <a:latin typeface="Lato"/>
+                <a:ea typeface="Noto Sans JP"/>
+                <a:cs typeface="Noto Sans JP"/>
+              </a:rPr>
+              <a:t>エージェントが修復を提案</a:t>
+            </a:r>
+          </a:p>
+          <a:p>
+            <a:pPr marL="0" indent="0">
+              <a:lnSpc>
+                <a:spcPct val="155000"/>
+              </a:lnSpc>
+              <a:spcAft>
+                <a:spcPts val="880"/>
+              </a:spcAft>
+            </a:pPr>
+            <a:r>
+              <a:rPr sz="2000" b="0" i="0">
+                <a:solidFill>
+                  <a:srgbClr val="D63A2F"/>
+                </a:solidFill>
+                <a:latin typeface="Lato"/>
+                <a:ea typeface="Noto Sans JP"/>
+                <a:cs typeface="Noto Sans JP"/>
+              </a:rPr>
+              <a:t>・</a:t>
+            </a:r>
+            <a:r>
+              <a:rPr sz="2000" b="0" i="0">
+                <a:solidFill>
+                  <a:srgbClr val="1A1A1A"/>
+                </a:solidFill>
+                <a:latin typeface="Lato"/>
+                <a:ea typeface="Noto Sans JP"/>
+                <a:cs typeface="Noto Sans JP"/>
+              </a:rPr>
+              <a:t>人が Web で承認</a:t>
+            </a:r>
+          </a:p>
+          <a:p>
+            <a:pPr marL="0" indent="0">
+              <a:lnSpc>
+                <a:spcPct val="155000"/>
+              </a:lnSpc>
+              <a:spcAft>
+                <a:spcPts val="880"/>
+              </a:spcAft>
+            </a:pPr>
+            <a:r>
+              <a:rPr sz="2000" b="0" i="0">
+                <a:solidFill>
+                  <a:srgbClr val="D63A2F"/>
+                </a:solidFill>
+                <a:latin typeface="Lato"/>
+                <a:ea typeface="Noto Sans JP"/>
+                <a:cs typeface="Noto Sans JP"/>
+              </a:rPr>
+              <a:t>・</a:t>
+            </a:r>
+            <a:r>
+              <a:rPr sz="2000" b="0" i="0">
+                <a:solidFill>
+                  <a:srgbClr val="1A1A1A"/>
+                </a:solidFill>
+                <a:latin typeface="Lato"/>
+                <a:ea typeface="Noto Sans JP"/>
+                <a:cs typeface="Noto Sans JP"/>
+              </a:rPr>
+              <a:t>SSM で lab を直す</a:t>
+            </a:r>
+          </a:p>
+        </p:txBody>
+      </p:sp>
+      <p:sp>
+        <p:nvSpPr>
+          <p:cNvPr id="10" name="TextBox 9"/>
+          <p:cNvSpPr txBox="1"/>
+          <p:nvPr/>
+        </p:nvSpPr>
+        <p:spPr>
+          <a:xfrm>
+            <a:off x="841248" y="6272784"/>
+            <a:ext cx="10509199" cy="274320"/>
+          </a:xfrm>
+          <a:prstGeom prst="rect">
+            <a:avLst/>
+          </a:prstGeom>
+          <a:noFill/>
+        </p:spPr>
+        <p:txBody>
+          <a:bodyPr wrap="square" lIns="0" rIns="0" tIns="0" bIns="0" anchor="t">
+            <a:spAutoFit/>
+          </a:bodyPr>
+          <a:lstStyle/>
+          <a:p>
+            <a:pPr algn="r"/>
+            <a:r>
+              <a:rPr sz="1000" b="0" i="0">
+                <a:solidFill>
+                  <a:srgbClr val="A5A5A5"/>
+                </a:solidFill>
+                <a:latin typeface="Menlo"/>
+                <a:ea typeface="Menlo"/>
+                <a:cs typeface="Menlo"/>
+              </a:rPr>
+              <a:t>2 / 10</a:t>
+            </a:r>
+          </a:p>
+        </p:txBody>
+      </p:sp>
+    </p:spTree>
+  </p:cSld>
+  <p:clrMapOvr>
+    <a:masterClrMapping/>
+  </p:clrMapOvr>
+</p:sld>
+</file>
+
+<file path=ppt/slides/slide3.xml><?xml version="1.0" encoding="utf-8"?>
+<p:sld xmlns:a="http://schemas.openxmlformats.org/drawingml/2006/main" xmlns:p="http://schemas.openxmlformats.org/presentationml/2006/main" xmlns:r="http://schemas.openxmlformats.org/officeDocument/2006/relationships">
+  <p:cSld>
+    <p:bg>
+      <p:bgPr>
+        <a:solidFill>
+          <a:srgbClr val="FAF9F6"/>
+        </a:solidFill>
+        <a:effectLst/>
+      </p:bgPr>
+    </p:bg>
+    <p:spTree>
+      <p:nvGrpSpPr>
+        <p:cNvPr id="1" name=""/>
+        <p:cNvGrpSpPr/>
+        <p:nvPr/>
+      </p:nvGrpSpPr>
+      <p:grpSpPr/>
+      <p:sp>
+        <p:nvSpPr>
+          <p:cNvPr id="2" name="Rectangle 1"/>
+          <p:cNvSpPr/>
+          <p:nvPr/>
+        </p:nvSpPr>
+        <p:spPr>
+          <a:xfrm>
+            <a:off x="841248" y="640080"/>
+            <a:ext cx="82296" cy="402336"/>
+          </a:xfrm>
+          <a:prstGeom prst="rect">
+            <a:avLst/>
+          </a:prstGeom>
+          <a:solidFill>
+            <a:srgbClr val="111110"/>
+          </a:solidFill>
+          <a:ln>
+            <a:noFill/>
+          </a:ln>
+          <a:effectLst/>
+        </p:spPr>
+        <p:style>
+          <a:lnRef idx="1">
+            <a:schemeClr val="accent1"/>
+          </a:lnRef>
+          <a:fillRef idx="3">
+            <a:schemeClr val="accent1"/>
+          </a:fillRef>
+          <a:effectRef idx="2">
+            <a:schemeClr val="accent1"/>
+          </a:effectRef>
+          <a:fontRef idx="minor">
+            <a:schemeClr val="lt1"/>
+          </a:fontRef>
+        </p:style>
+        <p:txBody>
+          <a:bodyPr rtlCol="0" anchor="ctr"/>
+          <a:lstStyle/>
+          <a:p>
+            <a:pPr algn="ctr"/>
+          </a:p>
+        </p:txBody>
+      </p:sp>
+      <p:sp>
+        <p:nvSpPr>
+          <p:cNvPr id="3" name="TextBox 2"/>
+          <p:cNvSpPr txBox="1"/>
+          <p:nvPr/>
+        </p:nvSpPr>
+        <p:spPr>
+          <a:xfrm>
+            <a:off x="1097280" y="548640"/>
+            <a:ext cx="10253167" cy="786384"/>
+          </a:xfrm>
+          <a:prstGeom prst="rect">
+            <a:avLst/>
+          </a:prstGeom>
+          <a:noFill/>
+        </p:spPr>
+        <p:txBody>
+          <a:bodyPr wrap="square" lIns="0" rIns="0" tIns="0" bIns="0" anchor="t">
+            <a:spAutoFit/>
+          </a:bodyPr>
+          <a:lstStyle/>
+          <a:p>
+            <a:pPr>
+              <a:lnSpc>
+                <a:spcPct val="120000"/>
+              </a:lnSpc>
+            </a:pPr>
+            <a:r>
+              <a:rPr sz="2400" b="1" i="0">
+                <a:solidFill>
+                  <a:srgbClr val="111110"/>
+                </a:solidFill>
+                <a:latin typeface="Lato"/>
+                <a:ea typeface="Noto Sans JP"/>
+                <a:cs typeface="Noto Sans JP"/>
+              </a:rPr>
+              <a:t>9 つの Terraform ルートを ops/up.sh が順に作る</a:t>
             </a:r>
           </a:p>
         </p:txBody>
@@ -4253,16 +5799,15 @@
         </p:nvGraphicFramePr>
         <p:xfrm>
           <a:off x="841248" y="1755648"/>
-          <a:ext cx="10509199" cy="4115308"/>
+          <a:ext cx="5003140" cy="3038348"/>
         </p:xfrm>
         <a:graphic>
           <a:graphicData uri="http://schemas.openxmlformats.org/drawingml/2006/table">
             <a:tbl>
               <a:tblPr firstRow="1" bandRow="0"/>
               <a:tblGrid>
-                <a:gridCol w="3503066"/>
-                <a:gridCol w="3503066"/>
-                <a:gridCol w="3503067"/>
+                <a:gridCol w="2501570"/>
+                <a:gridCol w="2501570"/>
               </a:tblGrid>
               <a:tr h="538480">
                 <a:tc>
@@ -4284,7 +5829,7 @@
                           <a:ea typeface="Noto Sans JP"/>
                           <a:cs typeface="Noto Sans JP"/>
                         </a:rPr>
-                        <a:t>画面</a:t>
+                        <a:t>ルート（数）</a:t>
                       </a:r>
                     </a:p>
                   </a:txBody>
@@ -4316,7 +5861,370 @@
                           <a:ea typeface="Noto Sans JP"/>
                           <a:cs typeface="Noto Sans JP"/>
                         </a:rPr>
-                        <a:t>開く先</a:t>
+                        <a:t>中身</a:t>
+                      </a:r>
+                    </a:p>
+                  </a:txBody>
+                  <a:tcPr marL="91440" marR="91440" marT="45720" marB="45720" anchor="ctr">
+                    <a:lnB w="15240" cap="flat">
+                      <a:solidFill>
+                        <a:srgbClr val="111110"/>
+                      </a:solidFill>
+                    </a:lnB>
+                    <a:noFill/>
+                  </a:tcPr>
+                </a:tc>
+              </a:tr>
+              <a:tr h="538480">
+                <a:tc>
+                  <a:txBody>
+                    <a:bodyPr wrap="square"/>
+                    <a:lstStyle/>
+                    <a:p>
+                      <a:pPr>
+                        <a:lnSpc>
+                          <a:spcPct val="135000"/>
+                        </a:lnSpc>
+                      </a:pPr>
+                      <a:r>
+                        <a:rPr sz="1639" b="0" i="0">
+                          <a:solidFill>
+                            <a:srgbClr val="1A1A1A"/>
+                          </a:solidFill>
+                          <a:latin typeface="Lato"/>
+                          <a:ea typeface="Noto Sans JP"/>
+                          <a:cs typeface="Noto Sans JP"/>
+                        </a:rPr>
+                        <a:t>base/ecr（6）</a:t>
+                      </a:r>
+                    </a:p>
+                  </a:txBody>
+                  <a:tcPr marL="91440" marR="91440" marT="45720" marB="45720" anchor="ctr">
+                    <a:lnB w="9525" cap="flat">
+                      <a:solidFill>
+                        <a:srgbClr val="DFDFDF"/>
+                      </a:solidFill>
+                    </a:lnB>
+                    <a:noFill/>
+                  </a:tcPr>
+                </a:tc>
+                <a:tc>
+                  <a:txBody>
+                    <a:bodyPr wrap="square"/>
+                    <a:lstStyle/>
+                    <a:p>
+                      <a:pPr>
+                        <a:lnSpc>
+                          <a:spcPct val="135000"/>
+                        </a:lnSpc>
+                      </a:pPr>
+                      <a:r>
+                        <a:rPr sz="1639" b="0" i="0">
+                          <a:solidFill>
+                            <a:srgbClr val="1A1A1A"/>
+                          </a:solidFill>
+                          <a:latin typeface="Lato"/>
+                          <a:ea typeface="Noto Sans JP"/>
+                          <a:cs typeface="Noto Sans JP"/>
+                        </a:rPr>
+                        <a:t>ECR</a:t>
+                      </a:r>
+                    </a:p>
+                  </a:txBody>
+                  <a:tcPr marL="91440" marR="91440" marT="45720" marB="45720" anchor="ctr">
+                    <a:lnB w="9525" cap="flat">
+                      <a:solidFill>
+                        <a:srgbClr val="DFDFDF"/>
+                      </a:solidFill>
+                    </a:lnB>
+                    <a:noFill/>
+                  </a:tcPr>
+                </a:tc>
+              </a:tr>
+              <a:tr h="653796">
+                <a:tc>
+                  <a:txBody>
+                    <a:bodyPr wrap="square"/>
+                    <a:lstStyle/>
+                    <a:p>
+                      <a:pPr>
+                        <a:lnSpc>
+                          <a:spcPct val="135000"/>
+                        </a:lnSpc>
+                      </a:pPr>
+                      <a:r>
+                        <a:rPr sz="1639" b="0" i="0">
+                          <a:solidFill>
+                            <a:srgbClr val="1A1A1A"/>
+                          </a:solidFill>
+                          <a:latin typeface="Lato"/>
+                          <a:ea typeface="Noto Sans JP"/>
+                          <a:cs typeface="Noto Sans JP"/>
+                        </a:rPr>
+                        <a:t>base/core（39）</a:t>
+                      </a:r>
+                    </a:p>
+                  </a:txBody>
+                  <a:tcPr marL="91440" marR="91440" marT="45720" marB="45720" anchor="ctr">
+                    <a:lnB w="9525" cap="flat">
+                      <a:solidFill>
+                        <a:srgbClr val="DFDFDF"/>
+                      </a:solidFill>
+                    </a:lnB>
+                    <a:noFill/>
+                  </a:tcPr>
+                </a:tc>
+                <a:tc>
+                  <a:txBody>
+                    <a:bodyPr wrap="square"/>
+                    <a:lstStyle/>
+                    <a:p>
+                      <a:pPr>
+                        <a:lnSpc>
+                          <a:spcPct val="135000"/>
+                        </a:lnSpc>
+                      </a:pPr>
+                      <a:r>
+                        <a:rPr sz="1639" b="0" i="0">
+                          <a:solidFill>
+                            <a:srgbClr val="1A1A1A"/>
+                          </a:solidFill>
+                          <a:latin typeface="Lato"/>
+                          <a:ea typeface="Noto Sans JP"/>
+                          <a:cs typeface="Noto Sans JP"/>
+                        </a:rPr>
+                        <a:t>VPC・閉域・SG・Web・SNS</a:t>
+                      </a:r>
+                    </a:p>
+                  </a:txBody>
+                  <a:tcPr marL="91440" marR="91440" marT="45720" marB="45720" anchor="ctr">
+                    <a:lnB w="9525" cap="flat">
+                      <a:solidFill>
+                        <a:srgbClr val="DFDFDF"/>
+                      </a:solidFill>
+                    </a:lnB>
+                    <a:noFill/>
+                  </a:tcPr>
+                </a:tc>
+              </a:tr>
+              <a:tr h="653796">
+                <a:tc>
+                  <a:txBody>
+                    <a:bodyPr wrap="square"/>
+                    <a:lstStyle/>
+                    <a:p>
+                      <a:pPr>
+                        <a:lnSpc>
+                          <a:spcPct val="135000"/>
+                        </a:lnSpc>
+                      </a:pPr>
+                      <a:r>
+                        <a:rPr sz="1639" b="0" i="0">
+                          <a:solidFill>
+                            <a:srgbClr val="1A1A1A"/>
+                          </a:solidFill>
+                          <a:latin typeface="Lato"/>
+                          <a:ea typeface="Noto Sans JP"/>
+                          <a:cs typeface="Noto Sans JP"/>
+                        </a:rPr>
+                        <a:t>agent（22）</a:t>
+                      </a:r>
+                    </a:p>
+                  </a:txBody>
+                  <a:tcPr marL="91440" marR="91440" marT="45720" marB="45720" anchor="ctr">
+                    <a:lnB w="9525" cap="flat">
+                      <a:solidFill>
+                        <a:srgbClr val="DFDFDF"/>
+                      </a:solidFill>
+                    </a:lnB>
+                    <a:noFill/>
+                  </a:tcPr>
+                </a:tc>
+                <a:tc>
+                  <a:txBody>
+                    <a:bodyPr wrap="square"/>
+                    <a:lstStyle/>
+                    <a:p>
+                      <a:pPr>
+                        <a:lnSpc>
+                          <a:spcPct val="135000"/>
+                        </a:lnSpc>
+                      </a:pPr>
+                      <a:r>
+                        <a:rPr sz="1639" b="0" i="0">
+                          <a:solidFill>
+                            <a:srgbClr val="1A1A1A"/>
+                          </a:solidFill>
+                          <a:latin typeface="Lato"/>
+                          <a:ea typeface="Noto Sans JP"/>
+                          <a:cs typeface="Noto Sans JP"/>
+                        </a:rPr>
+                        <a:t>Runtime・ガードレール・KB</a:t>
+                      </a:r>
+                    </a:p>
+                  </a:txBody>
+                  <a:tcPr marL="91440" marR="91440" marT="45720" marB="45720" anchor="ctr">
+                    <a:lnB w="9525" cap="flat">
+                      <a:solidFill>
+                        <a:srgbClr val="DFDFDF"/>
+                      </a:solidFill>
+                    </a:lnB>
+                    <a:noFill/>
+                  </a:tcPr>
+                </a:tc>
+              </a:tr>
+              <a:tr h="653796">
+                <a:tc>
+                  <a:txBody>
+                    <a:bodyPr wrap="square"/>
+                    <a:lstStyle/>
+                    <a:p>
+                      <a:pPr>
+                        <a:lnSpc>
+                          <a:spcPct val="135000"/>
+                        </a:lnSpc>
+                      </a:pPr>
+                      <a:r>
+                        <a:rPr sz="1639" b="0" i="0">
+                          <a:solidFill>
+                            <a:srgbClr val="1A1A1A"/>
+                          </a:solidFill>
+                          <a:latin typeface="Lato"/>
+                          <a:ea typeface="Noto Sans JP"/>
+                          <a:cs typeface="Noto Sans JP"/>
+                        </a:rPr>
+                        <a:t>workflow（35）</a:t>
+                      </a:r>
+                    </a:p>
+                  </a:txBody>
+                  <a:tcPr marL="91440" marR="91440" marT="45720" marB="45720" anchor="ctr">
+                    <a:lnB w="9525" cap="flat">
+                      <a:solidFill>
+                        <a:srgbClr val="DFDFDF"/>
+                      </a:solidFill>
+                    </a:lnB>
+                    <a:noFill/>
+                  </a:tcPr>
+                </a:tc>
+                <a:tc>
+                  <a:txBody>
+                    <a:bodyPr wrap="square"/>
+                    <a:lstStyle/>
+                    <a:p>
+                      <a:pPr>
+                        <a:lnSpc>
+                          <a:spcPct val="135000"/>
+                        </a:lnSpc>
+                      </a:pPr>
+                      <a:r>
+                        <a:rPr sz="1639" b="0" i="0">
+                          <a:solidFill>
+                            <a:srgbClr val="1A1A1A"/>
+                          </a:solidFill>
+                          <a:latin typeface="Lato"/>
+                          <a:ea typeface="Noto Sans JP"/>
+                          <a:cs typeface="Noto Sans JP"/>
+                        </a:rPr>
+                        <a:t>Temporal・MCP・SQS</a:t>
+                      </a:r>
+                    </a:p>
+                  </a:txBody>
+                  <a:tcPr marL="91440" marR="91440" marT="45720" marB="45720" anchor="ctr">
+                    <a:lnB w="9525" cap="flat">
+                      <a:solidFill>
+                        <a:srgbClr val="DFDFDF"/>
+                      </a:solidFill>
+                    </a:lnB>
+                    <a:noFill/>
+                  </a:tcPr>
+                </a:tc>
+              </a:tr>
+            </a:tbl>
+          </a:graphicData>
+        </a:graphic>
+      </p:graphicFrame>
+      <p:sp>
+        <p:nvSpPr>
+          <p:cNvPr id="6" name="TextBox 5"/>
+          <p:cNvSpPr txBox="1"/>
+          <p:nvPr/>
+        </p:nvSpPr>
+        <p:spPr>
+          <a:xfrm>
+            <a:off x="841248" y="5031740"/>
+            <a:ext cx="5003140" cy="787400"/>
+          </a:xfrm>
+          <a:prstGeom prst="rect">
+            <a:avLst/>
+          </a:prstGeom>
+          <a:noFill/>
+        </p:spPr>
+        <p:txBody>
+          <a:bodyPr wrap="square" lIns="0" rIns="0" tIns="0" bIns="0" anchor="t">
+            <a:spAutoFit/>
+          </a:bodyPr>
+          <a:lstStyle/>
+          <a:p>
+            <a:pPr>
+              <a:lnSpc>
+                <a:spcPct val="155000"/>
+              </a:lnSpc>
+            </a:pPr>
+            <a:r>
+              <a:rPr sz="2000" b="0" i="0">
+                <a:solidFill>
+                  <a:srgbClr val="1A1A1A"/>
+                </a:solidFill>
+                <a:latin typeface="Lato"/>
+                <a:ea typeface="Noto Sans JP"/>
+                <a:cs typeface="Noto Sans JP"/>
+              </a:rPr>
+              <a:t>数は tf の resource ブロックの数（実数ではない）。</a:t>
+            </a:r>
+          </a:p>
+        </p:txBody>
+      </p:sp>
+      <p:graphicFrame>
+        <p:nvGraphicFramePr>
+          <p:cNvPr id="7" name="Table 6"/>
+          <p:cNvGraphicFramePr>
+            <a:graphicFrameLocks noGrp="1"/>
+          </p:cNvGraphicFramePr>
+          <p:nvPr/>
+        </p:nvGraphicFramePr>
+        <p:xfrm>
+          <a:off x="6347308" y="1755648"/>
+          <a:ext cx="5003140" cy="3576828"/>
+        </p:xfrm>
+        <a:graphic>
+          <a:graphicData uri="http://schemas.openxmlformats.org/drawingml/2006/table">
+            <a:tbl>
+              <a:tblPr firstRow="1" bandRow="0"/>
+              <a:tblGrid>
+                <a:gridCol w="2501570"/>
+                <a:gridCol w="2501570"/>
+              </a:tblGrid>
+              <a:tr h="538480">
+                <a:tc>
+                  <a:txBody>
+                    <a:bodyPr wrap="square"/>
+                    <a:lstStyle/>
+                    <a:p>
+                      <a:pPr>
+                        <a:lnSpc>
+                          <a:spcPct val="135000"/>
+                        </a:lnSpc>
+                      </a:pPr>
+                      <a:r>
+                        <a:rPr sz="1639" b="1" i="0">
+                          <a:solidFill>
+                            <a:srgbClr val="111110"/>
+                          </a:solidFill>
+                          <a:latin typeface="Lato"/>
+                          <a:ea typeface="Noto Sans JP"/>
+                          <a:cs typeface="Noto Sans JP"/>
+                        </a:rPr>
+                        <a:t>pipeline/（数）</a:t>
                       </a:r>
                     </a:p>
                   </a:txBody>
@@ -4348,7 +6256,7 @@
                           <a:ea typeface="Noto Sans JP"/>
                           <a:cs typeface="Noto Sans JP"/>
                         </a:rPr>
-                        <a:t>要る機能</a:t>
+                        <a:t>中身</a:t>
                       </a:r>
                     </a:p>
                   </a:txBody>
@@ -4362,7 +6270,7 @@
                   </a:tcPr>
                 </a:tc>
               </a:tr>
-              <a:tr h="653796">
+              <a:tr h="538480">
                 <a:tc>
                   <a:txBody>
                     <a:bodyPr wrap="square"/>
@@ -4382,7 +6290,7 @@
                           <a:ea typeface="Noto Sans JP"/>
                           <a:cs typeface="Noto Sans JP"/>
                         </a:rPr>
-                        <a:t>Web（チャット・トポロジ・承認）</a:t>
+                        <a:t>lab（7）</a:t>
                       </a:r>
                     </a:p>
                   </a:txBody>
@@ -4414,7 +6322,41 @@
                           <a:ea typeface="Noto Sans JP"/>
                           <a:cs typeface="Noto Sans JP"/>
                         </a:rPr>
-                        <a:t>localhost:8080</a:t>
+                        <a:t>lab の EC2</a:t>
+                      </a:r>
+                    </a:p>
+                  </a:txBody>
+                  <a:tcPr marL="91440" marR="91440" marT="45720" marB="45720" anchor="ctr">
+                    <a:lnB w="9525" cap="flat">
+                      <a:solidFill>
+                        <a:srgbClr val="DFDFDF"/>
+                      </a:solidFill>
+                    </a:lnB>
+                    <a:noFill/>
+                  </a:tcPr>
+                </a:tc>
+              </a:tr>
+              <a:tr h="653796">
+                <a:tc>
+                  <a:txBody>
+                    <a:bodyPr wrap="square"/>
+                    <a:lstStyle/>
+                    <a:p>
+                      <a:pPr>
+                        <a:lnSpc>
+                          <a:spcPct val="135000"/>
+                        </a:lnSpc>
+                      </a:pPr>
+                      <a:r>
+                        <a:rPr sz="1639" b="0" i="0">
+                          <a:solidFill>
+                            <a:srgbClr val="1A1A1A"/>
+                          </a:solidFill>
+                          <a:latin typeface="Lato"/>
+                          <a:ea typeface="Noto Sans JP"/>
+                          <a:cs typeface="Noto Sans JP"/>
+                        </a:rPr>
+                        <a:t>stream（57）</a:t>
                       </a:r>
                     </a:p>
                   </a:txBody>
@@ -4446,7 +6388,73 @@
                           <a:ea typeface="Noto Sans JP"/>
                           <a:cs typeface="Noto Sans JP"/>
                         </a:rPr>
-                        <a:t>土台</a:t>
+                        <a:t>MSK・収集 4 種・NLB</a:t>
+                      </a:r>
+                    </a:p>
+                  </a:txBody>
+                  <a:tcPr marL="91440" marR="91440" marT="45720" marB="45720" anchor="ctr">
+                    <a:lnB w="9525" cap="flat">
+                      <a:solidFill>
+                        <a:srgbClr val="DFDFDF"/>
+                      </a:solidFill>
+                    </a:lnB>
+                    <a:noFill/>
+                  </a:tcPr>
+                </a:tc>
+              </a:tr>
+              <a:tr h="653796">
+                <a:tc>
+                  <a:txBody>
+                    <a:bodyPr wrap="square"/>
+                    <a:lstStyle/>
+                    <a:p>
+                      <a:pPr>
+                        <a:lnSpc>
+                          <a:spcPct val="135000"/>
+                        </a:lnSpc>
+                      </a:pPr>
+                      <a:r>
+                        <a:rPr sz="1639" b="0" i="0">
+                          <a:solidFill>
+                            <a:srgbClr val="1A1A1A"/>
+                          </a:solidFill>
+                          <a:latin typeface="Lato"/>
+                          <a:ea typeface="Noto Sans JP"/>
+                          <a:cs typeface="Noto Sans JP"/>
+                        </a:rPr>
+                        <a:t>graph（10）</a:t>
+                      </a:r>
+                    </a:p>
+                  </a:txBody>
+                  <a:tcPr marL="91440" marR="91440" marT="45720" marB="45720" anchor="ctr">
+                    <a:lnB w="9525" cap="flat">
+                      <a:solidFill>
+                        <a:srgbClr val="DFDFDF"/>
+                      </a:solidFill>
+                    </a:lnB>
+                    <a:noFill/>
+                  </a:tcPr>
+                </a:tc>
+                <a:tc>
+                  <a:txBody>
+                    <a:bodyPr wrap="square"/>
+                    <a:lstStyle/>
+                    <a:p>
+                      <a:pPr>
+                        <a:lnSpc>
+                          <a:spcPct val="135000"/>
+                        </a:lnSpc>
+                      </a:pPr>
+                      <a:r>
+                        <a:rPr sz="1639" b="0" i="0">
+                          <a:solidFill>
+                            <a:srgbClr val="1A1A1A"/>
+                          </a:solidFill>
+                          <a:latin typeface="Lato"/>
+                          <a:ea typeface="Noto Sans JP"/>
+                          <a:cs typeface="Noto Sans JP"/>
+                        </a:rPr>
+                        <a:t>Neptune・status Lambda</a:t>
                       </a:r>
                     </a:p>
                   </a:txBody>
@@ -4480,7 +6488,7 @@
                           <a:ea typeface="Noto Sans JP"/>
                           <a:cs typeface="Noto Sans JP"/>
                         </a:rPr>
-                        <a:t>Nautobot</a:t>
+                        <a:t>nautobot（16）</a:t>
                       </a:r>
                     </a:p>
                   </a:txBody>
@@ -4512,137 +6520,7 @@
                           <a:ea typeface="Noto Sans JP"/>
                           <a:cs typeface="Noto Sans JP"/>
                         </a:rPr>
-                        <a:t>localhost:8081</a:t>
-                      </a:r>
-                    </a:p>
-                  </a:txBody>
-                  <a:tcPr marL="91440" marR="91440" marT="45720" marB="45720" anchor="ctr">
-                    <a:lnB w="9525" cap="flat">
-                      <a:solidFill>
-                        <a:srgbClr val="DFDFDF"/>
-                      </a:solidFill>
-                    </a:lnB>
-                    <a:noFill/>
-                  </a:tcPr>
-                </a:tc>
-                <a:tc>
-                  <a:txBody>
-                    <a:bodyPr wrap="square"/>
-                    <a:lstStyle/>
-                    <a:p>
-                      <a:pPr>
-                        <a:lnSpc>
-                          <a:spcPct val="135000"/>
-                        </a:lnSpc>
-                      </a:pPr>
-                      <a:r>
-                        <a:rPr sz="1639" b="0" i="0">
-                          <a:solidFill>
-                            <a:srgbClr val="1A1A1A"/>
-                          </a:solidFill>
-                          <a:latin typeface="Lato"/>
-                          <a:ea typeface="Noto Sans JP"/>
-                          <a:cs typeface="Noto Sans JP"/>
-                        </a:rPr>
-                        <a:t>PIPELINE</a:t>
-                      </a:r>
-                    </a:p>
-                  </a:txBody>
-                  <a:tcPr marL="91440" marR="91440" marT="45720" marB="45720" anchor="ctr">
-                    <a:lnB w="9525" cap="flat">
-                      <a:solidFill>
-                        <a:srgbClr val="DFDFDF"/>
-                      </a:solidFill>
-                    </a:lnB>
-                    <a:noFill/>
-                  </a:tcPr>
-                </a:tc>
-              </a:tr>
-              <a:tr h="538480">
-                <a:tc>
-                  <a:txBody>
-                    <a:bodyPr wrap="square"/>
-                    <a:lstStyle/>
-                    <a:p>
-                      <a:pPr>
-                        <a:lnSpc>
-                          <a:spcPct val="135000"/>
-                        </a:lnSpc>
-                      </a:pPr>
-                      <a:r>
-                        <a:rPr sz="1639" b="0" i="0">
-                          <a:solidFill>
-                            <a:srgbClr val="1A1A1A"/>
-                          </a:solidFill>
-                          <a:latin typeface="Lato"/>
-                          <a:ea typeface="Noto Sans JP"/>
-                          <a:cs typeface="Noto Sans JP"/>
-                        </a:rPr>
-                        <a:t>Kafbat UI</a:t>
-                      </a:r>
-                    </a:p>
-                  </a:txBody>
-                  <a:tcPr marL="91440" marR="91440" marT="45720" marB="45720" anchor="ctr">
-                    <a:lnB w="9525" cap="flat">
-                      <a:solidFill>
-                        <a:srgbClr val="DFDFDF"/>
-                      </a:solidFill>
-                    </a:lnB>
-                    <a:noFill/>
-                  </a:tcPr>
-                </a:tc>
-                <a:tc>
-                  <a:txBody>
-                    <a:bodyPr wrap="square"/>
-                    <a:lstStyle/>
-                    <a:p>
-                      <a:pPr>
-                        <a:lnSpc>
-                          <a:spcPct val="135000"/>
-                        </a:lnSpc>
-                      </a:pPr>
-                      <a:r>
-                        <a:rPr sz="1639" b="0" i="0">
-                          <a:solidFill>
-                            <a:srgbClr val="1A1A1A"/>
-                          </a:solidFill>
-                          <a:latin typeface="Lato"/>
-                          <a:ea typeface="Noto Sans JP"/>
-                          <a:cs typeface="Noto Sans JP"/>
-                        </a:rPr>
-                        <a:t>localhost:8082</a:t>
-                      </a:r>
-                    </a:p>
-                  </a:txBody>
-                  <a:tcPr marL="91440" marR="91440" marT="45720" marB="45720" anchor="ctr">
-                    <a:lnB w="9525" cap="flat">
-                      <a:solidFill>
-                        <a:srgbClr val="DFDFDF"/>
-                      </a:solidFill>
-                    </a:lnB>
-                    <a:noFill/>
-                  </a:tcPr>
-                </a:tc>
-                <a:tc>
-                  <a:txBody>
-                    <a:bodyPr wrap="square"/>
-                    <a:lstStyle/>
-                    <a:p>
-                      <a:pPr>
-                        <a:lnSpc>
-                          <a:spcPct val="135000"/>
-                        </a:lnSpc>
-                      </a:pPr>
-                      <a:r>
-                        <a:rPr sz="1639" b="0" i="0">
-                          <a:solidFill>
-                            <a:srgbClr val="1A1A1A"/>
-                          </a:solidFill>
-                          <a:latin typeface="Lato"/>
-                          <a:ea typeface="Noto Sans JP"/>
-                          <a:cs typeface="Noto Sans JP"/>
-                        </a:rPr>
-                        <a:t>PIPELINE</a:t>
+                        <a:t>Nautobot・RDS</a:t>
                       </a:r>
                     </a:p>
                   </a:txBody>
@@ -4676,7 +6554,7 @@
                           <a:ea typeface="Noto Sans JP"/>
                           <a:cs typeface="Noto Sans JP"/>
                         </a:rPr>
-                        <a:t>Grafana</a:t>
+                        <a:t>analytics（53）</a:t>
                       </a:r>
                     </a:p>
                   </a:txBody>
@@ -4708,235 +6586,7 @@
                           <a:ea typeface="Noto Sans JP"/>
                           <a:cs typeface="Noto Sans JP"/>
                         </a:rPr>
-                        <a:t>localhost:3000</a:t>
-                      </a:r>
-                    </a:p>
-                  </a:txBody>
-                  <a:tcPr marL="91440" marR="91440" marT="45720" marB="45720" anchor="ctr">
-                    <a:lnB w="9525" cap="flat">
-                      <a:solidFill>
-                        <a:srgbClr val="DFDFDF"/>
-                      </a:solidFill>
-                    </a:lnB>
-                    <a:noFill/>
-                  </a:tcPr>
-                </a:tc>
-                <a:tc>
-                  <a:txBody>
-                    <a:bodyPr wrap="square"/>
-                    <a:lstStyle/>
-                    <a:p>
-                      <a:pPr>
-                        <a:lnSpc>
-                          <a:spcPct val="135000"/>
-                        </a:lnSpc>
-                      </a:pPr>
-                      <a:r>
-                        <a:rPr sz="1639" b="0" i="0">
-                          <a:solidFill>
-                            <a:srgbClr val="1A1A1A"/>
-                          </a:solidFill>
-                          <a:latin typeface="Lato"/>
-                          <a:ea typeface="Noto Sans JP"/>
-                          <a:cs typeface="Noto Sans JP"/>
-                        </a:rPr>
-                        <a:t>PIPELINE（grafana）</a:t>
-                      </a:r>
-                    </a:p>
-                  </a:txBody>
-                  <a:tcPr marL="91440" marR="91440" marT="45720" marB="45720" anchor="ctr">
-                    <a:lnB w="9525" cap="flat">
-                      <a:solidFill>
-                        <a:srgbClr val="DFDFDF"/>
-                      </a:solidFill>
-                    </a:lnB>
-                    <a:noFill/>
-                  </a:tcPr>
-                </a:tc>
-              </a:tr>
-              <a:tr h="653796">
-                <a:tc>
-                  <a:txBody>
-                    <a:bodyPr wrap="square"/>
-                    <a:lstStyle/>
-                    <a:p>
-                      <a:pPr>
-                        <a:lnSpc>
-                          <a:spcPct val="135000"/>
-                        </a:lnSpc>
-                      </a:pPr>
-                      <a:r>
-                        <a:rPr sz="1639" b="0" i="0">
-                          <a:solidFill>
-                            <a:srgbClr val="1A1A1A"/>
-                          </a:solidFill>
-                          <a:latin typeface="Lato"/>
-                          <a:ea typeface="Noto Sans JP"/>
-                          <a:cs typeface="Noto Sans JP"/>
-                        </a:rPr>
-                        <a:t>Splunk</a:t>
-                      </a:r>
-                    </a:p>
-                  </a:txBody>
-                  <a:tcPr marL="91440" marR="91440" marT="45720" marB="45720" anchor="ctr">
-                    <a:lnB w="9525" cap="flat">
-                      <a:solidFill>
-                        <a:srgbClr val="DFDFDF"/>
-                      </a:solidFill>
-                    </a:lnB>
-                    <a:noFill/>
-                  </a:tcPr>
-                </a:tc>
-                <a:tc>
-                  <a:txBody>
-                    <a:bodyPr wrap="square"/>
-                    <a:lstStyle/>
-                    <a:p>
-                      <a:pPr>
-                        <a:lnSpc>
-                          <a:spcPct val="135000"/>
-                        </a:lnSpc>
-                      </a:pPr>
-                      <a:r>
-                        <a:rPr sz="1639" b="0" i="0">
-                          <a:solidFill>
-                            <a:srgbClr val="1A1A1A"/>
-                          </a:solidFill>
-                          <a:latin typeface="Lato"/>
-                          <a:ea typeface="Noto Sans JP"/>
-                          <a:cs typeface="Noto Sans JP"/>
-                        </a:rPr>
-                        <a:t>localhost:8000</a:t>
-                      </a:r>
-                    </a:p>
-                  </a:txBody>
-                  <a:tcPr marL="91440" marR="91440" marT="45720" marB="45720" anchor="ctr">
-                    <a:lnB w="9525" cap="flat">
-                      <a:solidFill>
-                        <a:srgbClr val="DFDFDF"/>
-                      </a:solidFill>
-                    </a:lnB>
-                    <a:noFill/>
-                  </a:tcPr>
-                </a:tc>
-                <a:tc>
-                  <a:txBody>
-                    <a:bodyPr wrap="square"/>
-                    <a:lstStyle/>
-                    <a:p>
-                      <a:pPr>
-                        <a:lnSpc>
-                          <a:spcPct val="135000"/>
-                        </a:lnSpc>
-                      </a:pPr>
-                      <a:r>
-                        <a:rPr sz="1639" b="0" i="0">
-                          <a:solidFill>
-                            <a:srgbClr val="1A1A1A"/>
-                          </a:solidFill>
-                          <a:latin typeface="Lato"/>
-                          <a:ea typeface="Noto Sans JP"/>
-                          <a:cs typeface="Noto Sans JP"/>
-                        </a:rPr>
-                        <a:t>PIPELINE（splunk）</a:t>
-                      </a:r>
-                    </a:p>
-                  </a:txBody>
-                  <a:tcPr marL="91440" marR="91440" marT="45720" marB="45720" anchor="ctr">
-                    <a:lnB w="9525" cap="flat">
-                      <a:solidFill>
-                        <a:srgbClr val="DFDFDF"/>
-                      </a:solidFill>
-                    </a:lnB>
-                    <a:noFill/>
-                  </a:tcPr>
-                </a:tc>
-              </a:tr>
-              <a:tr h="538480">
-                <a:tc>
-                  <a:txBody>
-                    <a:bodyPr wrap="square"/>
-                    <a:lstStyle/>
-                    <a:p>
-                      <a:pPr>
-                        <a:lnSpc>
-                          <a:spcPct val="135000"/>
-                        </a:lnSpc>
-                      </a:pPr>
-                      <a:r>
-                        <a:rPr sz="1639" b="0" i="0">
-                          <a:solidFill>
-                            <a:srgbClr val="1A1A1A"/>
-                          </a:solidFill>
-                          <a:latin typeface="Lato"/>
-                          <a:ea typeface="Noto Sans JP"/>
-                          <a:cs typeface="Noto Sans JP"/>
-                        </a:rPr>
-                        <a:t>Temporal UI</a:t>
-                      </a:r>
-                    </a:p>
-                  </a:txBody>
-                  <a:tcPr marL="91440" marR="91440" marT="45720" marB="45720" anchor="ctr">
-                    <a:lnB w="9525" cap="flat">
-                      <a:solidFill>
-                        <a:srgbClr val="DFDFDF"/>
-                      </a:solidFill>
-                    </a:lnB>
-                    <a:noFill/>
-                  </a:tcPr>
-                </a:tc>
-                <a:tc>
-                  <a:txBody>
-                    <a:bodyPr wrap="square"/>
-                    <a:lstStyle/>
-                    <a:p>
-                      <a:pPr>
-                        <a:lnSpc>
-                          <a:spcPct val="135000"/>
-                        </a:lnSpc>
-                      </a:pPr>
-                      <a:r>
-                        <a:rPr sz="1639" b="0" i="0">
-                          <a:solidFill>
-                            <a:srgbClr val="1A1A1A"/>
-                          </a:solidFill>
-                          <a:latin typeface="Lato"/>
-                          <a:ea typeface="Noto Sans JP"/>
-                          <a:cs typeface="Noto Sans JP"/>
-                        </a:rPr>
-                        <a:t>localhost:8233</a:t>
-                      </a:r>
-                    </a:p>
-                  </a:txBody>
-                  <a:tcPr marL="91440" marR="91440" marT="45720" marB="45720" anchor="ctr">
-                    <a:lnB w="9525" cap="flat">
-                      <a:solidFill>
-                        <a:srgbClr val="DFDFDF"/>
-                      </a:solidFill>
-                    </a:lnB>
-                    <a:noFill/>
-                  </a:tcPr>
-                </a:tc>
-                <a:tc>
-                  <a:txBody>
-                    <a:bodyPr wrap="square"/>
-                    <a:lstStyle/>
-                    <a:p>
-                      <a:pPr>
-                        <a:lnSpc>
-                          <a:spcPct val="135000"/>
-                        </a:lnSpc>
-                      </a:pPr>
-                      <a:r>
-                        <a:rPr sz="1639" b="0" i="0">
-                          <a:solidFill>
-                            <a:srgbClr val="1A1A1A"/>
-                          </a:solidFill>
-                          <a:latin typeface="Lato"/>
-                          <a:ea typeface="Noto Sans JP"/>
-                          <a:cs typeface="Noto Sans JP"/>
-                        </a:rPr>
-                        <a:t>WORKFLOW</a:t>
+                        <a:t>EMR・格納先・Grafana・Splunk</a:t>
                       </a:r>
                     </a:p>
                   </a:txBody>
@@ -4956,7 +6606,7 @@
       </p:graphicFrame>
       <p:sp>
         <p:nvSpPr>
-          <p:cNvPr id="6" name="TextBox 5"/>
+          <p:cNvPr id="8" name="TextBox 7"/>
           <p:cNvSpPr txBox="1"/>
           <p:nvPr/>
         </p:nvSpPr>
@@ -4986,7 +6636,7 @@
                 <a:ea typeface="Menlo"/>
                 <a:cs typeface="Menlo"/>
               </a:rPr>
-              <a:t>10 / 10</a:t>
+              <a:t>3 / 10</a:t>
             </a:r>
           </a:p>
         </p:txBody>
@@ -4999,7 +6649,7 @@
 </p:sld>
 </file>
 
-<file path=ppt/slides/slide2.xml><?xml version="1.0" encoding="utf-8"?>
+<file path=ppt/slides/slide4.xml><?xml version="1.0" encoding="utf-8"?>
 <p:sld xmlns:a="http://schemas.openxmlformats.org/drawingml/2006/main" xmlns:p="http://schemas.openxmlformats.org/presentationml/2006/main" xmlns:r="http://schemas.openxmlformats.org/officeDocument/2006/relationships">
   <p:cSld>
     <p:bg>
@@ -5097,7 +6747,7 @@
                 <a:ea typeface="Noto Sans JP"/>
                 <a:cs typeface="Noto Sans JP"/>
               </a:rPr>
-              <a:t>データは左から右へ流れ、修復だけが lab へ戻る</a:t>
+              <a:t>データは収集から 6 段で進み、エージェントは最後に呼ばれる</a:t>
             </a:r>
           </a:p>
         </p:txBody>
@@ -5137,30 +6787,221 @@
           </a:fontRef>
         </p:style>
       </p:cxnSp>
-      <p:pic>
-        <p:nvPicPr>
-          <p:cNvPr id="5" name="Picture 4" descr="managed-overview.png"/>
-          <p:cNvPicPr>
-            <a:picLocks noChangeAspect="1"/>
-          </p:cNvPicPr>
+      <p:sp>
+        <p:nvSpPr>
+          <p:cNvPr id="5" name="TextBox 4"/>
+          <p:cNvSpPr txBox="1"/>
           <p:nvPr/>
-        </p:nvPicPr>
-        <p:blipFill>
-          <a:blip r:embed="rId2"/>
-          <a:stretch>
-            <a:fillRect/>
-          </a:stretch>
-        </p:blipFill>
+        </p:nvSpPr>
         <p:spPr>
           <a:xfrm>
             <a:off x="841248" y="1755648"/>
-            <a:ext cx="10509199" cy="3931219"/>
+            <a:ext cx="10509199" cy="3426460"/>
           </a:xfrm>
           <a:prstGeom prst="rect">
             <a:avLst/>
           </a:prstGeom>
+          <a:noFill/>
         </p:spPr>
-      </p:pic>
+        <p:txBody>
+          <a:bodyPr wrap="square" lIns="0" rIns="0" tIns="0" bIns="0" anchor="t">
+            <a:spAutoFit/>
+          </a:bodyPr>
+          <a:lstStyle/>
+          <a:p>
+            <a:pPr marL="0" indent="0">
+              <a:lnSpc>
+                <a:spcPct val="155000"/>
+              </a:lnSpc>
+              <a:spcAft>
+                <a:spcPts val="880"/>
+              </a:spcAft>
+            </a:pPr>
+            <a:r>
+              <a:rPr sz="2000" b="0" i="0">
+                <a:solidFill>
+                  <a:srgbClr val="D63A2F"/>
+                </a:solidFill>
+                <a:latin typeface="Lato"/>
+                <a:ea typeface="Noto Sans JP"/>
+                <a:cs typeface="Noto Sans JP"/>
+              </a:rPr>
+              <a:t>・</a:t>
+            </a:r>
+            <a:r>
+              <a:rPr sz="2000" b="0" i="0">
+                <a:solidFill>
+                  <a:srgbClr val="1A1A1A"/>
+                </a:solidFill>
+                <a:latin typeface="Lato"/>
+                <a:ea typeface="Noto Sans JP"/>
+                <a:cs typeface="Noto Sans JP"/>
+              </a:rPr>
+              <a:t>1 収集: 4 種のコレクターが MSK のトピック 5 つへ書く</a:t>
+            </a:r>
+          </a:p>
+          <a:p>
+            <a:pPr marL="0" indent="0">
+              <a:lnSpc>
+                <a:spcPct val="155000"/>
+              </a:lnSpc>
+              <a:spcAft>
+                <a:spcPts val="880"/>
+              </a:spcAft>
+            </a:pPr>
+            <a:r>
+              <a:rPr sz="2000" b="0" i="0">
+                <a:solidFill>
+                  <a:srgbClr val="D63A2F"/>
+                </a:solidFill>
+                <a:latin typeface="Lato"/>
+                <a:ea typeface="Noto Sans JP"/>
+                <a:cs typeface="Noto Sans JP"/>
+              </a:rPr>
+              <a:t>・</a:t>
+            </a:r>
+            <a:r>
+              <a:rPr sz="2000" b="0" i="0">
+                <a:solidFill>
+                  <a:srgbClr val="1A1A1A"/>
+                </a:solidFill>
+                <a:latin typeface="Lato"/>
+                <a:ea typeface="Noto Sans JP"/>
+                <a:cs typeface="Noto Sans JP"/>
+              </a:rPr>
+              <a:t>2 格納: Spark が STORES の格納先へ書き分ける</a:t>
+            </a:r>
+          </a:p>
+          <a:p>
+            <a:pPr marL="0" indent="0">
+              <a:lnSpc>
+                <a:spcPct val="155000"/>
+              </a:lnSpc>
+              <a:spcAft>
+                <a:spcPts val="880"/>
+              </a:spcAft>
+            </a:pPr>
+            <a:r>
+              <a:rPr sz="2000" b="0" i="0">
+                <a:solidFill>
+                  <a:srgbClr val="D63A2F"/>
+                </a:solidFill>
+                <a:latin typeface="Lato"/>
+                <a:ea typeface="Noto Sans JP"/>
+                <a:cs typeface="Noto Sans JP"/>
+              </a:rPr>
+              <a:t>・</a:t>
+            </a:r>
+            <a:r>
+              <a:rPr sz="2000" b="0" i="0">
+                <a:solidFill>
+                  <a:srgbClr val="1A1A1A"/>
+                </a:solidFill>
+                <a:latin typeface="Lato"/>
+                <a:ea typeface="Noto Sans JP"/>
+                <a:cs typeface="Noto Sans JP"/>
+              </a:rPr>
+              <a:t>3 可視化: Grafana がログとメトリクス、Splunk が全部を見せる</a:t>
+            </a:r>
+          </a:p>
+          <a:p>
+            <a:pPr marL="0" indent="0">
+              <a:lnSpc>
+                <a:spcPct val="155000"/>
+              </a:lnSpc>
+              <a:spcAft>
+                <a:spcPts val="880"/>
+              </a:spcAft>
+            </a:pPr>
+            <a:r>
+              <a:rPr sz="2000" b="0" i="0">
+                <a:solidFill>
+                  <a:srgbClr val="D63A2F"/>
+                </a:solidFill>
+                <a:latin typeface="Lato"/>
+                <a:ea typeface="Noto Sans JP"/>
+                <a:cs typeface="Noto Sans JP"/>
+              </a:rPr>
+              <a:t>・</a:t>
+            </a:r>
+            <a:r>
+              <a:rPr sz="2000" b="0" i="0">
+                <a:solidFill>
+                  <a:srgbClr val="1A1A1A"/>
+                </a:solidFill>
+                <a:latin typeface="Lato"/>
+                <a:ea typeface="Noto Sans JP"/>
+                <a:cs typeface="Noto Sans JP"/>
+              </a:rPr>
+              <a:t>4 アラート: 同じ 4 種を SNS へ出し、Neptune の status を変える</a:t>
+            </a:r>
+          </a:p>
+          <a:p>
+            <a:pPr marL="0" indent="0">
+              <a:lnSpc>
+                <a:spcPct val="155000"/>
+              </a:lnSpc>
+              <a:spcAft>
+                <a:spcPts val="880"/>
+              </a:spcAft>
+            </a:pPr>
+            <a:r>
+              <a:rPr sz="2000" b="0" i="0">
+                <a:solidFill>
+                  <a:srgbClr val="D63A2F"/>
+                </a:solidFill>
+                <a:latin typeface="Lato"/>
+                <a:ea typeface="Noto Sans JP"/>
+                <a:cs typeface="Noto Sans JP"/>
+              </a:rPr>
+              <a:t>・</a:t>
+            </a:r>
+            <a:r>
+              <a:rPr sz="2000" b="0" i="0">
+                <a:solidFill>
+                  <a:srgbClr val="1A1A1A"/>
+                </a:solidFill>
+                <a:latin typeface="Lato"/>
+                <a:ea typeface="Noto Sans JP"/>
+                <a:cs typeface="Noto Sans JP"/>
+              </a:rPr>
+              <a:t>5 ワークフロー: link_down だけが人の承認を経て lab を直す</a:t>
+            </a:r>
+          </a:p>
+          <a:p>
+            <a:pPr marL="0" indent="0">
+              <a:lnSpc>
+                <a:spcPct val="155000"/>
+              </a:lnSpc>
+              <a:spcAft>
+                <a:spcPts val="880"/>
+              </a:spcAft>
+            </a:pPr>
+            <a:r>
+              <a:rPr sz="2000" b="0" i="0">
+                <a:solidFill>
+                  <a:srgbClr val="D63A2F"/>
+                </a:solidFill>
+                <a:latin typeface="Lato"/>
+                <a:ea typeface="Noto Sans JP"/>
+                <a:cs typeface="Noto Sans JP"/>
+              </a:rPr>
+              <a:t>・</a:t>
+            </a:r>
+            <a:r>
+              <a:rPr sz="2000" b="0" i="0">
+                <a:solidFill>
+                  <a:srgbClr val="1A1A1A"/>
+                </a:solidFill>
+                <a:latin typeface="Lato"/>
+                <a:ea typeface="Noto Sans JP"/>
+                <a:cs typeface="Noto Sans JP"/>
+              </a:rPr>
+              <a:t>6 エージェント: MCP ツールで調べ、原因と修復案を返す</a:t>
+            </a:r>
+          </a:p>
+        </p:txBody>
+      </p:sp>
       <p:sp>
         <p:nvSpPr>
           <p:cNvPr id="6" name="TextBox 5"/>
@@ -5193,7 +7034,7 @@
                 <a:ea typeface="Menlo"/>
                 <a:cs typeface="Menlo"/>
               </a:rPr>
-              <a:t>2 / 10</a:t>
+              <a:t>4 / 10</a:t>
             </a:r>
           </a:p>
         </p:txBody>
@@ -5206,7 +7047,7 @@
 </p:sld>
 </file>
 
-<file path=ppt/slides/slide3.xml><?xml version="1.0" encoding="utf-8"?>
+<file path=ppt/slides/slide5.xml><?xml version="1.0" encoding="utf-8"?>
 <p:sld xmlns:a="http://schemas.openxmlformats.org/drawingml/2006/main" xmlns:p="http://schemas.openxmlformats.org/presentationml/2006/main" xmlns:r="http://schemas.openxmlformats.org/officeDocument/2006/relationships">
   <p:cSld>
     <p:bg>
@@ -5304,7 +7145,7 @@
                 <a:ea typeface="Noto Sans JP"/>
                 <a:cs typeface="Noto Sans JP"/>
               </a:rPr>
-              <a:t>9 つの Terraform ルートを ops/up.sh が順に作る</a:t>
+              <a:t>収集から格納まで: Spark が STORES のまとまりごとに書き分ける</a:t>
             </a:r>
           </a:p>
         </p:txBody>
@@ -5353,7 +7194,7 @@
         <p:spPr>
           <a:xfrm>
             <a:off x="841248" y="1755648"/>
-            <a:ext cx="10509199" cy="275590"/>
+            <a:ext cx="10509199" cy="393700"/>
           </a:xfrm>
           <a:prstGeom prst="rect">
             <a:avLst/>
@@ -5372,7 +7213,7 @@
               </a:lnSpc>
             </a:pPr>
             <a:r>
-              <a:rPr sz="1400" b="0" i="0">
+              <a:rPr sz="2000" b="0" i="0">
                 <a:solidFill>
                   <a:srgbClr val="1A1A1A"/>
                 </a:solidFill>
@@ -5380,7 +7221,7 @@
                 <a:ea typeface="Noto Sans JP"/>
                 <a:cs typeface="Noto Sans JP"/>
               </a:rPr>
-              <a:t>数は各ルートの tf にある resource ブロックの数（count・for_each で増える実数ではない）。</a:t>
+              <a:t>gnmic は取りに行き、ほかの 3 種は内部 NLB の裏で受ける。</a:t>
             </a:r>
           </a:p>
         </p:txBody>
@@ -5394,1213 +7235,8 @@
           <p:nvPr/>
         </p:nvGraphicFramePr>
         <p:xfrm>
-          <a:off x="841248" y="2268982"/>
-          <a:ext cx="5003140" cy="2264000"/>
-        </p:xfrm>
-        <a:graphic>
-          <a:graphicData uri="http://schemas.openxmlformats.org/drawingml/2006/table">
-            <a:tbl>
-              <a:tblPr firstRow="1" bandRow="0"/>
-              <a:tblGrid>
-                <a:gridCol w="2501570"/>
-                <a:gridCol w="2501570"/>
-              </a:tblGrid>
-              <a:tr h="404368">
-                <a:tc>
-                  <a:txBody>
-                    <a:bodyPr wrap="square"/>
-                    <a:lstStyle/>
-                    <a:p>
-                      <a:pPr>
-                        <a:lnSpc>
-                          <a:spcPct val="135000"/>
-                        </a:lnSpc>
-                      </a:pPr>
-                      <a:r>
-                        <a:rPr sz="1147" b="1" i="0">
-                          <a:solidFill>
-                            <a:srgbClr val="111110"/>
-                          </a:solidFill>
-                          <a:latin typeface="Lato"/>
-                          <a:ea typeface="Noto Sans JP"/>
-                          <a:cs typeface="Noto Sans JP"/>
-                        </a:rPr>
-                        <a:t>ルート（数）</a:t>
-                      </a:r>
-                    </a:p>
-                  </a:txBody>
-                  <a:tcPr marL="91440" marR="91440" marT="45720" marB="45720" anchor="ctr">
-                    <a:lnB w="15240" cap="flat">
-                      <a:solidFill>
-                        <a:srgbClr val="111110"/>
-                      </a:solidFill>
-                    </a:lnB>
-                    <a:noFill/>
-                  </a:tcPr>
-                </a:tc>
-                <a:tc>
-                  <a:txBody>
-                    <a:bodyPr wrap="square"/>
-                    <a:lstStyle/>
-                    <a:p>
-                      <a:pPr>
-                        <a:lnSpc>
-                          <a:spcPct val="135000"/>
-                        </a:lnSpc>
-                      </a:pPr>
-                      <a:r>
-                        <a:rPr sz="1147" b="1" i="0">
-                          <a:solidFill>
-                            <a:srgbClr val="111110"/>
-                          </a:solidFill>
-                          <a:latin typeface="Lato"/>
-                          <a:ea typeface="Noto Sans JP"/>
-                          <a:cs typeface="Noto Sans JP"/>
-                        </a:rPr>
-                        <a:t>中身</a:t>
-                      </a:r>
-                    </a:p>
-                  </a:txBody>
-                  <a:tcPr marL="91440" marR="91440" marT="45720" marB="45720" anchor="ctr">
-                    <a:lnB w="15240" cap="flat">
-                      <a:solidFill>
-                        <a:srgbClr val="111110"/>
-                      </a:solidFill>
-                    </a:lnB>
-                    <a:noFill/>
-                  </a:tcPr>
-                </a:tc>
-              </a:tr>
-              <a:tr h="404368">
-                <a:tc>
-                  <a:txBody>
-                    <a:bodyPr wrap="square"/>
-                    <a:lstStyle/>
-                    <a:p>
-                      <a:pPr>
-                        <a:lnSpc>
-                          <a:spcPct val="135000"/>
-                        </a:lnSpc>
-                      </a:pPr>
-                      <a:r>
-                        <a:rPr sz="1147" b="0" i="0">
-                          <a:solidFill>
-                            <a:srgbClr val="1A1A1A"/>
-                          </a:solidFill>
-                          <a:latin typeface="Lato"/>
-                          <a:ea typeface="Noto Sans JP"/>
-                          <a:cs typeface="Noto Sans JP"/>
-                        </a:rPr>
-                        <a:t>base/ecr（6）</a:t>
-                      </a:r>
-                    </a:p>
-                  </a:txBody>
-                  <a:tcPr marL="91440" marR="91440" marT="45720" marB="45720" anchor="ctr">
-                    <a:lnB w="9525" cap="flat">
-                      <a:solidFill>
-                        <a:srgbClr val="DFDFDF"/>
-                      </a:solidFill>
-                    </a:lnB>
-                    <a:noFill/>
-                  </a:tcPr>
-                </a:tc>
-                <a:tc>
-                  <a:txBody>
-                    <a:bodyPr wrap="square"/>
-                    <a:lstStyle/>
-                    <a:p>
-                      <a:pPr>
-                        <a:lnSpc>
-                          <a:spcPct val="135000"/>
-                        </a:lnSpc>
-                      </a:pPr>
-                      <a:r>
-                        <a:rPr sz="1147" b="0" i="0">
-                          <a:solidFill>
-                            <a:srgbClr val="1A1A1A"/>
-                          </a:solidFill>
-                          <a:latin typeface="Lato"/>
-                          <a:ea typeface="Noto Sans JP"/>
-                          <a:cs typeface="Noto Sans JP"/>
-                        </a:rPr>
-                        <a:t>ECR</a:t>
-                      </a:r>
-                    </a:p>
-                  </a:txBody>
-                  <a:tcPr marL="91440" marR="91440" marT="45720" marB="45720" anchor="ctr">
-                    <a:lnB w="9525" cap="flat">
-                      <a:solidFill>
-                        <a:srgbClr val="DFDFDF"/>
-                      </a:solidFill>
-                    </a:lnB>
-                    <a:noFill/>
-                  </a:tcPr>
-                </a:tc>
-              </a:tr>
-              <a:tr h="485088">
-                <a:tc>
-                  <a:txBody>
-                    <a:bodyPr wrap="square"/>
-                    <a:lstStyle/>
-                    <a:p>
-                      <a:pPr>
-                        <a:lnSpc>
-                          <a:spcPct val="135000"/>
-                        </a:lnSpc>
-                      </a:pPr>
-                      <a:r>
-                        <a:rPr sz="1147" b="0" i="0">
-                          <a:solidFill>
-                            <a:srgbClr val="1A1A1A"/>
-                          </a:solidFill>
-                          <a:latin typeface="Lato"/>
-                          <a:ea typeface="Noto Sans JP"/>
-                          <a:cs typeface="Noto Sans JP"/>
-                        </a:rPr>
-                        <a:t>base/core（39）</a:t>
-                      </a:r>
-                    </a:p>
-                  </a:txBody>
-                  <a:tcPr marL="91440" marR="91440" marT="45720" marB="45720" anchor="ctr">
-                    <a:lnB w="9525" cap="flat">
-                      <a:solidFill>
-                        <a:srgbClr val="DFDFDF"/>
-                      </a:solidFill>
-                    </a:lnB>
-                    <a:noFill/>
-                  </a:tcPr>
-                </a:tc>
-                <a:tc>
-                  <a:txBody>
-                    <a:bodyPr wrap="square"/>
-                    <a:lstStyle/>
-                    <a:p>
-                      <a:pPr>
-                        <a:lnSpc>
-                          <a:spcPct val="135000"/>
-                        </a:lnSpc>
-                      </a:pPr>
-                      <a:r>
-                        <a:rPr sz="1147" b="0" i="0">
-                          <a:solidFill>
-                            <a:srgbClr val="1A1A1A"/>
-                          </a:solidFill>
-                          <a:latin typeface="Lato"/>
-                          <a:ea typeface="Noto Sans JP"/>
-                          <a:cs typeface="Noto Sans JP"/>
-                        </a:rPr>
-                        <a:t>VPC・エンドポイント・SG・Web・SNS</a:t>
-                      </a:r>
-                    </a:p>
-                  </a:txBody>
-                  <a:tcPr marL="91440" marR="91440" marT="45720" marB="45720" anchor="ctr">
-                    <a:lnB w="9525" cap="flat">
-                      <a:solidFill>
-                        <a:srgbClr val="DFDFDF"/>
-                      </a:solidFill>
-                    </a:lnB>
-                    <a:noFill/>
-                  </a:tcPr>
-                </a:tc>
-              </a:tr>
-              <a:tr h="485088">
-                <a:tc>
-                  <a:txBody>
-                    <a:bodyPr wrap="square"/>
-                    <a:lstStyle/>
-                    <a:p>
-                      <a:pPr>
-                        <a:lnSpc>
-                          <a:spcPct val="135000"/>
-                        </a:lnSpc>
-                      </a:pPr>
-                      <a:r>
-                        <a:rPr sz="1147" b="0" i="0">
-                          <a:solidFill>
-                            <a:srgbClr val="1A1A1A"/>
-                          </a:solidFill>
-                          <a:latin typeface="Lato"/>
-                          <a:ea typeface="Noto Sans JP"/>
-                          <a:cs typeface="Noto Sans JP"/>
-                        </a:rPr>
-                        <a:t>agent（21）</a:t>
-                      </a:r>
-                    </a:p>
-                  </a:txBody>
-                  <a:tcPr marL="91440" marR="91440" marT="45720" marB="45720" anchor="ctr">
-                    <a:lnB w="9525" cap="flat">
-                      <a:solidFill>
-                        <a:srgbClr val="DFDFDF"/>
-                      </a:solidFill>
-                    </a:lnB>
-                    <a:noFill/>
-                  </a:tcPr>
-                </a:tc>
-                <a:tc>
-                  <a:txBody>
-                    <a:bodyPr wrap="square"/>
-                    <a:lstStyle/>
-                    <a:p>
-                      <a:pPr>
-                        <a:lnSpc>
-                          <a:spcPct val="135000"/>
-                        </a:lnSpc>
-                      </a:pPr>
-                      <a:r>
-                        <a:rPr sz="1147" b="0" i="0">
-                          <a:solidFill>
-                            <a:srgbClr val="1A1A1A"/>
-                          </a:solidFill>
-                          <a:latin typeface="Lato"/>
-                          <a:ea typeface="Noto Sans JP"/>
-                          <a:cs typeface="Noto Sans JP"/>
-                        </a:rPr>
-                        <a:t>Runtime・ガードレール・KB</a:t>
-                      </a:r>
-                    </a:p>
-                  </a:txBody>
-                  <a:tcPr marL="91440" marR="91440" marT="45720" marB="45720" anchor="ctr">
-                    <a:lnB w="9525" cap="flat">
-                      <a:solidFill>
-                        <a:srgbClr val="DFDFDF"/>
-                      </a:solidFill>
-                    </a:lnB>
-                    <a:noFill/>
-                  </a:tcPr>
-                </a:tc>
-              </a:tr>
-              <a:tr h="485088">
-                <a:tc>
-                  <a:txBody>
-                    <a:bodyPr wrap="square"/>
-                    <a:lstStyle/>
-                    <a:p>
-                      <a:pPr>
-                        <a:lnSpc>
-                          <a:spcPct val="135000"/>
-                        </a:lnSpc>
-                      </a:pPr>
-                      <a:r>
-                        <a:rPr sz="1147" b="0" i="0">
-                          <a:solidFill>
-                            <a:srgbClr val="1A1A1A"/>
-                          </a:solidFill>
-                          <a:latin typeface="Lato"/>
-                          <a:ea typeface="Noto Sans JP"/>
-                          <a:cs typeface="Noto Sans JP"/>
-                        </a:rPr>
-                        <a:t>workflow（35）</a:t>
-                      </a:r>
-                    </a:p>
-                  </a:txBody>
-                  <a:tcPr marL="91440" marR="91440" marT="45720" marB="45720" anchor="ctr">
-                    <a:lnB w="9525" cap="flat">
-                      <a:solidFill>
-                        <a:srgbClr val="DFDFDF"/>
-                      </a:solidFill>
-                    </a:lnB>
-                    <a:noFill/>
-                  </a:tcPr>
-                </a:tc>
-                <a:tc>
-                  <a:txBody>
-                    <a:bodyPr wrap="square"/>
-                    <a:lstStyle/>
-                    <a:p>
-                      <a:pPr>
-                        <a:lnSpc>
-                          <a:spcPct val="135000"/>
-                        </a:lnSpc>
-                      </a:pPr>
-                      <a:r>
-                        <a:rPr sz="1147" b="0" i="0">
-                          <a:solidFill>
-                            <a:srgbClr val="1A1A1A"/>
-                          </a:solidFill>
-                          <a:latin typeface="Lato"/>
-                          <a:ea typeface="Noto Sans JP"/>
-                          <a:cs typeface="Noto Sans JP"/>
-                        </a:rPr>
-                        <a:t>Temporal・Gateway MCP・SQS</a:t>
-                      </a:r>
-                    </a:p>
-                  </a:txBody>
-                  <a:tcPr marL="91440" marR="91440" marT="45720" marB="45720" anchor="ctr">
-                    <a:lnB w="9525" cap="flat">
-                      <a:solidFill>
-                        <a:srgbClr val="DFDFDF"/>
-                      </a:solidFill>
-                    </a:lnB>
-                    <a:noFill/>
-                  </a:tcPr>
-                </a:tc>
-              </a:tr>
-            </a:tbl>
-          </a:graphicData>
-        </a:graphic>
-      </p:graphicFrame>
-      <p:graphicFrame>
-        <p:nvGraphicFramePr>
-          <p:cNvPr id="7" name="Table 6"/>
-          <p:cNvGraphicFramePr>
-            <a:graphicFrameLocks noGrp="1"/>
-          </p:cNvGraphicFramePr>
-          <p:nvPr/>
-        </p:nvGraphicFramePr>
-        <p:xfrm>
-          <a:off x="6347308" y="2268982"/>
-          <a:ext cx="5003140" cy="2945912"/>
-        </p:xfrm>
-        <a:graphic>
-          <a:graphicData uri="http://schemas.openxmlformats.org/drawingml/2006/table">
-            <a:tbl>
-              <a:tblPr firstRow="1" bandRow="0"/>
-              <a:tblGrid>
-                <a:gridCol w="2501570"/>
-                <a:gridCol w="2501570"/>
-              </a:tblGrid>
-              <a:tr h="404368">
-                <a:tc>
-                  <a:txBody>
-                    <a:bodyPr wrap="square"/>
-                    <a:lstStyle/>
-                    <a:p>
-                      <a:pPr>
-                        <a:lnSpc>
-                          <a:spcPct val="135000"/>
-                        </a:lnSpc>
-                      </a:pPr>
-                      <a:r>
-                        <a:rPr sz="1147" b="1" i="0">
-                          <a:solidFill>
-                            <a:srgbClr val="111110"/>
-                          </a:solidFill>
-                          <a:latin typeface="Lato"/>
-                          <a:ea typeface="Noto Sans JP"/>
-                          <a:cs typeface="Noto Sans JP"/>
-                        </a:rPr>
-                        <a:t>ルート（数）</a:t>
-                      </a:r>
-                    </a:p>
-                  </a:txBody>
-                  <a:tcPr marL="91440" marR="91440" marT="45720" marB="45720" anchor="ctr">
-                    <a:lnB w="15240" cap="flat">
-                      <a:solidFill>
-                        <a:srgbClr val="111110"/>
-                      </a:solidFill>
-                    </a:lnB>
-                    <a:noFill/>
-                  </a:tcPr>
-                </a:tc>
-                <a:tc>
-                  <a:txBody>
-                    <a:bodyPr wrap="square"/>
-                    <a:lstStyle/>
-                    <a:p>
-                      <a:pPr>
-                        <a:lnSpc>
-                          <a:spcPct val="135000"/>
-                        </a:lnSpc>
-                      </a:pPr>
-                      <a:r>
-                        <a:rPr sz="1147" b="1" i="0">
-                          <a:solidFill>
-                            <a:srgbClr val="111110"/>
-                          </a:solidFill>
-                          <a:latin typeface="Lato"/>
-                          <a:ea typeface="Noto Sans JP"/>
-                          <a:cs typeface="Noto Sans JP"/>
-                        </a:rPr>
-                        <a:t>中身</a:t>
-                      </a:r>
-                    </a:p>
-                  </a:txBody>
-                  <a:tcPr marL="91440" marR="91440" marT="45720" marB="45720" anchor="ctr">
-                    <a:lnB w="15240" cap="flat">
-                      <a:solidFill>
-                        <a:srgbClr val="111110"/>
-                      </a:solidFill>
-                    </a:lnB>
-                    <a:noFill/>
-                  </a:tcPr>
-                </a:tc>
-              </a:tr>
-              <a:tr h="404368">
-                <a:tc>
-                  <a:txBody>
-                    <a:bodyPr wrap="square"/>
-                    <a:lstStyle/>
-                    <a:p>
-                      <a:pPr>
-                        <a:lnSpc>
-                          <a:spcPct val="135000"/>
-                        </a:lnSpc>
-                      </a:pPr>
-                      <a:r>
-                        <a:rPr sz="1147" b="0" i="0">
-                          <a:solidFill>
-                            <a:srgbClr val="1A1A1A"/>
-                          </a:solidFill>
-                          <a:latin typeface="Lato"/>
-                          <a:ea typeface="Noto Sans JP"/>
-                          <a:cs typeface="Noto Sans JP"/>
-                        </a:rPr>
-                        <a:t>pipeline/lab（7）</a:t>
-                      </a:r>
-                    </a:p>
-                  </a:txBody>
-                  <a:tcPr marL="91440" marR="91440" marT="45720" marB="45720" anchor="ctr">
-                    <a:lnB w="9525" cap="flat">
-                      <a:solidFill>
-                        <a:srgbClr val="DFDFDF"/>
-                      </a:solidFill>
-                    </a:lnB>
-                    <a:noFill/>
-                  </a:tcPr>
-                </a:tc>
-                <a:tc>
-                  <a:txBody>
-                    <a:bodyPr wrap="square"/>
-                    <a:lstStyle/>
-                    <a:p>
-                      <a:pPr>
-                        <a:lnSpc>
-                          <a:spcPct val="135000"/>
-                        </a:lnSpc>
-                      </a:pPr>
-                      <a:r>
-                        <a:rPr sz="1147" b="0" i="0">
-                          <a:solidFill>
-                            <a:srgbClr val="1A1A1A"/>
-                          </a:solidFill>
-                          <a:latin typeface="Lato"/>
-                          <a:ea typeface="Noto Sans JP"/>
-                          <a:cs typeface="Noto Sans JP"/>
-                        </a:rPr>
-                        <a:t>lab EC2</a:t>
-                      </a:r>
-                    </a:p>
-                  </a:txBody>
-                  <a:tcPr marL="91440" marR="91440" marT="45720" marB="45720" anchor="ctr">
-                    <a:lnB w="9525" cap="flat">
-                      <a:solidFill>
-                        <a:srgbClr val="DFDFDF"/>
-                      </a:solidFill>
-                    </a:lnB>
-                    <a:noFill/>
-                  </a:tcPr>
-                </a:tc>
-              </a:tr>
-              <a:tr h="485088">
-                <a:tc>
-                  <a:txBody>
-                    <a:bodyPr wrap="square"/>
-                    <a:lstStyle/>
-                    <a:p>
-                      <a:pPr>
-                        <a:lnSpc>
-                          <a:spcPct val="135000"/>
-                        </a:lnSpc>
-                      </a:pPr>
-                      <a:r>
-                        <a:rPr sz="1147" b="0" i="0">
-                          <a:solidFill>
-                            <a:srgbClr val="1A1A1A"/>
-                          </a:solidFill>
-                          <a:latin typeface="Lato"/>
-                          <a:ea typeface="Noto Sans JP"/>
-                          <a:cs typeface="Noto Sans JP"/>
-                        </a:rPr>
-                        <a:t>pipeline/stream（37）</a:t>
-                      </a:r>
-                    </a:p>
-                  </a:txBody>
-                  <a:tcPr marL="91440" marR="91440" marT="45720" marB="45720" anchor="ctr">
-                    <a:lnB w="9525" cap="flat">
-                      <a:solidFill>
-                        <a:srgbClr val="DFDFDF"/>
-                      </a:solidFill>
-                    </a:lnB>
-                    <a:noFill/>
-                  </a:tcPr>
-                </a:tc>
-                <a:tc>
-                  <a:txBody>
-                    <a:bodyPr wrap="square"/>
-                    <a:lstStyle/>
-                    <a:p>
-                      <a:pPr>
-                        <a:lnSpc>
-                          <a:spcPct val="135000"/>
-                        </a:lnSpc>
-                      </a:pPr>
-                      <a:r>
-                        <a:rPr sz="1147" b="0" i="0">
-                          <a:solidFill>
-                            <a:srgbClr val="1A1A1A"/>
-                          </a:solidFill>
-                          <a:latin typeface="Lato"/>
-                          <a:ea typeface="Noto Sans JP"/>
-                          <a:cs typeface="Noto Sans JP"/>
-                        </a:rPr>
-                        <a:t>MSK・Telegraf・NLB・Kafbat UI</a:t>
-                      </a:r>
-                    </a:p>
-                  </a:txBody>
-                  <a:tcPr marL="91440" marR="91440" marT="45720" marB="45720" anchor="ctr">
-                    <a:lnB w="9525" cap="flat">
-                      <a:solidFill>
-                        <a:srgbClr val="DFDFDF"/>
-                      </a:solidFill>
-                    </a:lnB>
-                    <a:noFill/>
-                  </a:tcPr>
-                </a:tc>
-              </a:tr>
-              <a:tr h="485088">
-                <a:tc>
-                  <a:txBody>
-                    <a:bodyPr wrap="square"/>
-                    <a:lstStyle/>
-                    <a:p>
-                      <a:pPr>
-                        <a:lnSpc>
-                          <a:spcPct val="135000"/>
-                        </a:lnSpc>
-                      </a:pPr>
-                      <a:r>
-                        <a:rPr sz="1147" b="0" i="0">
-                          <a:solidFill>
-                            <a:srgbClr val="1A1A1A"/>
-                          </a:solidFill>
-                          <a:latin typeface="Lato"/>
-                          <a:ea typeface="Noto Sans JP"/>
-                          <a:cs typeface="Noto Sans JP"/>
-                        </a:rPr>
-                        <a:t>pipeline/graph（10）</a:t>
-                      </a:r>
-                    </a:p>
-                  </a:txBody>
-                  <a:tcPr marL="91440" marR="91440" marT="45720" marB="45720" anchor="ctr">
-                    <a:lnB w="9525" cap="flat">
-                      <a:solidFill>
-                        <a:srgbClr val="DFDFDF"/>
-                      </a:solidFill>
-                    </a:lnB>
-                    <a:noFill/>
-                  </a:tcPr>
-                </a:tc>
-                <a:tc>
-                  <a:txBody>
-                    <a:bodyPr wrap="square"/>
-                    <a:lstStyle/>
-                    <a:p>
-                      <a:pPr>
-                        <a:lnSpc>
-                          <a:spcPct val="135000"/>
-                        </a:lnSpc>
-                      </a:pPr>
-                      <a:r>
-                        <a:rPr sz="1147" b="0" i="0">
-                          <a:solidFill>
-                            <a:srgbClr val="1A1A1A"/>
-                          </a:solidFill>
-                          <a:latin typeface="Lato"/>
-                          <a:ea typeface="Noto Sans JP"/>
-                          <a:cs typeface="Noto Sans JP"/>
-                        </a:rPr>
-                        <a:t>Neptune・status Lambda</a:t>
-                      </a:r>
-                    </a:p>
-                  </a:txBody>
-                  <a:tcPr marL="91440" marR="91440" marT="45720" marB="45720" anchor="ctr">
-                    <a:lnB w="9525" cap="flat">
-                      <a:solidFill>
-                        <a:srgbClr val="DFDFDF"/>
-                      </a:solidFill>
-                    </a:lnB>
-                    <a:noFill/>
-                  </a:tcPr>
-                </a:tc>
-              </a:tr>
-              <a:tr h="485088">
-                <a:tc>
-                  <a:txBody>
-                    <a:bodyPr wrap="square"/>
-                    <a:lstStyle/>
-                    <a:p>
-                      <a:pPr>
-                        <a:lnSpc>
-                          <a:spcPct val="135000"/>
-                        </a:lnSpc>
-                      </a:pPr>
-                      <a:r>
-                        <a:rPr sz="1147" b="0" i="0">
-                          <a:solidFill>
-                            <a:srgbClr val="1A1A1A"/>
-                          </a:solidFill>
-                          <a:latin typeface="Lato"/>
-                          <a:ea typeface="Noto Sans JP"/>
-                          <a:cs typeface="Noto Sans JP"/>
-                        </a:rPr>
-                        <a:t>pipeline/nautobot（16）</a:t>
-                      </a:r>
-                    </a:p>
-                  </a:txBody>
-                  <a:tcPr marL="91440" marR="91440" marT="45720" marB="45720" anchor="ctr">
-                    <a:lnB w="9525" cap="flat">
-                      <a:solidFill>
-                        <a:srgbClr val="DFDFDF"/>
-                      </a:solidFill>
-                    </a:lnB>
-                    <a:noFill/>
-                  </a:tcPr>
-                </a:tc>
-                <a:tc>
-                  <a:txBody>
-                    <a:bodyPr wrap="square"/>
-                    <a:lstStyle/>
-                    <a:p>
-                      <a:pPr>
-                        <a:lnSpc>
-                          <a:spcPct val="135000"/>
-                        </a:lnSpc>
-                      </a:pPr>
-                      <a:r>
-                        <a:rPr sz="1147" b="0" i="0">
-                          <a:solidFill>
-                            <a:srgbClr val="1A1A1A"/>
-                          </a:solidFill>
-                          <a:latin typeface="Lato"/>
-                          <a:ea typeface="Noto Sans JP"/>
-                          <a:cs typeface="Noto Sans JP"/>
-                        </a:rPr>
-                        <a:t>Nautobot・RDS</a:t>
-                      </a:r>
-                    </a:p>
-                  </a:txBody>
-                  <a:tcPr marL="91440" marR="91440" marT="45720" marB="45720" anchor="ctr">
-                    <a:lnB w="9525" cap="flat">
-                      <a:solidFill>
-                        <a:srgbClr val="DFDFDF"/>
-                      </a:solidFill>
-                    </a:lnB>
-                    <a:noFill/>
-                  </a:tcPr>
-                </a:tc>
-              </a:tr>
-              <a:tr h="681912">
-                <a:tc>
-                  <a:txBody>
-                    <a:bodyPr wrap="square"/>
-                    <a:lstStyle/>
-                    <a:p>
-                      <a:pPr>
-                        <a:lnSpc>
-                          <a:spcPct val="135000"/>
-                        </a:lnSpc>
-                      </a:pPr>
-                      <a:r>
-                        <a:rPr sz="1147" b="0" i="0">
-                          <a:solidFill>
-                            <a:srgbClr val="1A1A1A"/>
-                          </a:solidFill>
-                          <a:latin typeface="Lato"/>
-                          <a:ea typeface="Noto Sans JP"/>
-                          <a:cs typeface="Noto Sans JP"/>
-                        </a:rPr>
-                        <a:t>pipeline/analytics（53）</a:t>
-                      </a:r>
-                    </a:p>
-                  </a:txBody>
-                  <a:tcPr marL="91440" marR="91440" marT="45720" marB="45720" anchor="ctr">
-                    <a:lnB w="9525" cap="flat">
-                      <a:solidFill>
-                        <a:srgbClr val="DFDFDF"/>
-                      </a:solidFill>
-                    </a:lnB>
-                    <a:noFill/>
-                  </a:tcPr>
-                </a:tc>
-                <a:tc>
-                  <a:txBody>
-                    <a:bodyPr wrap="square"/>
-                    <a:lstStyle/>
-                    <a:p>
-                      <a:pPr>
-                        <a:lnSpc>
-                          <a:spcPct val="135000"/>
-                        </a:lnSpc>
-                      </a:pPr>
-                      <a:r>
-                        <a:rPr sz="1147" b="0" i="0">
-                          <a:solidFill>
-                            <a:srgbClr val="1A1A1A"/>
-                          </a:solidFill>
-                          <a:latin typeface="Lato"/>
-                          <a:ea typeface="Noto Sans JP"/>
-                          <a:cs typeface="Noto Sans JP"/>
-                        </a:rPr>
-                        <a:t>EMR・S3 Tables・OpenSearch・AMP・Grafana・Splunk</a:t>
-                      </a:r>
-                    </a:p>
-                  </a:txBody>
-                  <a:tcPr marL="91440" marR="91440" marT="45720" marB="45720" anchor="ctr">
-                    <a:lnB w="9525" cap="flat">
-                      <a:solidFill>
-                        <a:srgbClr val="DFDFDF"/>
-                      </a:solidFill>
-                    </a:lnB>
-                    <a:noFill/>
-                  </a:tcPr>
-                </a:tc>
-              </a:tr>
-            </a:tbl>
-          </a:graphicData>
-        </a:graphic>
-      </p:graphicFrame>
-      <p:sp>
-        <p:nvSpPr>
-          <p:cNvPr id="8" name="TextBox 7"/>
-          <p:cNvSpPr txBox="1"/>
-          <p:nvPr/>
-        </p:nvSpPr>
-        <p:spPr>
-          <a:xfrm>
-            <a:off x="841248" y="6272784"/>
-            <a:ext cx="10509199" cy="274320"/>
-          </a:xfrm>
-          <a:prstGeom prst="rect">
-            <a:avLst/>
-          </a:prstGeom>
-          <a:noFill/>
-        </p:spPr>
-        <p:txBody>
-          <a:bodyPr wrap="square" lIns="0" rIns="0" tIns="0" bIns="0" anchor="t">
-            <a:spAutoFit/>
-          </a:bodyPr>
-          <a:lstStyle/>
-          <a:p>
-            <a:pPr algn="r"/>
-            <a:r>
-              <a:rPr sz="1000" b="0" i="0">
-                <a:solidFill>
-                  <a:srgbClr val="A5A5A5"/>
-                </a:solidFill>
-                <a:latin typeface="Menlo"/>
-                <a:ea typeface="Menlo"/>
-                <a:cs typeface="Menlo"/>
-              </a:rPr>
-              <a:t>3 / 10</a:t>
-            </a:r>
-          </a:p>
-        </p:txBody>
-      </p:sp>
-    </p:spTree>
-  </p:cSld>
-  <p:clrMapOvr>
-    <a:masterClrMapping/>
-  </p:clrMapOvr>
-</p:sld>
-</file>
-
-<file path=ppt/slides/slide4.xml><?xml version="1.0" encoding="utf-8"?>
-<p:sld xmlns:a="http://schemas.openxmlformats.org/drawingml/2006/main" xmlns:p="http://schemas.openxmlformats.org/presentationml/2006/main" xmlns:r="http://schemas.openxmlformats.org/officeDocument/2006/relationships">
-  <p:cSld>
-    <p:bg>
-      <p:bgPr>
-        <a:solidFill>
-          <a:srgbClr val="FAF9F6"/>
-        </a:solidFill>
-        <a:effectLst/>
-      </p:bgPr>
-    </p:bg>
-    <p:spTree>
-      <p:nvGrpSpPr>
-        <p:cNvPr id="1" name=""/>
-        <p:cNvGrpSpPr/>
-        <p:nvPr/>
-      </p:nvGrpSpPr>
-      <p:grpSpPr/>
-      <p:sp>
-        <p:nvSpPr>
-          <p:cNvPr id="2" name="Rectangle 1"/>
-          <p:cNvSpPr/>
-          <p:nvPr/>
-        </p:nvSpPr>
-        <p:spPr>
-          <a:xfrm>
-            <a:off x="841248" y="640080"/>
-            <a:ext cx="82296" cy="402336"/>
-          </a:xfrm>
-          <a:prstGeom prst="rect">
-            <a:avLst/>
-          </a:prstGeom>
-          <a:solidFill>
-            <a:srgbClr val="111110"/>
-          </a:solidFill>
-          <a:ln>
-            <a:noFill/>
-          </a:ln>
-          <a:effectLst/>
-        </p:spPr>
-        <p:style>
-          <a:lnRef idx="1">
-            <a:schemeClr val="accent1"/>
-          </a:lnRef>
-          <a:fillRef idx="3">
-            <a:schemeClr val="accent1"/>
-          </a:fillRef>
-          <a:effectRef idx="2">
-            <a:schemeClr val="accent1"/>
-          </a:effectRef>
-          <a:fontRef idx="minor">
-            <a:schemeClr val="lt1"/>
-          </a:fontRef>
-        </p:style>
-        <p:txBody>
-          <a:bodyPr rtlCol="0" anchor="ctr"/>
-          <a:lstStyle/>
-          <a:p>
-            <a:pPr algn="ctr"/>
-          </a:p>
-        </p:txBody>
-      </p:sp>
-      <p:sp>
-        <p:nvSpPr>
-          <p:cNvPr id="3" name="TextBox 2"/>
-          <p:cNvSpPr txBox="1"/>
-          <p:nvPr/>
-        </p:nvSpPr>
-        <p:spPr>
-          <a:xfrm>
-            <a:off x="1097280" y="548640"/>
-            <a:ext cx="10253167" cy="786384"/>
-          </a:xfrm>
-          <a:prstGeom prst="rect">
-            <a:avLst/>
-          </a:prstGeom>
-          <a:noFill/>
-        </p:spPr>
-        <p:txBody>
-          <a:bodyPr wrap="square" lIns="0" rIns="0" tIns="0" bIns="0" anchor="t">
-            <a:spAutoFit/>
-          </a:bodyPr>
-          <a:lstStyle/>
-          <a:p>
-            <a:pPr>
-              <a:lnSpc>
-                <a:spcPct val="120000"/>
-              </a:lnSpc>
-            </a:pPr>
-            <a:r>
-              <a:rPr sz="2400" b="1" i="0">
-                <a:solidFill>
-                  <a:srgbClr val="111110"/>
-                </a:solidFill>
-                <a:latin typeface="Lato"/>
-                <a:ea typeface="Noto Sans JP"/>
-                <a:cs typeface="Noto Sans JP"/>
-              </a:rPr>
-              <a:t>データは収集から 6 段で進み、エージェントは最後に呼ばれる</a:t>
-            </a:r>
-          </a:p>
-        </p:txBody>
-      </p:sp>
-      <p:cxnSp>
-        <p:nvCxnSpPr>
-          <p:cNvPr id="4" name="Connector 3"/>
-          <p:cNvCxnSpPr/>
-          <p:nvPr/>
-        </p:nvCxnSpPr>
-        <p:spPr>
-          <a:xfrm>
-            <a:off x="841248" y="1426464"/>
-            <a:ext cx="10509199" cy="0"/>
-          </a:xfrm>
-          <a:prstGeom prst="line">
-            <a:avLst/>
-          </a:prstGeom>
-          <a:ln w="12700">
-            <a:solidFill>
-              <a:srgbClr val="DFDFDF"/>
-            </a:solidFill>
-          </a:ln>
-        </p:spPr>
-        <p:style>
-          <a:lnRef idx="2">
-            <a:schemeClr val="accent1"/>
-          </a:lnRef>
-          <a:fillRef idx="0">
-            <a:schemeClr val="accent1"/>
-          </a:fillRef>
-          <a:effectRef idx="1">
-            <a:schemeClr val="accent1"/>
-          </a:effectRef>
-          <a:fontRef idx="minor">
-            <a:schemeClr val="tx1"/>
-          </a:fontRef>
-        </p:style>
-      </p:cxnSp>
-      <p:pic>
-        <p:nvPicPr>
-          <p:cNvPr id="5" name="Picture 4" descr="managed-flow.png"/>
-          <p:cNvPicPr>
-            <a:picLocks noChangeAspect="1"/>
-          </p:cNvPicPr>
-          <p:nvPr/>
-        </p:nvPicPr>
-        <p:blipFill>
-          <a:blip r:embed="rId2"/>
-          <a:stretch>
-            <a:fillRect/>
-          </a:stretch>
-        </p:blipFill>
-        <p:spPr>
-          <a:xfrm>
-            <a:off x="841248" y="1755648"/>
-            <a:ext cx="10509199" cy="1907225"/>
-          </a:xfrm>
-          <a:prstGeom prst="rect">
-            <a:avLst/>
-          </a:prstGeom>
-        </p:spPr>
-      </p:pic>
-      <p:sp>
-        <p:nvSpPr>
-          <p:cNvPr id="6" name="TextBox 5"/>
-          <p:cNvSpPr txBox="1"/>
-          <p:nvPr/>
-        </p:nvSpPr>
-        <p:spPr>
-          <a:xfrm>
-            <a:off x="841248" y="6272784"/>
-            <a:ext cx="10509199" cy="274320"/>
-          </a:xfrm>
-          <a:prstGeom prst="rect">
-            <a:avLst/>
-          </a:prstGeom>
-          <a:noFill/>
-        </p:spPr>
-        <p:txBody>
-          <a:bodyPr wrap="square" lIns="0" rIns="0" tIns="0" bIns="0" anchor="t">
-            <a:spAutoFit/>
-          </a:bodyPr>
-          <a:lstStyle/>
-          <a:p>
-            <a:pPr algn="r"/>
-            <a:r>
-              <a:rPr sz="1000" b="0" i="0">
-                <a:solidFill>
-                  <a:srgbClr val="A5A5A5"/>
-                </a:solidFill>
-                <a:latin typeface="Menlo"/>
-                <a:ea typeface="Menlo"/>
-                <a:cs typeface="Menlo"/>
-              </a:rPr>
-              <a:t>4 / 10</a:t>
-            </a:r>
-          </a:p>
-        </p:txBody>
-      </p:sp>
-    </p:spTree>
-  </p:cSld>
-  <p:clrMapOvr>
-    <a:masterClrMapping/>
-  </p:clrMapOvr>
-</p:sld>
-</file>
-
-<file path=ppt/slides/slide5.xml><?xml version="1.0" encoding="utf-8"?>
-<p:sld xmlns:a="http://schemas.openxmlformats.org/drawingml/2006/main" xmlns:p="http://schemas.openxmlformats.org/presentationml/2006/main" xmlns:r="http://schemas.openxmlformats.org/officeDocument/2006/relationships">
-  <p:cSld>
-    <p:bg>
-      <p:bgPr>
-        <a:solidFill>
-          <a:srgbClr val="FAF9F6"/>
-        </a:solidFill>
-        <a:effectLst/>
-      </p:bgPr>
-    </p:bg>
-    <p:spTree>
-      <p:nvGrpSpPr>
-        <p:cNvPr id="1" name=""/>
-        <p:cNvGrpSpPr/>
-        <p:nvPr/>
-      </p:nvGrpSpPr>
-      <p:grpSpPr/>
-      <p:sp>
-        <p:nvSpPr>
-          <p:cNvPr id="2" name="Rectangle 1"/>
-          <p:cNvSpPr/>
-          <p:nvPr/>
-        </p:nvSpPr>
-        <p:spPr>
-          <a:xfrm>
-            <a:off x="841248" y="640080"/>
-            <a:ext cx="82296" cy="402336"/>
-          </a:xfrm>
-          <a:prstGeom prst="rect">
-            <a:avLst/>
-          </a:prstGeom>
-          <a:solidFill>
-            <a:srgbClr val="111110"/>
-          </a:solidFill>
-          <a:ln>
-            <a:noFill/>
-          </a:ln>
-          <a:effectLst/>
-        </p:spPr>
-        <p:style>
-          <a:lnRef idx="1">
-            <a:schemeClr val="accent1"/>
-          </a:lnRef>
-          <a:fillRef idx="3">
-            <a:schemeClr val="accent1"/>
-          </a:fillRef>
-          <a:effectRef idx="2">
-            <a:schemeClr val="accent1"/>
-          </a:effectRef>
-          <a:fontRef idx="minor">
-            <a:schemeClr val="lt1"/>
-          </a:fontRef>
-        </p:style>
-        <p:txBody>
-          <a:bodyPr rtlCol="0" anchor="ctr"/>
-          <a:lstStyle/>
-          <a:p>
-            <a:pPr algn="ctr"/>
-          </a:p>
-        </p:txBody>
-      </p:sp>
-      <p:sp>
-        <p:nvSpPr>
-          <p:cNvPr id="3" name="TextBox 2"/>
-          <p:cNvSpPr txBox="1"/>
-          <p:nvPr/>
-        </p:nvSpPr>
-        <p:spPr>
-          <a:xfrm>
-            <a:off x="1097280" y="548640"/>
-            <a:ext cx="10253167" cy="786384"/>
-          </a:xfrm>
-          <a:prstGeom prst="rect">
-            <a:avLst/>
-          </a:prstGeom>
-          <a:noFill/>
-        </p:spPr>
-        <p:txBody>
-          <a:bodyPr wrap="square" lIns="0" rIns="0" tIns="0" bIns="0" anchor="t">
-            <a:spAutoFit/>
-          </a:bodyPr>
-          <a:lstStyle/>
-          <a:p>
-            <a:pPr>
-              <a:lnSpc>
-                <a:spcPct val="120000"/>
-              </a:lnSpc>
-            </a:pPr>
-            <a:r>
-              <a:rPr sz="2400" b="1" i="0">
-                <a:solidFill>
-                  <a:srgbClr val="111110"/>
-                </a:solidFill>
-                <a:latin typeface="Lato"/>
-                <a:ea typeface="Noto Sans JP"/>
-                <a:cs typeface="Noto Sans JP"/>
-              </a:rPr>
-              <a:t>収集から格納まで: Spark が STORES のまとまりごとに書き分ける</a:t>
-            </a:r>
-          </a:p>
-        </p:txBody>
-      </p:sp>
-      <p:cxnSp>
-        <p:nvCxnSpPr>
-          <p:cNvPr id="4" name="Connector 3"/>
-          <p:cNvCxnSpPr/>
-          <p:nvPr/>
-        </p:nvCxnSpPr>
-        <p:spPr>
-          <a:xfrm>
-            <a:off x="841248" y="1426464"/>
-            <a:ext cx="10509199" cy="0"/>
-          </a:xfrm>
-          <a:prstGeom prst="line">
-            <a:avLst/>
-          </a:prstGeom>
-          <a:ln w="12700">
-            <a:solidFill>
-              <a:srgbClr val="DFDFDF"/>
-            </a:solidFill>
-          </a:ln>
-        </p:spPr>
-        <p:style>
-          <a:lnRef idx="2">
-            <a:schemeClr val="accent1"/>
-          </a:lnRef>
-          <a:fillRef idx="0">
-            <a:schemeClr val="accent1"/>
-          </a:fillRef>
-          <a:effectRef idx="1">
-            <a:schemeClr val="accent1"/>
-          </a:effectRef>
-          <a:fontRef idx="minor">
-            <a:schemeClr val="tx1"/>
-          </a:fontRef>
-        </p:style>
-      </p:cxnSp>
-      <p:sp>
-        <p:nvSpPr>
-          <p:cNvPr id="5" name="TextBox 4"/>
-          <p:cNvSpPr txBox="1"/>
-          <p:nvPr/>
-        </p:nvSpPr>
-        <p:spPr>
-          <a:xfrm>
-            <a:off x="841248" y="1755648"/>
-            <a:ext cx="10509199" cy="787400"/>
-          </a:xfrm>
-          <a:prstGeom prst="rect">
-            <a:avLst/>
-          </a:prstGeom>
-          <a:noFill/>
-        </p:spPr>
-        <p:txBody>
-          <a:bodyPr wrap="square" lIns="0" rIns="0" tIns="0" bIns="0" anchor="t">
-            <a:spAutoFit/>
-          </a:bodyPr>
-          <a:lstStyle/>
-          <a:p>
-            <a:pPr>
-              <a:lnSpc>
-                <a:spcPct val="155000"/>
-              </a:lnSpc>
-            </a:pPr>
-            <a:r>
-              <a:rPr sz="2000" b="0" i="0">
-                <a:solidFill>
-                  <a:srgbClr val="1A1A1A"/>
-                </a:solidFill>
-                <a:latin typeface="Lato"/>
-                <a:ea typeface="Noto Sans JP"/>
-                <a:cs typeface="Noto Sans JP"/>
-              </a:rPr>
-              <a:t>Telegraf は受ける側（内部 NLB の裏で trap 162・syslog 5140・MDT 57000）と取りに行く側（gNMI・SNMP）の 2 つ。</a:t>
-            </a:r>
-          </a:p>
-        </p:txBody>
-      </p:sp>
-      <p:graphicFrame>
-        <p:nvGraphicFramePr>
-          <p:cNvPr id="6" name="Table 5"/>
-          <p:cNvGraphicFramePr>
-            <a:graphicFrameLocks noGrp="1"/>
-          </p:cNvGraphicFramePr>
-          <p:nvPr/>
-        </p:nvGraphicFramePr>
-        <p:xfrm>
-          <a:off x="841248" y="2780792"/>
-          <a:ext cx="10509199" cy="3038348"/>
+          <a:off x="841248" y="2387092"/>
+          <a:ext cx="10509199" cy="2923032"/>
         </p:xfrm>
         <a:graphic>
           <a:graphicData uri="http://schemas.openxmlformats.org/drawingml/2006/table">
@@ -6761,7 +7397,7 @@
                           <a:ea typeface="Noto Sans JP"/>
                           <a:cs typeface="Noto Sans JP"/>
                         </a:rPr>
-                        <a:t>S3 Tables raw_telemetry</a:t>
+                        <a:t>S3 Tables（raw_telemetry）</a:t>
                       </a:r>
                     </a:p>
                   </a:txBody>
@@ -6891,7 +7527,7 @@
                           <a:ea typeface="Noto Sans JP"/>
                           <a:cs typeface="Noto Sans JP"/>
                         </a:rPr>
-                        <a:t>traps・logs</a:t>
+                        <a:t>traps・logs・flows</a:t>
                       </a:r>
                     </a:p>
                   </a:txBody>
@@ -6905,7 +7541,7 @@
                   </a:tcPr>
                 </a:tc>
               </a:tr>
-              <a:tr h="653796">
+              <a:tr h="538480">
                 <a:tc>
                   <a:txBody>
                     <a:bodyPr wrap="square"/>
@@ -6989,7 +7625,7 @@
                           <a:ea typeface="Noto Sans JP"/>
                           <a:cs typeface="Noto Sans JP"/>
                         </a:rPr>
-                        <a:t>metrics・gnmi・mdt</a:t>
+                        <a:t>metrics・gnmi</a:t>
                       </a:r>
                     </a:p>
                   </a:txBody>
@@ -7370,7 +8006,29 @@
                 <a:ea typeface="Noto Sans JP"/>
                 <a:cs typeface="Noto Sans JP"/>
               </a:rPr>
-              <a:t>SNS から status Lambda が Neptune の status を書き、Firehose が alert_events に残す</a:t>
+              <a:t>SNS から status Lambda が Neptune の status を書き、Firehose が </a:t>
+            </a:r>
+            <a:r>
+              <a:rPr sz="1879" b="0" i="0">
+                <a:solidFill>
+                  <a:srgbClr val="1A1A1A"/>
+                </a:solidFill>
+                <a:latin typeface="Menlo"/>
+                <a:ea typeface="Menlo"/>
+                <a:cs typeface="Menlo"/>
+              </a:rPr>
+              <a:t>alert_events</a:t>
+            </a:r>
+            <a:r>
+              <a:rPr sz="2000" b="0" i="0">
+                <a:solidFill>
+                  <a:srgbClr val="1A1A1A"/>
+                </a:solidFill>
+                <a:latin typeface="Lato"/>
+                <a:ea typeface="Noto Sans JP"/>
+                <a:cs typeface="Noto Sans JP"/>
+              </a:rPr>
+              <a:t> に残す</a:t>
             </a:r>
           </a:p>
           <a:p>
@@ -7664,7 +8322,7 @@
         </p:nvGraphicFramePr>
         <p:xfrm>
           <a:off x="841248" y="1755648"/>
-          <a:ext cx="10509199" cy="4020844"/>
+          <a:ext cx="10509199" cy="3858006"/>
         </p:xfrm>
         <a:graphic>
           <a:graphicData uri="http://schemas.openxmlformats.org/drawingml/2006/table">
@@ -7675,7 +8333,7 @@
                 <a:gridCol w="3503066"/>
                 <a:gridCol w="3503067"/>
               </a:tblGrid>
-              <a:tr h="493776">
+              <a:tr h="538480">
                 <a:tc>
                   <a:txBody>
                     <a:bodyPr wrap="square"/>
@@ -7687,7 +8345,7 @@
                         </a:lnSpc>
                       </a:pPr>
                       <a:r>
-                        <a:rPr sz="1476" b="1" i="0">
+                        <a:rPr sz="1639" b="1" i="0">
                           <a:solidFill>
                             <a:srgbClr val="111110"/>
                           </a:solidFill>
@@ -7719,7 +8377,7 @@
                         </a:lnSpc>
                       </a:pPr>
                       <a:r>
-                        <a:rPr sz="1476" b="1" i="0">
+                        <a:rPr sz="1639" b="1" i="0">
                           <a:solidFill>
                             <a:srgbClr val="111110"/>
                           </a:solidFill>
@@ -7751,7 +8409,7 @@
                         </a:lnSpc>
                       </a:pPr>
                       <a:r>
-                        <a:rPr sz="1476" b="1" i="0">
+                        <a:rPr sz="1639" b="1" i="0">
                           <a:solidFill>
                             <a:srgbClr val="111110"/>
                           </a:solidFill>
@@ -7773,7 +8431,7 @@
                   </a:tcPr>
                 </a:tc>
               </a:tr>
-              <a:tr h="493776">
+              <a:tr h="538480">
                 <a:tc>
                   <a:txBody>
                     <a:bodyPr wrap="square"/>
@@ -7785,7 +8443,7 @@
                         </a:lnSpc>
                       </a:pPr>
                       <a:r>
-                        <a:rPr sz="1476" b="0" i="0">
+                        <a:rPr sz="1639" b="0" i="0">
                           <a:solidFill>
                             <a:srgbClr val="1A1A1A"/>
                           </a:solidFill>
@@ -7817,7 +8475,7 @@
                         </a:lnSpc>
                       </a:pPr>
                       <a:r>
-                        <a:rPr sz="1476" b="0" i="0">
+                        <a:rPr sz="1639" b="0" i="0">
                           <a:solidFill>
                             <a:srgbClr val="1A1A1A"/>
                           </a:solidFill>
@@ -7843,13 +8501,13 @@
                     <a:bodyPr wrap="square"/>
                     <a:lstStyle/>
                     <a:p>
-                      <a:pPr>
+                      <a:pPr algn="r">
                         <a:lnSpc>
                           <a:spcPct val="135000"/>
                         </a:lnSpc>
                       </a:pPr>
                       <a:r>
-                        <a:rPr sz="1476" b="0" i="0">
+                        <a:rPr sz="1639" b="0" i="0">
                           <a:solidFill>
                             <a:srgbClr val="1A1A1A"/>
                           </a:solidFill>
@@ -7857,7 +8515,7 @@
                           <a:ea typeface="Noto Sans JP"/>
                           <a:cs typeface="Noto Sans JP"/>
                         </a:rPr>
-                        <a:t>443（HTTPS）</a:t>
+                        <a:t>443</a:t>
                       </a:r>
                     </a:p>
                   </a:txBody>
@@ -7871,7 +8529,7 @@
                   </a:tcPr>
                 </a:tc>
               </a:tr>
-              <a:tr h="850620">
+              <a:tr h="934974">
                 <a:tc>
                   <a:txBody>
                     <a:bodyPr wrap="square"/>
@@ -7883,7 +8541,7 @@
                         </a:lnSpc>
                       </a:pPr>
                       <a:r>
-                        <a:rPr sz="1476" b="0" i="0">
+                        <a:rPr sz="1639" b="0" i="0">
                           <a:solidFill>
                             <a:srgbClr val="1A1A1A"/>
                           </a:solidFill>
@@ -7915,7 +8573,7 @@
                         </a:lnSpc>
                       </a:pPr>
                       <a:r>
-                        <a:rPr sz="1476" b="0" i="0">
+                        <a:rPr sz="1639" b="0" i="0">
                           <a:solidFill>
                             <a:srgbClr val="1A1A1A"/>
                           </a:solidFill>
@@ -7923,7 +8581,7 @@
                           <a:ea typeface="Noto Sans JP"/>
                           <a:cs typeface="Noto Sans JP"/>
                         </a:rPr>
-                        <a:t>grafana・splunk・workflow・nautobot・kafka_ui</a:t>
+                        <a:t>grafana・splunk・workflow・nautobot</a:t>
                       </a:r>
                     </a:p>
                   </a:txBody>
@@ -7947,7 +8605,7 @@
                         </a:lnSpc>
                       </a:pPr>
                       <a:r>
-                        <a:rPr sz="1476" b="0" i="0">
+                        <a:rPr sz="1639" b="0" i="0">
                           <a:solidFill>
                             <a:srgbClr val="1A1A1A"/>
                           </a:solidFill>
@@ -7955,7 +8613,7 @@
                           <a:ea typeface="Noto Sans JP"/>
                           <a:cs typeface="Noto Sans JP"/>
                         </a:rPr>
-                        <a:t>3000・8000・8233・8080・8080</a:t>
+                        <a:t>3000・8000・8233・8080</a:t>
                       </a:r>
                     </a:p>
                   </a:txBody>
@@ -7969,7 +8627,7 @@
                   </a:tcPr>
                 </a:tc>
               </a:tr>
-              <a:tr h="597560">
+              <a:tr h="653796">
                 <a:tc>
                   <a:txBody>
                     <a:bodyPr wrap="square"/>
@@ -7981,7 +8639,7 @@
                         </a:lnSpc>
                       </a:pPr>
                       <a:r>
-                        <a:rPr sz="1476" b="0" i="0">
+                        <a:rPr sz="1639" b="0" i="0">
                           <a:solidFill>
                             <a:srgbClr val="1A1A1A"/>
                           </a:solidFill>
@@ -7989,7 +8647,7 @@
                           <a:ea typeface="Noto Sans JP"/>
                           <a:cs typeface="Noto Sans JP"/>
                         </a:rPr>
-                        <a:t>telegraf・spark・kafka_ui</a:t>
+                        <a:t>収集 4 種・spark・web</a:t>
                       </a:r>
                     </a:p>
                   </a:txBody>
@@ -8013,7 +8671,7 @@
                         </a:lnSpc>
                       </a:pPr>
                       <a:r>
-                        <a:rPr sz="1476" b="0" i="0">
+                        <a:rPr sz="1639" b="0" i="0">
                           <a:solidFill>
                             <a:srgbClr val="1A1A1A"/>
                           </a:solidFill>
@@ -8045,7 +8703,7 @@
                         </a:lnSpc>
                       </a:pPr>
                       <a:r>
-                        <a:rPr sz="1476" b="0" i="0">
+                        <a:rPr sz="1639" b="0" i="0">
                           <a:solidFill>
                             <a:srgbClr val="1A1A1A"/>
                           </a:solidFill>
@@ -8053,7 +8711,7 @@
                           <a:ea typeface="Noto Sans JP"/>
                           <a:cs typeface="Noto Sans JP"/>
                         </a:rPr>
-                        <a:t>9098（IAM 認証）</a:t>
+                        <a:t>9098（IAM）・9096（SCRAM）</a:t>
                       </a:r>
                     </a:p>
                   </a:txBody>
@@ -8067,7 +8725,7 @@
                   </a:tcPr>
                 </a:tc>
               </a:tr>
-              <a:tr h="493776">
+              <a:tr h="653796">
                 <a:tc>
                   <a:txBody>
                     <a:bodyPr wrap="square"/>
@@ -8079,105 +8737,7 @@
                         </a:lnSpc>
                       </a:pPr>
                       <a:r>
-                        <a:rPr sz="1476" b="0" i="0">
-                          <a:solidFill>
-                            <a:srgbClr val="1A1A1A"/>
-                          </a:solidFill>
-                          <a:latin typeface="Lato"/>
-                          <a:ea typeface="Noto Sans JP"/>
-                          <a:cs typeface="Noto Sans JP"/>
-                        </a:rPr>
-                        <a:t>spark</a:t>
-                      </a:r>
-                    </a:p>
-                  </a:txBody>
-                  <a:tcPr marL="91440" marR="91440" marT="45720" marB="45720" anchor="ctr">
-                    <a:lnB w="9525" cap="flat">
-                      <a:solidFill>
-                        <a:srgbClr val="DFDFDF"/>
-                      </a:solidFill>
-                    </a:lnB>
-                    <a:noFill/>
-                  </a:tcPr>
-                </a:tc>
-                <a:tc>
-                  <a:txBody>
-                    <a:bodyPr wrap="square"/>
-                    <a:lstStyle/>
-                    <a:p>
-                      <a:pPr>
-                        <a:lnSpc>
-                          <a:spcPct val="135000"/>
-                        </a:lnSpc>
-                      </a:pPr>
-                      <a:r>
-                        <a:rPr sz="1476" b="0" i="0">
-                          <a:solidFill>
-                            <a:srgbClr val="1A1A1A"/>
-                          </a:solidFill>
-                          <a:latin typeface="Lato"/>
-                          <a:ea typeface="Noto Sans JP"/>
-                          <a:cs typeface="Noto Sans JP"/>
-                        </a:rPr>
-                        <a:t>splunk</a:t>
-                      </a:r>
-                    </a:p>
-                  </a:txBody>
-                  <a:tcPr marL="91440" marR="91440" marT="45720" marB="45720" anchor="ctr">
-                    <a:lnB w="9525" cap="flat">
-                      <a:solidFill>
-                        <a:srgbClr val="DFDFDF"/>
-                      </a:solidFill>
-                    </a:lnB>
-                    <a:noFill/>
-                  </a:tcPr>
-                </a:tc>
-                <a:tc>
-                  <a:txBody>
-                    <a:bodyPr wrap="square"/>
-                    <a:lstStyle/>
-                    <a:p>
-                      <a:pPr>
-                        <a:lnSpc>
-                          <a:spcPct val="135000"/>
-                        </a:lnSpc>
-                      </a:pPr>
-                      <a:r>
-                        <a:rPr sz="1476" b="0" i="0">
-                          <a:solidFill>
-                            <a:srgbClr val="1A1A1A"/>
-                          </a:solidFill>
-                          <a:latin typeface="Lato"/>
-                          <a:ea typeface="Noto Sans JP"/>
-                          <a:cs typeface="Noto Sans JP"/>
-                        </a:rPr>
-                        <a:t>8088（HEC）</a:t>
-                      </a:r>
-                    </a:p>
-                  </a:txBody>
-                  <a:tcPr marL="91440" marR="91440" marT="45720" marB="45720" anchor="ctr">
-                    <a:lnB w="9525" cap="flat">
-                      <a:solidFill>
-                        <a:srgbClr val="DFDFDF"/>
-                      </a:solidFill>
-                    </a:lnB>
-                    <a:noFill/>
-                  </a:tcPr>
-                </a:tc>
-              </a:tr>
-              <a:tr h="597560">
-                <a:tc>
-                  <a:txBody>
-                    <a:bodyPr wrap="square"/>
-                    <a:lstStyle/>
-                    <a:p>
-                      <a:pPr>
-                        <a:lnSpc>
-                          <a:spcPct val="135000"/>
-                        </a:lnSpc>
-                      </a:pPr>
-                      <a:r>
-                        <a:rPr sz="1476" b="0" i="0">
+                        <a:rPr sz="1639" b="0" i="0">
                           <a:solidFill>
                             <a:srgbClr val="1A1A1A"/>
                           </a:solidFill>
@@ -8209,7 +8769,7 @@
                         </a:lnSpc>
                       </a:pPr>
                       <a:r>
-                        <a:rPr sz="1476" b="0" i="0">
+                        <a:rPr sz="1639" b="0" i="0">
                           <a:solidFill>
                             <a:srgbClr val="1A1A1A"/>
                           </a:solidFill>
@@ -8217,7 +8777,7 @@
                           <a:ea typeface="Noto Sans JP"/>
                           <a:cs typeface="Noto Sans JP"/>
                         </a:rPr>
-                        <a:t>NLB → telegraf_dialout</a:t>
+                        <a:t>NLB → 受ける側の 3 種</a:t>
                       </a:r>
                     </a:p>
                   </a:txBody>
@@ -8241,7 +8801,7 @@
                         </a:lnSpc>
                       </a:pPr>
                       <a:r>
-                        <a:rPr sz="1476" b="0" i="0">
+                        <a:rPr sz="1639" b="0" i="0">
                           <a:solidFill>
                             <a:srgbClr val="1A1A1A"/>
                           </a:solidFill>
@@ -8249,7 +8809,7 @@
                           <a:ea typeface="Noto Sans JP"/>
                           <a:cs typeface="Noto Sans JP"/>
                         </a:rPr>
-                        <a:t>162・5140/udp</a:t>
+                        <a:t>162・5140・2055・6343/udp</a:t>
                       </a:r>
                     </a:p>
                   </a:txBody>
@@ -8263,7 +8823,7 @@
                   </a:tcPr>
                 </a:tc>
               </a:tr>
-              <a:tr h="493776">
+              <a:tr h="538480">
                 <a:tc>
                   <a:txBody>
                     <a:bodyPr wrap="square"/>
@@ -8275,7 +8835,7 @@
                         </a:lnSpc>
                       </a:pPr>
                       <a:r>
-                        <a:rPr sz="1476" b="0" i="0">
+                        <a:rPr sz="1639" b="0" i="0">
                           <a:solidFill>
                             <a:srgbClr val="1A1A1A"/>
                           </a:solidFill>
@@ -8283,7 +8843,7 @@
                           <a:ea typeface="Noto Sans JP"/>
                           <a:cs typeface="Noto Sans JP"/>
                         </a:rPr>
-                        <a:t>telegraf_dialin</a:t>
+                        <a:t>gnmic</a:t>
                       </a:r>
                     </a:p>
                   </a:txBody>
@@ -8307,7 +8867,7 @@
                         </a:lnSpc>
                       </a:pPr>
                       <a:r>
-                        <a:rPr sz="1476" b="0" i="0">
+                        <a:rPr sz="1639" b="0" i="0">
                           <a:solidFill>
                             <a:srgbClr val="1A1A1A"/>
                           </a:solidFill>
@@ -8339,7 +8899,7 @@
                         </a:lnSpc>
                       </a:pPr>
                       <a:r>
-                        <a:rPr sz="1476" b="0" i="0">
+                        <a:rPr sz="1639" b="0" i="0">
                           <a:solidFill>
                             <a:srgbClr val="1A1A1A"/>
                           </a:solidFill>
@@ -8347,7 +8907,7 @@
                           <a:ea typeface="Noto Sans JP"/>
                           <a:cs typeface="Noto Sans JP"/>
                         </a:rPr>
-                        <a:t>161/udp・57400</a:t>
+                        <a:t>57400（gNMI）</a:t>
                       </a:r>
                     </a:p>
                   </a:txBody>
@@ -8508,7 +9068,7 @@
                 <a:ea typeface="Noto Sans JP"/>
                 <a:cs typeface="Noto Sans JP"/>
               </a:rPr>
-              <a:t>PIPELINE を既定のまま 1 か月置くと約 $2,000 になる</a:t>
+              <a:t>PIPELINE を既定のまま 1 か月置くと約 $2,100 になる</a:t>
             </a:r>
           </a:p>
         </p:txBody>
@@ -8548,58 +9108,17 @@
           </a:fontRef>
         </p:style>
       </p:cxnSp>
-      <p:sp>
-        <p:nvSpPr>
-          <p:cNvPr id="5" name="TextBox 4"/>
-          <p:cNvSpPr txBox="1"/>
-          <p:nvPr/>
-        </p:nvSpPr>
-        <p:spPr>
-          <a:xfrm>
-            <a:off x="841248" y="1755648"/>
-            <a:ext cx="10509199" cy="354330"/>
-          </a:xfrm>
-          <a:prstGeom prst="rect">
-            <a:avLst/>
-          </a:prstGeom>
-          <a:noFill/>
-        </p:spPr>
-        <p:txBody>
-          <a:bodyPr wrap="square" lIns="0" rIns="0" tIns="0" bIns="0" anchor="t">
-            <a:spAutoFit/>
-          </a:bodyPr>
-          <a:lstStyle/>
-          <a:p>
-            <a:pPr>
-              <a:lnSpc>
-                <a:spcPct val="155000"/>
-              </a:lnSpc>
-            </a:pPr>
-            <a:r>
-              <a:rPr sz="1800" b="0" i="0">
-                <a:solidFill>
-                  <a:srgbClr val="1A1A1A"/>
-                </a:solidFill>
-                <a:latin typeface="Lato"/>
-                <a:ea typeface="Noto Sans JP"/>
-                <a:cs typeface="Noto Sans JP"/>
-              </a:rPr>
-              <a:t>金額は東京の待機の時間課金で、既定の AZ の数のとき（README の「作るもの」）。</a:t>
-            </a:r>
-          </a:p>
-        </p:txBody>
-      </p:sp>
       <p:graphicFrame>
         <p:nvGraphicFramePr>
-          <p:cNvPr id="6" name="Table 5"/>
+          <p:cNvPr id="5" name="Table 4"/>
           <p:cNvGraphicFramePr>
             <a:graphicFrameLocks noGrp="1"/>
           </p:cNvGraphicFramePr>
           <p:nvPr/>
         </p:nvGraphicFramePr>
         <p:xfrm>
-          <a:off x="841248" y="2347722"/>
-          <a:ext cx="10509199" cy="2572664"/>
+          <a:off x="841248" y="1755648"/>
+          <a:ext cx="10509199" cy="2807716"/>
         </p:xfrm>
         <a:graphic>
           <a:graphicData uri="http://schemas.openxmlformats.org/drawingml/2006/table">
@@ -8610,7 +9129,7 @@
                 <a:gridCol w="3503066"/>
                 <a:gridCol w="3503067"/>
               </a:tblGrid>
-              <a:tr h="493776">
+              <a:tr h="538480">
                 <a:tc>
                   <a:txBody>
                     <a:bodyPr wrap="square"/>
@@ -8622,7 +9141,7 @@
                         </a:lnSpc>
                       </a:pPr>
                       <a:r>
-                        <a:rPr sz="1476" b="1" i="0">
+                        <a:rPr sz="1639" b="1" i="0">
                           <a:solidFill>
                             <a:srgbClr val="111110"/>
                           </a:solidFill>
@@ -8654,7 +9173,7 @@
                         </a:lnSpc>
                       </a:pPr>
                       <a:r>
-                        <a:rPr sz="1476" b="1" i="0">
+                        <a:rPr sz="1639" b="1" i="0">
                           <a:solidFill>
                             <a:srgbClr val="111110"/>
                           </a:solidFill>
@@ -8686,7 +9205,7 @@
                         </a:lnSpc>
                       </a:pPr>
                       <a:r>
-                        <a:rPr sz="1476" b="1" i="0">
+                        <a:rPr sz="1639" b="1" i="0">
                           <a:solidFill>
                             <a:srgbClr val="111110"/>
                           </a:solidFill>
@@ -8708,7 +9227,7 @@
                   </a:tcPr>
                 </a:tc>
               </a:tr>
-              <a:tr h="493776">
+              <a:tr h="538480">
                 <a:tc>
                   <a:txBody>
                     <a:bodyPr wrap="square"/>
@@ -8720,7 +9239,7 @@
                         </a:lnSpc>
                       </a:pPr>
                       <a:r>
-                        <a:rPr sz="1476" b="0" i="0">
+                        <a:rPr sz="1639" b="0" i="0">
                           <a:solidFill>
                             <a:srgbClr val="1A1A1A"/>
                           </a:solidFill>
@@ -8752,7 +9271,7 @@
                         </a:lnSpc>
                       </a:pPr>
                       <a:r>
-                        <a:rPr sz="1476" b="0" i="0">
+                        <a:rPr sz="1639" b="0" i="0">
                           <a:solidFill>
                             <a:srgbClr val="1A1A1A"/>
                           </a:solidFill>
@@ -8760,7 +9279,7 @@
                           <a:ea typeface="Noto Sans JP"/>
                           <a:cs typeface="Noto Sans JP"/>
                         </a:rPr>
-                        <a:t>約 $0.05/h</a:t>
+                        <a:t>約 $0.07/h</a:t>
                       </a:r>
                     </a:p>
                   </a:txBody>
@@ -8784,7 +9303,7 @@
                         </a:lnSpc>
                       </a:pPr>
                       <a:r>
-                        <a:rPr sz="1476" b="0" i="0">
+                        <a:rPr sz="1639" b="0" i="0">
                           <a:solidFill>
                             <a:srgbClr val="1A1A1A"/>
                           </a:solidFill>
@@ -8806,7 +9325,7 @@
                   </a:tcPr>
                 </a:tc>
               </a:tr>
-              <a:tr h="597560">
+              <a:tr h="653796">
                 <a:tc>
                   <a:txBody>
                     <a:bodyPr wrap="square"/>
@@ -8818,7 +9337,7 @@
                         </a:lnSpc>
                       </a:pPr>
                       <a:r>
-                        <a:rPr sz="1476" b="0" i="0">
+                        <a:rPr sz="1639" b="0" i="0">
                           <a:solidFill>
                             <a:srgbClr val="1A1A1A"/>
                           </a:solidFill>
@@ -8850,7 +9369,7 @@
                         </a:lnSpc>
                       </a:pPr>
                       <a:r>
-                        <a:rPr sz="1476" b="0" i="0">
+                        <a:rPr sz="1639" b="0" i="0">
                           <a:solidFill>
                             <a:srgbClr val="1A1A1A"/>
                           </a:solidFill>
@@ -8858,7 +9377,7 @@
                           <a:ea typeface="Noto Sans JP"/>
                           <a:cs typeface="Noto Sans JP"/>
                         </a:rPr>
-                        <a:t>約 $0.07/h（KB は +$0.35）</a:t>
+                        <a:t>約 $0.07/h（KB +$0.35）</a:t>
                       </a:r>
                     </a:p>
                   </a:txBody>
@@ -8882,7 +9401,7 @@
                         </a:lnSpc>
                       </a:pPr>
                       <a:r>
-                        <a:rPr sz="1476" b="0" i="0">
+                        <a:rPr sz="1639" b="0" i="0">
                           <a:solidFill>
                             <a:srgbClr val="1A1A1A"/>
                           </a:solidFill>
@@ -8904,7 +9423,7 @@
                   </a:tcPr>
                 </a:tc>
               </a:tr>
-              <a:tr h="493776">
+              <a:tr h="538480">
                 <a:tc>
                   <a:txBody>
                     <a:bodyPr wrap="square"/>
@@ -8916,7 +9435,7 @@
                         </a:lnSpc>
                       </a:pPr>
                       <a:r>
-                        <a:rPr sz="1476" b="0" i="0">
+                        <a:rPr sz="1639" b="0" i="0">
                           <a:solidFill>
                             <a:srgbClr val="1A1A1A"/>
                           </a:solidFill>
@@ -8948,7 +9467,7 @@
                         </a:lnSpc>
                       </a:pPr>
                       <a:r>
-                        <a:rPr sz="1476" b="0" i="0">
+                        <a:rPr sz="1639" b="0" i="0">
                           <a:solidFill>
                             <a:srgbClr val="1A1A1A"/>
                           </a:solidFill>
@@ -8956,7 +9475,7 @@
                           <a:ea typeface="Noto Sans JP"/>
                           <a:cs typeface="Noto Sans JP"/>
                         </a:rPr>
-                        <a:t>約 $2.73/h</a:t>
+                        <a:t>約 $2.85/h</a:t>
                       </a:r>
                     </a:p>
                   </a:txBody>
@@ -8980,7 +9499,7 @@
                         </a:lnSpc>
                       </a:pPr>
                       <a:r>
-                        <a:rPr sz="1476" b="0" i="0">
+                        <a:rPr sz="1639" b="0" i="0">
                           <a:solidFill>
                             <a:srgbClr val="1A1A1A"/>
                           </a:solidFill>
@@ -9002,7 +9521,7 @@
                   </a:tcPr>
                 </a:tc>
               </a:tr>
-              <a:tr h="493776">
+              <a:tr h="538480">
                 <a:tc>
                   <a:txBody>
                     <a:bodyPr wrap="square"/>
@@ -9014,7 +9533,7 @@
                         </a:lnSpc>
                       </a:pPr>
                       <a:r>
-                        <a:rPr sz="1476" b="0" i="0">
+                        <a:rPr sz="1639" b="0" i="0">
                           <a:solidFill>
                             <a:srgbClr val="1A1A1A"/>
                           </a:solidFill>
@@ -9046,7 +9565,7 @@
                         </a:lnSpc>
                       </a:pPr>
                       <a:r>
-                        <a:rPr sz="1476" b="0" i="0">
+                        <a:rPr sz="1639" b="0" i="0">
                           <a:solidFill>
                             <a:srgbClr val="1A1A1A"/>
                           </a:solidFill>
@@ -9078,7 +9597,7 @@
                         </a:lnSpc>
                       </a:pPr>
                       <a:r>
-                        <a:rPr sz="1476" b="0" i="0">
+                        <a:rPr sz="1639" b="0" i="0">
                           <a:solidFill>
                             <a:srgbClr val="1A1A1A"/>
                           </a:solidFill>
@@ -9106,14 +9625,14 @@
       </p:graphicFrame>
       <p:sp>
         <p:nvSpPr>
-          <p:cNvPr id="7" name="TextBox 6"/>
+          <p:cNvPr id="6" name="TextBox 5"/>
           <p:cNvSpPr txBox="1"/>
           <p:nvPr/>
         </p:nvSpPr>
         <p:spPr>
           <a:xfrm>
-            <a:off x="841248" y="5158130"/>
-            <a:ext cx="10509199" cy="708660"/>
+            <a:off x="841248" y="4801108"/>
+            <a:ext cx="10509199" cy="787400"/>
           </a:xfrm>
           <a:prstGeom prst="rect">
             <a:avLst/>
@@ -9132,7 +9651,7 @@
               </a:lnSpc>
             </a:pPr>
             <a:r>
-              <a:rPr sz="1800" b="0" i="0">
+              <a:rPr sz="2000" b="0" i="0">
                 <a:solidFill>
                   <a:srgbClr val="1A1A1A"/>
                 </a:solidFill>
@@ -9140,14 +9659,36 @@
                 <a:ea typeface="Noto Sans JP"/>
                 <a:cs typeface="Noto Sans JP"/>
               </a:rPr>
-              <a:t>PIPELINE と土台で約 $2.80/h、STORES=s3 だけなら約 $1.88/h。使い終わったら当日中に ops/down.sh で消す。</a:t>
-            </a:r>
-          </a:p>
-        </p:txBody>
-      </p:sp>
-      <p:sp>
-        <p:nvSpPr>
-          <p:cNvPr id="8" name="TextBox 7"/>
+              <a:t>PIPELINE と土台で約 $2.92/h、STORES=s3 だけなら約 $1.99/h。使い終わったら当日中に </a:t>
+            </a:r>
+            <a:r>
+              <a:rPr sz="1879" b="0" i="0">
+                <a:solidFill>
+                  <a:srgbClr val="1A1A1A"/>
+                </a:solidFill>
+                <a:latin typeface="Menlo"/>
+                <a:ea typeface="Menlo"/>
+                <a:cs typeface="Menlo"/>
+              </a:rPr>
+              <a:t>ops/down.sh</a:t>
+            </a:r>
+            <a:r>
+              <a:rPr sz="2000" b="0" i="0">
+                <a:solidFill>
+                  <a:srgbClr val="1A1A1A"/>
+                </a:solidFill>
+                <a:latin typeface="Lato"/>
+                <a:ea typeface="Noto Sans JP"/>
+                <a:cs typeface="Noto Sans JP"/>
+              </a:rPr>
+              <a:t> で消す。</a:t>
+            </a:r>
+          </a:p>
+        </p:txBody>
+      </p:sp>
+      <p:sp>
+        <p:nvSpPr>
+          <p:cNvPr id="7" name="TextBox 6"/>
           <p:cNvSpPr txBox="1"/>
           <p:nvPr/>
         </p:nvSpPr>
@@ -9337,7 +9878,7 @@
         <p:spPr>
           <a:xfrm>
             <a:off x="841248" y="1755648"/>
-            <a:ext cx="10509199" cy="3337560"/>
+            <a:ext cx="10509199" cy="3820160"/>
           </a:xfrm>
           <a:prstGeom prst="rect">
             <a:avLst/>
@@ -9355,11 +9896,11 @@
                 <a:spcPct val="155000"/>
               </a:lnSpc>
               <a:spcAft>
-                <a:spcPts val="792"/>
+                <a:spcPts val="880"/>
               </a:spcAft>
             </a:pPr>
             <a:r>
-              <a:rPr sz="1800" b="0" i="0">
+              <a:rPr sz="2000" b="0" i="0">
                 <a:solidFill>
                   <a:srgbClr val="D63A2F"/>
                 </a:solidFill>
@@ -9370,7 +9911,7 @@
               <a:t>・</a:t>
             </a:r>
             <a:r>
-              <a:rPr sz="1800" b="0" i="0">
+              <a:rPr sz="2000" b="0" i="0">
                 <a:solidFill>
                   <a:srgbClr val="1A1A1A"/>
                 </a:solidFill>
@@ -9378,7 +9919,7 @@
                 <a:ea typeface="Noto Sans JP"/>
                 <a:cs typeface="Noto Sans JP"/>
               </a:rPr>
-              <a:t>消す順は workflow → analytics → nautobot → graph → stream → lab → agent → base/core → base/ecr</a:t>
+              <a:t>9 つのルートを workflow から base/ecr まで逆の順に消す</a:t>
             </a:r>
           </a:p>
           <a:p>
@@ -9387,11 +9928,11 @@
                 <a:spcPct val="155000"/>
               </a:lnSpc>
               <a:spcAft>
-                <a:spcPts val="792"/>
+                <a:spcPts val="880"/>
               </a:spcAft>
             </a:pPr>
             <a:r>
-              <a:rPr sz="1800" b="0" i="0">
+              <a:rPr sz="2000" b="0" i="0">
                 <a:solidFill>
                   <a:srgbClr val="D63A2F"/>
                 </a:solidFill>
@@ -9402,7 +9943,7 @@
               <a:t>・</a:t>
             </a:r>
             <a:r>
-              <a:rPr sz="1800" b="0" i="0">
+              <a:rPr sz="2000" b="0" i="0">
                 <a:solidFill>
                   <a:srgbClr val="1A1A1A"/>
                 </a:solidFill>
@@ -9410,7 +9951,7 @@
                 <a:ea typeface="Noto Sans JP"/>
                 <a:cs typeface="Noto Sans JP"/>
               </a:rPr>
-              <a:t>最後に Runtime のロググループと、up.sh が作った SSM のパラメータを消す</a:t>
+              <a:t>続けて Runtime のロググループ、SSM のパラメータ、MSK の SCRAM の secret を消す</a:t>
             </a:r>
           </a:p>
           <a:p>
@@ -9419,11 +9960,11 @@
                 <a:spcPct val="155000"/>
               </a:lnSpc>
               <a:spcAft>
-                <a:spcPts val="792"/>
+                <a:spcPts val="880"/>
               </a:spcAft>
             </a:pPr>
             <a:r>
-              <a:rPr sz="1800" b="0" i="0">
+              <a:rPr sz="2000" b="0" i="0">
                 <a:solidFill>
                   <a:srgbClr val="D63A2F"/>
                 </a:solidFill>
@@ -9434,7 +9975,7 @@
               <a:t>・</a:t>
             </a:r>
             <a:r>
-              <a:rPr sz="1800" b="0" i="0">
+              <a:rPr sz="2000" b="0" i="0">
                 <a:solidFill>
                   <a:srgbClr val="1A1A1A"/>
                 </a:solidFill>
@@ -9442,7 +9983,7 @@
                 <a:ea typeface="Noto Sans JP"/>
                 <a:cs typeface="Noto Sans JP"/>
               </a:rPr>
-              <a:t>KEEP_ECR=1 なら ECR を残す</a:t>
+              <a:t>KMS の鍵は削除を予約する（7 日後に消える）</a:t>
             </a:r>
           </a:p>
           <a:p>
@@ -9451,11 +9992,11 @@
                 <a:spcPct val="155000"/>
               </a:lnSpc>
               <a:spcAft>
-                <a:spcPts val="792"/>
+                <a:spcPts val="880"/>
               </a:spcAft>
             </a:pPr>
             <a:r>
-              <a:rPr sz="1800" b="0" i="0">
+              <a:rPr sz="2000" b="0" i="0">
                 <a:solidFill>
                   <a:srgbClr val="D63A2F"/>
                 </a:solidFill>
@@ -9466,7 +10007,18 @@
               <a:t>・</a:t>
             </a:r>
             <a:r>
-              <a:rPr sz="1800" b="0" i="0">
+              <a:rPr sz="1879" b="0" i="0">
+                <a:solidFill>
+                  <a:srgbClr val="1A1A1A"/>
+                </a:solidFill>
+                <a:latin typeface="Menlo"/>
+                <a:ea typeface="Menlo"/>
+                <a:cs typeface="Menlo"/>
+              </a:rPr>
+              <a:t>KEEP_ECR=1</a:t>
+            </a:r>
+            <a:r>
+              <a:rPr sz="2000" b="0" i="0">
                 <a:solidFill>
                   <a:srgbClr val="1A1A1A"/>
                 </a:solidFill>
@@ -9474,7 +10026,7 @@
                 <a:ea typeface="Noto Sans JP"/>
                 <a:cs typeface="Noto Sans JP"/>
               </a:rPr>
-              <a:t>Runtime の ENI が外れるまで、VPC・サブネット・runtime の SG が残る（時間課金は無い）</a:t>
+              <a:t> なら ECR を残す</a:t>
             </a:r>
           </a:p>
           <a:p>
@@ -9483,11 +10035,11 @@
                 <a:spcPct val="155000"/>
               </a:lnSpc>
               <a:spcAft>
-                <a:spcPts val="792"/>
+                <a:spcPts val="880"/>
               </a:spcAft>
             </a:pPr>
             <a:r>
-              <a:rPr sz="1800" b="0" i="0">
+              <a:rPr sz="2000" b="0" i="0">
                 <a:solidFill>
                   <a:srgbClr val="D63A2F"/>
                 </a:solidFill>
@@ -9498,7 +10050,7 @@
               <a:t>・</a:t>
             </a:r>
             <a:r>
-              <a:rPr sz="1800" b="0" i="0">
+              <a:rPr sz="2000" b="0" i="0">
                 <a:solidFill>
                   <a:srgbClr val="1A1A1A"/>
                 </a:solidFill>
@@ -9506,7 +10058,39 @@
                 <a:ea typeface="Noto Sans JP"/>
                 <a:cs typeface="Noto Sans JP"/>
               </a:rPr>
-              <a:t>graph・workflow・KB の Lambda の ENI は 20〜40 分残り、裏で消す</a:t>
+              <a:t>Runtime の ENI が外れるまで VPC・サブネット・runtime の SG が残る（課金なし）</a:t>
+            </a:r>
+          </a:p>
+          <a:p>
+            <a:pPr marL="0" indent="0">
+              <a:lnSpc>
+                <a:spcPct val="155000"/>
+              </a:lnSpc>
+              <a:spcAft>
+                <a:spcPts val="880"/>
+              </a:spcAft>
+            </a:pPr>
+            <a:r>
+              <a:rPr sz="2000" b="0" i="0">
+                <a:solidFill>
+                  <a:srgbClr val="D63A2F"/>
+                </a:solidFill>
+                <a:latin typeface="Lato"/>
+                <a:ea typeface="Noto Sans JP"/>
+                <a:cs typeface="Noto Sans JP"/>
+              </a:rPr>
+              <a:t>・</a:t>
+            </a:r>
+            <a:r>
+              <a:rPr sz="2000" b="0" i="0">
+                <a:solidFill>
+                  <a:srgbClr val="1A1A1A"/>
+                </a:solidFill>
+                <a:latin typeface="Lato"/>
+                <a:ea typeface="Noto Sans JP"/>
+                <a:cs typeface="Noto Sans JP"/>
+              </a:rPr>
+              <a:t>Lambda の ENI は 20〜40 分残り、裏で消す</a:t>
             </a:r>
           </a:p>
         </p:txBody>

--- a/docs/architecture-managed.pptx
+++ b/docs/architecture-managed.pptx
@@ -616,7 +616,12 @@
           </a:p>
           <a:p>
             <a:r>
-              <a:t>- 数え方: ルートの *.tf をつないで grep -c '^resource "'（2026-10-09、origin/main 9fb0616）。count・for_each で増える実数ではない。元のデッキ（2026-10-08）から変わったのは agent 21 → 22 と stream 37 → 57（013 で gnmic・syslog-ng・GoFlow2 が入り、telegraf-dialin が外れた）。</a:t>
+              <a:t>- 数え方: ルートの *.tf をつないで grep -c '^resource "'（2026-10-10、feat/035-s3-layout b39c543）。count・for_each で増える実数ではない。元のデッキ（2026-10-08）から変わったのは agent 21 → 22 と stream 37 → 57（013 で gnmic・syslog-ng・GoFlow2 が入り、telegraf-dialin が外れた）。</a:t>
+            </a:r>
+          </a:p>
+          <a:p>
+            <a:r>
+              <a:t>- 2026-10-09 の数えからは、base/logs（6）が 035 で増え、graph 10 → 11、analytics 53 → 54 になった。</a:t>
             </a:r>
           </a:p>
           <a:p>
@@ -631,7 +636,7 @@
           </a:p>
           <a:p>
             <a:r>
-              <a:t>- ops/up.sh の順（ROOTS は ops/up.sh:469）: base/ecr → base/core → agent → lab → stream → graph → nautobot → analytics → workflow。graph は base/core のあと裏で始め、stream のあとで待つ。</a:t>
+              <a:t>- ops/up.sh の順（ROOTS は ops/up.sh:470）: base/ecr → base/logs → base/core → agent → lab → stream → graph → nautobot → analytics → workflow。graph は base/core のあと裏で始め、stream のあとで待つ。</a:t>
             </a:r>
           </a:p>
           <a:p>
@@ -1176,7 +1181,7 @@
           </a:p>
           <a:p>
             <a:r>
-              <a:t>- SSM のパラメータはタグ ManagedBy=ops/up.sh のものだけ。secret は Secrets Manager の AmazonMSK_&lt;prefix&gt;-collectors、鍵は alias/&lt;prefix&gt;-msk-scram。値は読まない。</a:t>
+              <a:t>- SSM のパラメータはタグ ManagedBy=ops/up.sh のものだけ。secret は Secrets Manager の AmazonMSK_&lt;prefix&gt;-syslog-ng / -goflow2 / -gnmic（コレクターごと）、鍵は alias/&lt;prefix&gt;-msk-scram。値は読まない。</a:t>
             </a:r>
           </a:p>
           <a:p>
@@ -1192,6 +1197,11 @@
           <a:p>
             <a:r>
               <a:t>- KEEP_ECR=1 の ECR は 7.39 GB で月 約 110 円（docs/deploy.md の「消したあとに残るもの」）。</a:t>
+            </a:r>
+          </a:p>
+          <a:p>
+            <a:r>
+              <a:t>- base/logs（logs のバケット &lt;prefix&gt;-logs-&lt;アカウント&gt;）は消さない（ops/down.sh:129-132）。Firehose が書けなかった行を消したあとでも読むため。空のバケットは無料。</a:t>
             </a:r>
           </a:p>
         </p:txBody>
@@ -5749,7 +5759,7 @@
                 <a:ea typeface="Noto Sans JP"/>
                 <a:cs typeface="Noto Sans JP"/>
               </a:rPr>
-              <a:t>9 つの Terraform ルートを ops/up.sh が順に作る</a:t>
+              <a:t>10 の Terraform ルートを ops/up.sh が順に作る</a:t>
             </a:r>
           </a:p>
         </p:txBody>
@@ -5799,7 +5809,7 @@
         </p:nvGraphicFramePr>
         <p:xfrm>
           <a:off x="841248" y="1755648"/>
-          <a:ext cx="5003140" cy="3038348"/>
+          <a:ext cx="5003140" cy="2971188"/>
         </p:xfrm>
         <a:graphic>
           <a:graphicData uri="http://schemas.openxmlformats.org/drawingml/2006/table">
@@ -5809,7 +5819,7 @@
                 <a:gridCol w="2501570"/>
                 <a:gridCol w="2501570"/>
               </a:tblGrid>
-              <a:tr h="538480">
+              <a:tr h="449072">
                 <a:tc>
                   <a:txBody>
                     <a:bodyPr wrap="square"/>
@@ -5821,7 +5831,7 @@
                         </a:lnSpc>
                       </a:pPr>
                       <a:r>
-                        <a:rPr sz="1639" b="1" i="0">
+                        <a:rPr sz="1312" b="1" i="0">
                           <a:solidFill>
                             <a:srgbClr val="111110"/>
                           </a:solidFill>
@@ -5853,7 +5863,7 @@
                         </a:lnSpc>
                       </a:pPr>
                       <a:r>
-                        <a:rPr sz="1639" b="1" i="0">
+                        <a:rPr sz="1312" b="1" i="0">
                           <a:solidFill>
                             <a:srgbClr val="111110"/>
                           </a:solidFill>
@@ -5875,7 +5885,7 @@
                   </a:tcPr>
                 </a:tc>
               </a:tr>
-              <a:tr h="538480">
+              <a:tr h="449072">
                 <a:tc>
                   <a:txBody>
                     <a:bodyPr wrap="square"/>
@@ -5887,7 +5897,7 @@
                         </a:lnSpc>
                       </a:pPr>
                       <a:r>
-                        <a:rPr sz="1639" b="0" i="0">
+                        <a:rPr sz="1312" b="0" i="0">
                           <a:solidFill>
                             <a:srgbClr val="1A1A1A"/>
                           </a:solidFill>
@@ -5919,7 +5929,7 @@
                         </a:lnSpc>
                       </a:pPr>
                       <a:r>
-                        <a:rPr sz="1639" b="0" i="0">
+                        <a:rPr sz="1312" b="0" i="0">
                           <a:solidFill>
                             <a:srgbClr val="1A1A1A"/>
                           </a:solidFill>
@@ -5941,7 +5951,7 @@
                   </a:tcPr>
                 </a:tc>
               </a:tr>
-              <a:tr h="653796">
+              <a:tr h="449072">
                 <a:tc>
                   <a:txBody>
                     <a:bodyPr wrap="square"/>
@@ -5953,7 +5963,73 @@
                         </a:lnSpc>
                       </a:pPr>
                       <a:r>
-                        <a:rPr sz="1639" b="0" i="0">
+                        <a:rPr sz="1312" b="0" i="0">
+                          <a:solidFill>
+                            <a:srgbClr val="1A1A1A"/>
+                          </a:solidFill>
+                          <a:latin typeface="Lato"/>
+                          <a:ea typeface="Noto Sans JP"/>
+                          <a:cs typeface="Noto Sans JP"/>
+                        </a:rPr>
+                        <a:t>base/logs（6）</a:t>
+                      </a:r>
+                    </a:p>
+                  </a:txBody>
+                  <a:tcPr marL="91440" marR="91440" marT="45720" marB="45720" anchor="ctr">
+                    <a:lnB w="9525" cap="flat">
+                      <a:solidFill>
+                        <a:srgbClr val="DFDFDF"/>
+                      </a:solidFill>
+                    </a:lnB>
+                    <a:noFill/>
+                  </a:tcPr>
+                </a:tc>
+                <a:tc>
+                  <a:txBody>
+                    <a:bodyPr wrap="square"/>
+                    <a:lstStyle/>
+                    <a:p>
+                      <a:pPr>
+                        <a:lnSpc>
+                          <a:spcPct val="135000"/>
+                        </a:lnSpc>
+                      </a:pPr>
+                      <a:r>
+                        <a:rPr sz="1312" b="0" i="0">
+                          <a:solidFill>
+                            <a:srgbClr val="1A1A1A"/>
+                          </a:solidFill>
+                          <a:latin typeface="Lato"/>
+                          <a:ea typeface="Noto Sans JP"/>
+                          <a:cs typeface="Noto Sans JP"/>
+                        </a:rPr>
+                        <a:t>logs のバケット</a:t>
+                      </a:r>
+                    </a:p>
+                  </a:txBody>
+                  <a:tcPr marL="91440" marR="91440" marT="45720" marB="45720" anchor="ctr">
+                    <a:lnB w="9525" cap="flat">
+                      <a:solidFill>
+                        <a:srgbClr val="DFDFDF"/>
+                      </a:solidFill>
+                    </a:lnB>
+                    <a:noFill/>
+                  </a:tcPr>
+                </a:tc>
+              </a:tr>
+              <a:tr h="541324">
+                <a:tc>
+                  <a:txBody>
+                    <a:bodyPr wrap="square"/>
+                    <a:lstStyle/>
+                    <a:p>
+                      <a:pPr>
+                        <a:lnSpc>
+                          <a:spcPct val="135000"/>
+                        </a:lnSpc>
+                      </a:pPr>
+                      <a:r>
+                        <a:rPr sz="1312" b="0" i="0">
                           <a:solidFill>
                             <a:srgbClr val="1A1A1A"/>
                           </a:solidFill>
@@ -5985,7 +6061,7 @@
                         </a:lnSpc>
                       </a:pPr>
                       <a:r>
-                        <a:rPr sz="1639" b="0" i="0">
+                        <a:rPr sz="1312" b="0" i="0">
                           <a:solidFill>
                             <a:srgbClr val="1A1A1A"/>
                           </a:solidFill>
@@ -6007,7 +6083,7 @@
                   </a:tcPr>
                 </a:tc>
               </a:tr>
-              <a:tr h="653796">
+              <a:tr h="541324">
                 <a:tc>
                   <a:txBody>
                     <a:bodyPr wrap="square"/>
@@ -6019,7 +6095,7 @@
                         </a:lnSpc>
                       </a:pPr>
                       <a:r>
-                        <a:rPr sz="1639" b="0" i="0">
+                        <a:rPr sz="1312" b="0" i="0">
                           <a:solidFill>
                             <a:srgbClr val="1A1A1A"/>
                           </a:solidFill>
@@ -6051,7 +6127,7 @@
                         </a:lnSpc>
                       </a:pPr>
                       <a:r>
-                        <a:rPr sz="1639" b="0" i="0">
+                        <a:rPr sz="1312" b="0" i="0">
                           <a:solidFill>
                             <a:srgbClr val="1A1A1A"/>
                           </a:solidFill>
@@ -6073,7 +6149,7 @@
                   </a:tcPr>
                 </a:tc>
               </a:tr>
-              <a:tr h="653796">
+              <a:tr h="541324">
                 <a:tc>
                   <a:txBody>
                     <a:bodyPr wrap="square"/>
@@ -6085,7 +6161,7 @@
                         </a:lnSpc>
                       </a:pPr>
                       <a:r>
-                        <a:rPr sz="1639" b="0" i="0">
+                        <a:rPr sz="1312" b="0" i="0">
                           <a:solidFill>
                             <a:srgbClr val="1A1A1A"/>
                           </a:solidFill>
@@ -6117,7 +6193,7 @@
                         </a:lnSpc>
                       </a:pPr>
                       <a:r>
-                        <a:rPr sz="1639" b="0" i="0">
+                        <a:rPr sz="1312" b="0" i="0">
                           <a:solidFill>
                             <a:srgbClr val="1A1A1A"/>
                           </a:solidFill>
@@ -6151,8 +6227,8 @@
         </p:nvSpPr>
         <p:spPr>
           <a:xfrm>
-            <a:off x="841248" y="5031740"/>
-            <a:ext cx="5003140" cy="787400"/>
+            <a:off x="841248" y="4964580"/>
+            <a:ext cx="5003140" cy="629920"/>
           </a:xfrm>
           <a:prstGeom prst="rect">
             <a:avLst/>
@@ -6171,7 +6247,7 @@
               </a:lnSpc>
             </a:pPr>
             <a:r>
-              <a:rPr sz="2000" b="0" i="0">
+              <a:rPr sz="1600" b="0" i="0">
                 <a:solidFill>
                   <a:srgbClr val="1A1A1A"/>
                 </a:solidFill>
@@ -6194,7 +6270,7 @@
         </p:nvGraphicFramePr>
         <p:xfrm>
           <a:off x="6347308" y="1755648"/>
-          <a:ext cx="5003140" cy="3576828"/>
+          <a:ext cx="5003140" cy="2971188"/>
         </p:xfrm>
         <a:graphic>
           <a:graphicData uri="http://schemas.openxmlformats.org/drawingml/2006/table">
@@ -6204,7 +6280,7 @@
                 <a:gridCol w="2501570"/>
                 <a:gridCol w="2501570"/>
               </a:tblGrid>
-              <a:tr h="538480">
+              <a:tr h="449072">
                 <a:tc>
                   <a:txBody>
                     <a:bodyPr wrap="square"/>
@@ -6216,7 +6292,7 @@
                         </a:lnSpc>
                       </a:pPr>
                       <a:r>
-                        <a:rPr sz="1639" b="1" i="0">
+                        <a:rPr sz="1312" b="1" i="0">
                           <a:solidFill>
                             <a:srgbClr val="111110"/>
                           </a:solidFill>
@@ -6248,7 +6324,7 @@
                         </a:lnSpc>
                       </a:pPr>
                       <a:r>
-                        <a:rPr sz="1639" b="1" i="0">
+                        <a:rPr sz="1312" b="1" i="0">
                           <a:solidFill>
                             <a:srgbClr val="111110"/>
                           </a:solidFill>
@@ -6270,7 +6346,7 @@
                   </a:tcPr>
                 </a:tc>
               </a:tr>
-              <a:tr h="538480">
+              <a:tr h="449072">
                 <a:tc>
                   <a:txBody>
                     <a:bodyPr wrap="square"/>
@@ -6282,7 +6358,7 @@
                         </a:lnSpc>
                       </a:pPr>
                       <a:r>
-                        <a:rPr sz="1639" b="0" i="0">
+                        <a:rPr sz="1312" b="0" i="0">
                           <a:solidFill>
                             <a:srgbClr val="1A1A1A"/>
                           </a:solidFill>
@@ -6314,7 +6390,7 @@
                         </a:lnSpc>
                       </a:pPr>
                       <a:r>
-                        <a:rPr sz="1639" b="0" i="0">
+                        <a:rPr sz="1312" b="0" i="0">
                           <a:solidFill>
                             <a:srgbClr val="1A1A1A"/>
                           </a:solidFill>
@@ -6336,7 +6412,7 @@
                   </a:tcPr>
                 </a:tc>
               </a:tr>
-              <a:tr h="653796">
+              <a:tr h="541324">
                 <a:tc>
                   <a:txBody>
                     <a:bodyPr wrap="square"/>
@@ -6348,7 +6424,7 @@
                         </a:lnSpc>
                       </a:pPr>
                       <a:r>
-                        <a:rPr sz="1639" b="0" i="0">
+                        <a:rPr sz="1312" b="0" i="0">
                           <a:solidFill>
                             <a:srgbClr val="1A1A1A"/>
                           </a:solidFill>
@@ -6380,7 +6456,7 @@
                         </a:lnSpc>
                       </a:pPr>
                       <a:r>
-                        <a:rPr sz="1639" b="0" i="0">
+                        <a:rPr sz="1312" b="0" i="0">
                           <a:solidFill>
                             <a:srgbClr val="1A1A1A"/>
                           </a:solidFill>
@@ -6402,7 +6478,7 @@
                   </a:tcPr>
                 </a:tc>
               </a:tr>
-              <a:tr h="653796">
+              <a:tr h="541324">
                 <a:tc>
                   <a:txBody>
                     <a:bodyPr wrap="square"/>
@@ -6414,7 +6490,7 @@
                         </a:lnSpc>
                       </a:pPr>
                       <a:r>
-                        <a:rPr sz="1639" b="0" i="0">
+                        <a:rPr sz="1312" b="0" i="0">
                           <a:solidFill>
                             <a:srgbClr val="1A1A1A"/>
                           </a:solidFill>
@@ -6422,7 +6498,7 @@
                           <a:ea typeface="Noto Sans JP"/>
                           <a:cs typeface="Noto Sans JP"/>
                         </a:rPr>
-                        <a:t>graph（10）</a:t>
+                        <a:t>graph（11）</a:t>
                       </a:r>
                     </a:p>
                   </a:txBody>
@@ -6446,7 +6522,7 @@
                         </a:lnSpc>
                       </a:pPr>
                       <a:r>
-                        <a:rPr sz="1639" b="0" i="0">
+                        <a:rPr sz="1312" b="0" i="0">
                           <a:solidFill>
                             <a:srgbClr val="1A1A1A"/>
                           </a:solidFill>
@@ -6468,7 +6544,7 @@
                   </a:tcPr>
                 </a:tc>
               </a:tr>
-              <a:tr h="538480">
+              <a:tr h="449072">
                 <a:tc>
                   <a:txBody>
                     <a:bodyPr wrap="square"/>
@@ -6480,7 +6556,7 @@
                         </a:lnSpc>
                       </a:pPr>
                       <a:r>
-                        <a:rPr sz="1639" b="0" i="0">
+                        <a:rPr sz="1312" b="0" i="0">
                           <a:solidFill>
                             <a:srgbClr val="1A1A1A"/>
                           </a:solidFill>
@@ -6512,7 +6588,7 @@
                         </a:lnSpc>
                       </a:pPr>
                       <a:r>
-                        <a:rPr sz="1639" b="0" i="0">
+                        <a:rPr sz="1312" b="0" i="0">
                           <a:solidFill>
                             <a:srgbClr val="1A1A1A"/>
                           </a:solidFill>
@@ -6534,7 +6610,7 @@
                   </a:tcPr>
                 </a:tc>
               </a:tr>
-              <a:tr h="653796">
+              <a:tr h="541324">
                 <a:tc>
                   <a:txBody>
                     <a:bodyPr wrap="square"/>
@@ -6546,7 +6622,7 @@
                         </a:lnSpc>
                       </a:pPr>
                       <a:r>
-                        <a:rPr sz="1639" b="0" i="0">
+                        <a:rPr sz="1312" b="0" i="0">
                           <a:solidFill>
                             <a:srgbClr val="1A1A1A"/>
                           </a:solidFill>
@@ -6554,7 +6630,7 @@
                           <a:ea typeface="Noto Sans JP"/>
                           <a:cs typeface="Noto Sans JP"/>
                         </a:rPr>
-                        <a:t>analytics（53）</a:t>
+                        <a:t>analytics（54）</a:t>
                       </a:r>
                     </a:p>
                   </a:txBody>
@@ -6578,7 +6654,7 @@
                         </a:lnSpc>
                       </a:pPr>
                       <a:r>
-                        <a:rPr sz="1639" b="0" i="0">
+                        <a:rPr sz="1312" b="0" i="0">
                           <a:solidFill>
                             <a:srgbClr val="1A1A1A"/>
                           </a:solidFill>
@@ -7974,7 +8050,7 @@
                 <a:ea typeface="Noto Sans JP"/>
                 <a:cs typeface="Noto Sans JP"/>
               </a:rPr>
-              <a:t>Grafana のルール 4 つと Splunk の保存済みサーチ 4 つが、同じ 4 種を SNS へ出す</a:t>
+              <a:t>Grafana のルール 4 つと Splunk の保存済みサーチ 3 つが、同じ 4 種を SNS へ出す</a:t>
             </a:r>
           </a:p>
           <a:p>
@@ -9878,7 +9954,7 @@
         <p:spPr>
           <a:xfrm>
             <a:off x="841248" y="1755648"/>
-            <a:ext cx="10509199" cy="3820160"/>
+            <a:ext cx="10509199" cy="3775456"/>
           </a:xfrm>
           <a:prstGeom prst="rect">
             <a:avLst/>
@@ -9896,11 +9972,11 @@
                 <a:spcPct val="155000"/>
               </a:lnSpc>
               <a:spcAft>
-                <a:spcPts val="880"/>
+                <a:spcPts val="704"/>
               </a:spcAft>
             </a:pPr>
             <a:r>
-              <a:rPr sz="2000" b="0" i="0">
+              <a:rPr sz="1600" b="0" i="0">
                 <a:solidFill>
                   <a:srgbClr val="D63A2F"/>
                 </a:solidFill>
@@ -9911,7 +9987,7 @@
               <a:t>・</a:t>
             </a:r>
             <a:r>
-              <a:rPr sz="2000" b="0" i="0">
+              <a:rPr sz="1600" b="0" i="0">
                 <a:solidFill>
                   <a:srgbClr val="1A1A1A"/>
                 </a:solidFill>
@@ -9919,7 +9995,7 @@
                 <a:ea typeface="Noto Sans JP"/>
                 <a:cs typeface="Noto Sans JP"/>
               </a:rPr>
-              <a:t>9 つのルートを workflow から base/ecr まで逆の順に消す</a:t>
+              <a:t>base/logs を除く 9 つのルートを workflow から base/ecr まで逆の順に消す</a:t>
             </a:r>
           </a:p>
           <a:p>
@@ -9928,11 +10004,11 @@
                 <a:spcPct val="155000"/>
               </a:lnSpc>
               <a:spcAft>
-                <a:spcPts val="880"/>
+                <a:spcPts val="704"/>
               </a:spcAft>
             </a:pPr>
             <a:r>
-              <a:rPr sz="2000" b="0" i="0">
+              <a:rPr sz="1600" b="0" i="0">
                 <a:solidFill>
                   <a:srgbClr val="D63A2F"/>
                 </a:solidFill>
@@ -9943,7 +10019,7 @@
               <a:t>・</a:t>
             </a:r>
             <a:r>
-              <a:rPr sz="2000" b="0" i="0">
+              <a:rPr sz="1600" b="0" i="0">
                 <a:solidFill>
                   <a:srgbClr val="1A1A1A"/>
                 </a:solidFill>
@@ -9960,11 +10036,11 @@
                 <a:spcPct val="155000"/>
               </a:lnSpc>
               <a:spcAft>
-                <a:spcPts val="880"/>
+                <a:spcPts val="704"/>
               </a:spcAft>
             </a:pPr>
             <a:r>
-              <a:rPr sz="2000" b="0" i="0">
+              <a:rPr sz="1600" b="0" i="0">
                 <a:solidFill>
                   <a:srgbClr val="D63A2F"/>
                 </a:solidFill>
@@ -9975,7 +10051,7 @@
               <a:t>・</a:t>
             </a:r>
             <a:r>
-              <a:rPr sz="2000" b="0" i="0">
+              <a:rPr sz="1600" b="0" i="0">
                 <a:solidFill>
                   <a:srgbClr val="1A1A1A"/>
                 </a:solidFill>
@@ -9992,11 +10068,11 @@
                 <a:spcPct val="155000"/>
               </a:lnSpc>
               <a:spcAft>
-                <a:spcPts val="880"/>
+                <a:spcPts val="704"/>
               </a:spcAft>
             </a:pPr>
             <a:r>
-              <a:rPr sz="2000" b="0" i="0">
+              <a:rPr sz="1600" b="0" i="0">
                 <a:solidFill>
                   <a:srgbClr val="D63A2F"/>
                 </a:solidFill>
@@ -10007,7 +10083,7 @@
               <a:t>・</a:t>
             </a:r>
             <a:r>
-              <a:rPr sz="1879" b="0" i="0">
+              <a:rPr sz="1504" b="0" i="0">
                 <a:solidFill>
                   <a:srgbClr val="1A1A1A"/>
                 </a:solidFill>
@@ -10018,7 +10094,7 @@
               <a:t>KEEP_ECR=1</a:t>
             </a:r>
             <a:r>
-              <a:rPr sz="2000" b="0" i="0">
+              <a:rPr sz="1600" b="0" i="0">
                 <a:solidFill>
                   <a:srgbClr val="1A1A1A"/>
                 </a:solidFill>
@@ -10035,11 +10111,11 @@
                 <a:spcPct val="155000"/>
               </a:lnSpc>
               <a:spcAft>
-                <a:spcPts val="880"/>
+                <a:spcPts val="704"/>
               </a:spcAft>
             </a:pPr>
             <a:r>
-              <a:rPr sz="2000" b="0" i="0">
+              <a:rPr sz="1600" b="0" i="0">
                 <a:solidFill>
                   <a:srgbClr val="D63A2F"/>
                 </a:solidFill>
@@ -10050,7 +10126,7 @@
               <a:t>・</a:t>
             </a:r>
             <a:r>
-              <a:rPr sz="2000" b="0" i="0">
+              <a:rPr sz="1600" b="0" i="0">
                 <a:solidFill>
                   <a:srgbClr val="1A1A1A"/>
                 </a:solidFill>
@@ -10067,11 +10143,11 @@
                 <a:spcPct val="155000"/>
               </a:lnSpc>
               <a:spcAft>
-                <a:spcPts val="880"/>
+                <a:spcPts val="704"/>
               </a:spcAft>
             </a:pPr>
             <a:r>
-              <a:rPr sz="2000" b="0" i="0">
+              <a:rPr sz="1600" b="0" i="0">
                 <a:solidFill>
                   <a:srgbClr val="D63A2F"/>
                 </a:solidFill>
@@ -10082,7 +10158,7 @@
               <a:t>・</a:t>
             </a:r>
             <a:r>
-              <a:rPr sz="2000" b="0" i="0">
+              <a:rPr sz="1600" b="0" i="0">
                 <a:solidFill>
                   <a:srgbClr val="1A1A1A"/>
                 </a:solidFill>
@@ -10091,6 +10167,38 @@
                 <a:cs typeface="Noto Sans JP"/>
               </a:rPr>
               <a:t>Lambda の ENI は 20〜40 分残り、裏で消す</a:t>
+            </a:r>
+          </a:p>
+          <a:p>
+            <a:pPr marL="0" indent="0">
+              <a:lnSpc>
+                <a:spcPct val="155000"/>
+              </a:lnSpc>
+              <a:spcAft>
+                <a:spcPts val="704"/>
+              </a:spcAft>
+            </a:pPr>
+            <a:r>
+              <a:rPr sz="1600" b="0" i="0">
+                <a:solidFill>
+                  <a:srgbClr val="D63A2F"/>
+                </a:solidFill>
+                <a:latin typeface="Lato"/>
+                <a:ea typeface="Noto Sans JP"/>
+                <a:cs typeface="Noto Sans JP"/>
+              </a:rPr>
+              <a:t>・</a:t>
+            </a:r>
+            <a:r>
+              <a:rPr sz="1600" b="0" i="0">
+                <a:solidFill>
+                  <a:srgbClr val="1A1A1A"/>
+                </a:solidFill>
+                <a:latin typeface="Lato"/>
+                <a:ea typeface="Noto Sans JP"/>
+                <a:cs typeface="Noto Sans JP"/>
+              </a:rPr>
+              <a:t>logs のバケットは意図して残す（中身は 7 日で消える）</a:t>
             </a:r>
           </a:p>
         </p:txBody>

--- a/docs/architecture-managed.pptx
+++ b/docs/architecture-managed.pptx
@@ -544,6 +544,11 @@
               <a:t>- Neptune Analytics はトポロジと status を持ち、Web・エージェント・Temporal が読む。Nautobot は機器とケーブルの正。</a:t>
             </a:r>
           </a:p>
+          <a:p>
+            <a:r>
+              <a:t>- Temporal の履歴は Nautobot の RDS に同居する（DB temporal / temporal_visibility。036）。ロール・DB・スキーマは一回きりの init のタスク &lt;prefix&gt;-workflow-init が作る（042。ops/up.sh の手順 8-5）（docs/data-stores.md、docs/workflow.md）。</a:t>
+            </a:r>
+          </a:p>
         </p:txBody>
       </p:sp>
       <p:sp>
@@ -616,12 +621,22 @@
           </a:p>
           <a:p>
             <a:r>
-              <a:t>- 数え方: ルートの *.tf をつないで grep -c '^resource "'（2026-10-10、feat/035-s3-layout b39c543）。count・for_each で増える実数ではない。元のデッキ（2026-10-08）から変わったのは agent 21 → 22 と stream 37 → 57（013 で gnmic・syslog-ng・GoFlow2 が入り、telegraf-dialin が外れた）。</a:t>
-            </a:r>
-          </a:p>
-          <a:p>
-            <a:r>
-              <a:t>- 2026-10-09 の数えからは、base/logs（6）が 035 で増え、graph 10 → 11、analytics 53 → 54 になった。</a:t>
+              <a:t>- 数え方: ルートの *.tf をつないで grep -c '^resource "'（2026-10-12、docs/166-docs-sync bddbcb7）。count・for_each で増える実数ではない。元のデッキ（2026-10-08）から変わったのは agent 21 → 22 と stream 37 → 57（013 で gnmic・syslog-ng・GoFlow2 が入り、telegraf-dialin が外れた）。</a:t>
+            </a:r>
+          </a:p>
+          <a:p>
+            <a:r>
+              <a:t>- 2026-10-09 の数えからは、base/logs（6）が 035 で増え、graph 10 → 11、analytics 53 → 54 になった。2026-10-10 の数えからは base/core 39 → 41、workflow 35 → 37 になった。</a:t>
+            </a:r>
+          </a:p>
+          <a:p>
+            <a:r>
+              <a:t>- workflow には Temporal のサーバーのタスク定義（temporal・ui・worker の 3 コンテナ）と init のタスク定義 &lt;prefix&gt;-workflow-init（042）が入る。Temporal の DB は nautobot の RDS（036）。</a:t>
+            </a:r>
+          </a:p>
+          <a:p>
+            <a:r>
+              <a:t>- base/core の IAM: 閉域の Deny &lt;prefix&gt;-network-perimeter、Web と lab の EC2 に付ける SSM の管理の許可 &lt;prefix&gt;-ssm-agent（047。パラメータの読み取りは含まない）。Nautobot の内部シークレットの Deny DenyNautobotSecrets（044）は Web・Runtime・tools Lambda・lab・lab-debug のロールに付く（docs/architecture/core.md の閉域）。</a:t>
             </a:r>
           </a:p>
           <a:p>
@@ -636,7 +651,7 @@
           </a:p>
           <a:p>
             <a:r>
-              <a:t>- ops/up.sh の順（ROOTS は ops/up.sh:470）: base/ecr → base/logs → base/core → agent → lab → stream → graph → nautobot → analytics → workflow。graph は base/core のあと裏で始め、stream のあとで待つ。</a:t>
+              <a:t>- ops/up.sh の順（ROOTS は ops/up.sh の手順 0「道具と認証」の中で決める）: base/ecr → base/logs → base/core → agent → lab → stream → graph → nautobot → analytics → workflow。graph は base/core のあと裏で始め、stream のあとで待つ。</a:t>
             </a:r>
           </a:p>
           <a:p>
@@ -731,12 +746,12 @@
           </a:p>
           <a:p>
             <a:r>
-              <a:t>- 4: アラートの 4 種は link_down・bgp_down・isis_down・trap。Grafana のルールと Splunk の保存済みサーチの両方が出す（docs/architecture/pipeline.md:34）。</a:t>
-            </a:r>
-          </a:p>
-          <a:p>
-            <a:r>
-              <a:t>- 5: SQS → Temporal → Web の承認タブ → SSM Run Command。承認を押してから承認タブに出るまで数秒〜20 秒（docs/workflow.md:27）。</a:t>
+              <a:t>- 4: アラートの 4 種は link_down・bgp_down・isis_down・trap。Grafana のルールと Splunk の保存済みサーチの両方が出す（docs/architecture/pipeline.md の「異常を見つけるのは Grafana と Splunk」）。</a:t>
+            </a:r>
+          </a:p>
+          <a:p>
+            <a:r>
+              <a:t>- 5: SQS → Temporal → Web の承認タブ → SSM Run Command。承認を押してから承認タブに出るまで数秒〜20 秒（docs/workflow.md の「流れ」）。</a:t>
             </a:r>
           </a:p>
           <a:p>
@@ -826,6 +841,11 @@
           </a:p>
           <a:p>
             <a:r>
+              <a:t>- MSK のブローカーは allow.everyone.if.no.acl.found=false と auto.create.topics.enable=false（2026-10-10）。SCRAM の 3 つは Spark が入れる ACL のトピックにだけ書け、トピックは書き込みではできない（docs/architecture/resources/msk.md）。</a:t>
+            </a:r>
+          </a:p>
+          <a:p>
+            <a:r>
               <a:t>- 受け口: trap 162/udp、syslog 5140/udp、NetFlow 2055/udp、sFlow 6343/udp（lab の管理網 → NLB）。</a:t>
             </a:r>
           </a:p>
@@ -901,17 +921,17 @@
           <a:lstStyle/>
           <a:p>
             <a:r>
-              <a:t>- アラートの集め方: docs/architecture/pipeline.md:34。SNS のトピックは &lt;prefix&gt;-alerts（土台）。</a:t>
-            </a:r>
-          </a:p>
-          <a:p>
-            <a:r>
-              <a:t>- 障害の履歴: Lambda graph-status が Firehose で S3 Tables の alert_events に追記（docs/architecture/pipeline.md:35）。</a:t>
-            </a:r>
-          </a:p>
-          <a:p>
-            <a:r>
-              <a:t>- 修復案は S3 Tables の proposal_events だけに置き、書くのは worker だけ（docs/architecture/workflow.md:21）。</a:t>
+              <a:t>- アラートの集め方: docs/architecture/pipeline.md の「異常を見つけるのは Grafana と Splunk」。SNS のトピックは &lt;prefix&gt;-alerts（土台）。</a:t>
+            </a:r>
+          </a:p>
+          <a:p>
+            <a:r>
+              <a:t>- 障害の履歴: Lambda graph-status が Firehose で S3 Tables の alert_events に追記（docs/architecture/pipeline.md の同じ箇条）。</a:t>
+            </a:r>
+          </a:p>
+          <a:p>
+            <a:r>
+              <a:t>- 修復案は S3 Tables の proposal_events だけに置き、書くのは worker だけ（docs/architecture/workflow.md の「修復案の置き場」）。</a:t>
             </a:r>
           </a:p>
         </p:txBody>
@@ -1001,7 +1021,12 @@
           </a:p>
           <a:p>
             <a:r>
-              <a:t>- 開けていないもの: Temporal の gRPC 7233、Splunk の管理 API 8089 の外からの受信。Kafbat UI は Web の EC2 の中なので SG を通らない。</a:t>
+              <a:t>- workflow の行: web → workflow 8233（Temporal UI）、workflow → nautobot_db 5432（Temporal の履歴。036）、workflow → workflow 6933〜6939 / 7233〜7239（Temporal のサーバーの membership と gRPC。デプロイ中の新旧 2 タスクどうし。自分宛てだけ）。</a:t>
+            </a:r>
+          </a:p>
+          <a:p>
+            <a:r>
+              <a:t>- 開けていないもの: Temporal の gRPC 7233〜7239 と membership 6933〜6939 の workflow のタスクの外からの受信、Splunk の管理 API 8089 の外からの受信。Kafbat UI は Web の EC2 の中なので SG を通らない。</a:t>
             </a:r>
           </a:p>
           <a:p>
@@ -1081,7 +1106,7 @@
           </a:p>
           <a:p>
             <a:r>
-              <a:t>- 正は ops/up.sh の COST_CENTS の式（ops/up.sh:556〜）。機能ごとに式を切り出して計算した値: 土台 7 セント、AGENT +7、KB +35、PIPELINE +285（STORES 既定）、WORKFLOW +9、PIPELINE と土台 292、STORES=s3 だけ 199。README.md の「作るもの」と同じ。</a:t>
+              <a:t>- 正は ops/up.sh の COST_CENTS の式（ops/up.sh の費用の目安。手順 0 の終わりのコメントと COST_CENTS）。機能ごとに式を切り出して計算した値: 土台 7 セント、AGENT +7、KB +35、PIPELINE +285（STORES 既定）、WORKFLOW +9、PIPELINE と土台 292、STORES=s3 だけ 199。README.md の「作るもの」と同じ。</a:t>
             </a:r>
           </a:p>
           <a:p>
@@ -1201,7 +1226,7 @@
           </a:p>
           <a:p>
             <a:r>
-              <a:t>- base/logs（logs のバケット &lt;prefix&gt;-logs-&lt;アカウント&gt;）は消さない（ops/down.sh:129-132）。Firehose が書けなかった行を消したあとでも読むため。空のバケットは無料。</a:t>
+              <a:t>- base/logs（logs のバケット &lt;prefix&gt;-logs-&lt;アカウント&gt;）は消さない（ops/down.sh の頭のコメントと、終わりの「logs のバケット … は残す」の表示）。Firehose が書けなかった行を消したあとでも読むため。空のバケットは無料。</a:t>
             </a:r>
           </a:p>
         </p:txBody>
@@ -4462,7 +4487,7 @@
                 <a:ea typeface="Menlo"/>
                 <a:cs typeface="Menlo"/>
               </a:rPr>
-              <a:t>2026-10-09  /  docs/architecture/、README.md、docs/deploy.md、ops/up.sh・down.sh、IaC/terraform/aws-managed/</a:t>
+              <a:t>2026-10-12  /  docs/architecture/、README.md、docs/deploy.md、ops/up.sh・down.sh、IaC/terraform/aws-managed/</a:t>
             </a:r>
           </a:p>
         </p:txBody>
@@ -6037,7 +6062,7 @@
                           <a:ea typeface="Noto Sans JP"/>
                           <a:cs typeface="Noto Sans JP"/>
                         </a:rPr>
-                        <a:t>base/core（39）</a:t>
+                        <a:t>base/core（41）</a:t>
                       </a:r>
                     </a:p>
                   </a:txBody>
@@ -6169,7 +6194,7 @@
                           <a:ea typeface="Noto Sans JP"/>
                           <a:cs typeface="Noto Sans JP"/>
                         </a:rPr>
-                        <a:t>workflow（35）</a:t>
+                        <a:t>workflow（37）</a:t>
                       </a:r>
                     </a:p>
                   </a:txBody>

--- a/docs/architecture-managed.pptx
+++ b/docs/architecture-managed.pptx
@@ -1016,7 +1016,7 @@
           </a:p>
           <a:p>
             <a:r>
-              <a:t>- ほかの行: spark → splunk 8088（HEC）、nautobot → nautobot_db 5432、msk どうし 9092〜9098、spark どうし全 TCP、Splunk のクラスター内 8089・9887・9997。</a:t>
+              <a:t>- ほかの行: spark → splunk 8088（HEC）、nautobot → nautobot_db 5432、msk どうし 9092〜9098、spark どうし全 TCP、Splunk のクラスター内 8089・9887・9997、lambda → splunk 8089（tools の Lambda の search_splunk。SG lambda を付ける 3 つの Lambda から届く。054）。</a:t>
             </a:r>
           </a:p>
           <a:p>
@@ -1026,7 +1026,7 @@
           </a:p>
           <a:p>
             <a:r>
-              <a:t>- 開けていないもの: Temporal の gRPC 7233〜7239 と membership 6933〜6939 の workflow のタスクの外からの受信、Splunk の管理 API 8089 の外からの受信。Kafbat UI は Web の EC2 の中なので SG を通らない。</a:t>
+              <a:t>- 開けていないもの: Temporal の gRPC 7233〜7239 と membership 6933〜6939 の workflow のタスクの外からの受信、Splunk の管理 API 8089 の splunk どうしと lambda 以外からの受信（runtime・web からは開けない）。Kafbat UI は Web の EC2 の中なので SG を通らない。</a:t>
             </a:r>
           </a:p>
           <a:p>
